--- a/CAPSTONE_DELIVERABLES/Snipper_Tool_Reality_vs_Official_Paris.pptx
+++ b/CAPSTONE_DELIVERABLES/Snipper_Tool_Reality_vs_Official_Paris.pptx
@@ -32,6 +32,9 @@
     <p:sldId id="280" r:id="rId31"/>
     <p:sldId id="281" r:id="rId32"/>
     <p:sldId id="282" r:id="rId33"/>
+    <p:sldId id="283" r:id="rId34"/>
+    <p:sldId id="284" r:id="rId35"/>
+    <p:sldId id="285" r:id="rId36"/>
   </p:sldIdLst>
   <p:sldSz cx="9144000" cy="6858000" type="screen4x3"/>
   <p:notesSz cx="6858000" cy="9144000"/>
@@ -7464,6 +7467,555 @@
 </p:sld>
 </file>
 
+<file path=ppt/slides/slide28.xml><?xml version="1.0" encoding="utf-8"?>
+<p:sld xmlns:a="http://schemas.openxmlformats.org/drawingml/2006/main" xmlns:p="http://schemas.openxmlformats.org/presentationml/2006/main" xmlns:r="http://schemas.openxmlformats.org/officeDocument/2006/relationships">
+  <p:cSld>
+    <p:bg>
+      <p:bgPr>
+        <a:solidFill>
+          <a:srgbClr val="F5F5F5"/>
+        </a:solidFill>
+        <a:effectLst/>
+      </p:bgPr>
+    </p:bg>
+    <p:spTree>
+      <p:nvGrpSpPr>
+        <p:cNvPr id="1" name=""/>
+        <p:cNvGrpSpPr/>
+        <p:nvPr/>
+      </p:nvGrpSpPr>
+      <p:grpSpPr/>
+      <p:sp>
+        <p:nvSpPr>
+          <p:cNvPr id="2" name="TextBox 1"/>
+          <p:cNvSpPr txBox="1"/>
+          <p:nvPr/>
+        </p:nvSpPr>
+        <p:spPr>
+          <a:xfrm>
+            <a:off x="457200" y="274320"/>
+            <a:ext cx="8229600" cy="731520"/>
+          </a:xfrm>
+          <a:prstGeom prst="rect">
+            <a:avLst/>
+          </a:prstGeom>
+          <a:noFill/>
+        </p:spPr>
+        <p:txBody>
+          <a:bodyPr wrap="none">
+            <a:spAutoFit/>
+          </a:bodyPr>
+          <a:lstStyle/>
+          <a:p>
+            <a:pPr>
+              <a:defRPr sz="4000" b="1">
+                <a:solidFill>
+                  <a:srgbClr val="1F4D76"/>
+                </a:solidFill>
+              </a:defRPr>
+            </a:pPr>
+            <a:r>
+              <a:t>Complete Budget Reality: Where SMIC Families Stand</a:t>
+            </a:r>
+          </a:p>
+        </p:txBody>
+      </p:sp>
+      <p:sp>
+        <p:nvSpPr>
+          <p:cNvPr id="3" name="TextBox 2"/>
+          <p:cNvSpPr txBox="1"/>
+          <p:nvPr/>
+        </p:nvSpPr>
+        <p:spPr>
+          <a:xfrm>
+            <a:off x="457200" y="1097280"/>
+            <a:ext cx="8229600" cy="457200"/>
+          </a:xfrm>
+          <a:prstGeom prst="rect">
+            <a:avLst/>
+          </a:prstGeom>
+          <a:noFill/>
+        </p:spPr>
+        <p:txBody>
+          <a:bodyPr wrap="none">
+            <a:spAutoFit/>
+          </a:bodyPr>
+          <a:lstStyle/>
+          <a:p>
+            <a:pPr>
+              <a:defRPr sz="2400">
+                <a:solidFill>
+                  <a:srgbClr val="646464"/>
+                </a:solidFill>
+              </a:defRPr>
+            </a:pPr>
+            <a:r>
+              <a:t>All Essential Monthly Costs vs. Income</a:t>
+            </a:r>
+          </a:p>
+        </p:txBody>
+      </p:sp>
+      <p:pic>
+        <p:nvPicPr>
+          <p:cNvPr id="4" name="Picture 3" descr="image.png"/>
+          <p:cNvPicPr>
+            <a:picLocks noChangeAspect="1"/>
+          </p:cNvPicPr>
+          <p:nvPr/>
+        </p:nvPicPr>
+        <p:blipFill>
+          <a:blip r:embed="rId2"/>
+          <a:stretch>
+            <a:fillRect/>
+          </a:stretch>
+        </p:blipFill>
+        <p:spPr>
+          <a:xfrm>
+            <a:off x="457200" y="1828800"/>
+            <a:ext cx="8229600" cy="3472263"/>
+          </a:xfrm>
+          <a:prstGeom prst="rect">
+            <a:avLst/>
+          </a:prstGeom>
+        </p:spPr>
+      </p:pic>
+    </p:spTree>
+  </p:cSld>
+  <p:clrMapOvr>
+    <a:masterClrMapping/>
+  </p:clrMapOvr>
+</p:sld>
+</file>
+
+<file path=ppt/slides/slide29.xml><?xml version="1.0" encoding="utf-8"?>
+<p:sld xmlns:a="http://schemas.openxmlformats.org/drawingml/2006/main" xmlns:p="http://schemas.openxmlformats.org/presentationml/2006/main" xmlns:r="http://schemas.openxmlformats.org/officeDocument/2006/relationships">
+  <p:cSld>
+    <p:bg>
+      <p:bgPr>
+        <a:solidFill>
+          <a:srgbClr val="F5F5F5"/>
+        </a:solidFill>
+        <a:effectLst/>
+      </p:bgPr>
+    </p:bg>
+    <p:spTree>
+      <p:nvGrpSpPr>
+        <p:cNvPr id="1" name=""/>
+        <p:cNvGrpSpPr/>
+        <p:nvPr/>
+      </p:nvGrpSpPr>
+      <p:grpSpPr/>
+      <p:sp>
+        <p:nvSpPr>
+          <p:cNvPr id="2" name="TextBox 1"/>
+          <p:cNvSpPr txBox="1"/>
+          <p:nvPr/>
+        </p:nvSpPr>
+        <p:spPr>
+          <a:xfrm>
+            <a:off x="457200" y="274320"/>
+            <a:ext cx="8229600" cy="548640"/>
+          </a:xfrm>
+          <a:prstGeom prst="rect">
+            <a:avLst/>
+          </a:prstGeom>
+          <a:noFill/>
+        </p:spPr>
+        <p:txBody>
+          <a:bodyPr wrap="none">
+            <a:spAutoFit/>
+          </a:bodyPr>
+          <a:lstStyle/>
+          <a:p>
+            <a:pPr>
+              <a:defRPr sz="3600" b="1">
+                <a:solidFill>
+                  <a:srgbClr val="1F4D76"/>
+                </a:solidFill>
+              </a:defRPr>
+            </a:pPr>
+            <a:r>
+              <a:t>The Structural Deficit: Income vs. Reality</a:t>
+            </a:r>
+          </a:p>
+        </p:txBody>
+      </p:sp>
+      <p:sp>
+        <p:nvSpPr>
+          <p:cNvPr id="3" name="Rectangle 2"/>
+          <p:cNvSpPr/>
+          <p:nvPr/>
+        </p:nvSpPr>
+        <p:spPr>
+          <a:xfrm>
+            <a:off x="457200" y="1097280"/>
+            <a:ext cx="3840480" cy="4114800"/>
+          </a:xfrm>
+          <a:prstGeom prst="rect">
+            <a:avLst/>
+          </a:prstGeom>
+          <a:solidFill>
+            <a:srgbClr val="FFF0F0"/>
+          </a:solidFill>
+          <a:ln w="25400">
+            <a:solidFill>
+              <a:srgbClr val="C80000"/>
+            </a:solidFill>
+          </a:ln>
+        </p:spPr>
+        <p:style>
+          <a:lnRef idx="1">
+            <a:schemeClr val="accent1"/>
+          </a:lnRef>
+          <a:fillRef idx="3">
+            <a:schemeClr val="accent1"/>
+          </a:fillRef>
+          <a:effectRef idx="2">
+            <a:schemeClr val="accent1"/>
+          </a:effectRef>
+          <a:fontRef idx="minor">
+            <a:schemeClr val="lt1"/>
+          </a:fontRef>
+        </p:style>
+        <p:txBody>
+          <a:bodyPr rtlCol="0" anchor="ctr" tIns="182880" lIns="182880" rIns="182880" wrap="square"/>
+          <a:lstStyle/>
+          <a:p>
+            <a:pPr algn="ctr">
+              <a:defRPr sz="1800" b="1">
+                <a:solidFill>
+                  <a:srgbClr val="C80000"/>
+                </a:solidFill>
+              </a:defRPr>
+            </a:pPr>
+            <a:r>
+              <a:t>SMIC FAMILY</a:t>
+            </a:r>
+          </a:p>
+          <a:p>
+            <a:pPr>
+              <a:defRPr sz="1100"/>
+            </a:pPr>
+            <a:r>
+              <a:t>Monthly Income: €1,750</a:t>
+            </a:r>
+          </a:p>
+          <a:p>
+            <a:pPr>
+              <a:defRPr sz="1100"/>
+            </a:pPr>
+          </a:p>
+          <a:p>
+            <a:pPr>
+              <a:defRPr sz="1100"/>
+            </a:pPr>
+            <a:r>
+              <a:t>Essential Costs:</a:t>
+            </a:r>
+          </a:p>
+          <a:p>
+            <a:pPr>
+              <a:defRPr sz="1100"/>
+            </a:pPr>
+            <a:r>
+              <a:t>• Housing: €725</a:t>
+            </a:r>
+          </a:p>
+          <a:p>
+            <a:pPr>
+              <a:defRPr sz="1100"/>
+            </a:pPr>
+            <a:r>
+              <a:t>• Food: €304</a:t>
+            </a:r>
+          </a:p>
+          <a:p>
+            <a:pPr>
+              <a:defRPr sz="1100"/>
+            </a:pPr>
+            <a:r>
+              <a:t>• Utilities: €150</a:t>
+            </a:r>
+          </a:p>
+          <a:p>
+            <a:pPr>
+              <a:defRPr sz="1100"/>
+            </a:pPr>
+            <a:r>
+              <a:t>• Childcare: €200</a:t>
+            </a:r>
+          </a:p>
+          <a:p>
+            <a:pPr>
+              <a:defRPr sz="1100"/>
+            </a:pPr>
+            <a:r>
+              <a:t>• Transport: €100</a:t>
+            </a:r>
+          </a:p>
+          <a:p>
+            <a:pPr>
+              <a:defRPr sz="1100"/>
+            </a:pPr>
+            <a:r>
+              <a:t>• Other: €245</a:t>
+            </a:r>
+          </a:p>
+          <a:p>
+            <a:pPr>
+              <a:defRPr sz="1100"/>
+            </a:pPr>
+          </a:p>
+          <a:p>
+            <a:pPr>
+              <a:defRPr sz="1100"/>
+            </a:pPr>
+            <a:r>
+              <a:t>TOTAL: €1,824</a:t>
+            </a:r>
+          </a:p>
+          <a:p>
+            <a:pPr>
+              <a:defRPr sz="1100"/>
+            </a:pPr>
+          </a:p>
+          <a:p>
+            <a:pPr>
+              <a:defRPr sz="1100" b="1">
+                <a:solidFill>
+                  <a:srgbClr val="C80000"/>
+                </a:solidFill>
+              </a:defRPr>
+            </a:pPr>
+            <a:r>
+              <a:t>MONTHLY DEFICIT:</a:t>
+            </a:r>
+          </a:p>
+          <a:p>
+            <a:pPr>
+              <a:defRPr sz="1100"/>
+            </a:pPr>
+            <a:r>
+              <a:t>-€74 per month</a:t>
+            </a:r>
+          </a:p>
+          <a:p>
+            <a:pPr>
+              <a:defRPr sz="1100"/>
+            </a:pPr>
+          </a:p>
+          <a:p>
+            <a:pPr>
+              <a:defRPr sz="1100"/>
+            </a:pPr>
+            <a:r>
+              <a:t>Government transfers</a:t>
+            </a:r>
+          </a:p>
+          <a:p>
+            <a:pPr>
+              <a:defRPr sz="1100" b="1">
+                <a:solidFill>
+                  <a:srgbClr val="C80000"/>
+                </a:solidFill>
+              </a:defRPr>
+            </a:pPr>
+            <a:r>
+              <a:t>required to break even</a:t>
+            </a:r>
+          </a:p>
+        </p:txBody>
+      </p:sp>
+      <p:sp>
+        <p:nvSpPr>
+          <p:cNvPr id="4" name="Rectangle 3"/>
+          <p:cNvSpPr/>
+          <p:nvPr/>
+        </p:nvSpPr>
+        <p:spPr>
+          <a:xfrm>
+            <a:off x="4846320" y="1097280"/>
+            <a:ext cx="3840480" cy="4114800"/>
+          </a:xfrm>
+          <a:prstGeom prst="rect">
+            <a:avLst/>
+          </a:prstGeom>
+          <a:solidFill>
+            <a:srgbClr val="F0FFF0"/>
+          </a:solidFill>
+          <a:ln w="25400">
+            <a:solidFill>
+              <a:srgbClr val="009600"/>
+            </a:solidFill>
+          </a:ln>
+        </p:spPr>
+        <p:style>
+          <a:lnRef idx="1">
+            <a:schemeClr val="accent1"/>
+          </a:lnRef>
+          <a:fillRef idx="3">
+            <a:schemeClr val="accent1"/>
+          </a:fillRef>
+          <a:effectRef idx="2">
+            <a:schemeClr val="accent1"/>
+          </a:effectRef>
+          <a:fontRef idx="minor">
+            <a:schemeClr val="lt1"/>
+          </a:fontRef>
+        </p:style>
+        <p:txBody>
+          <a:bodyPr rtlCol="0" anchor="ctr" tIns="182880" lIns="182880" rIns="182880" wrap="square"/>
+          <a:lstStyle/>
+          <a:p>
+            <a:pPr algn="ctr">
+              <a:defRPr sz="1800" b="1">
+                <a:solidFill>
+                  <a:srgbClr val="009600"/>
+                </a:solidFill>
+              </a:defRPr>
+            </a:pPr>
+            <a:r>
+              <a:t>MEDIAN FAMILY</a:t>
+            </a:r>
+          </a:p>
+          <a:p>
+            <a:pPr>
+              <a:defRPr sz="1100"/>
+            </a:pPr>
+            <a:r>
+              <a:t>Monthly Income: €3,500</a:t>
+            </a:r>
+          </a:p>
+          <a:p>
+            <a:pPr>
+              <a:defRPr sz="1100"/>
+            </a:pPr>
+          </a:p>
+          <a:p>
+            <a:pPr>
+              <a:defRPr sz="1100"/>
+            </a:pPr>
+            <a:r>
+              <a:t>Essential Costs:</a:t>
+            </a:r>
+          </a:p>
+          <a:p>
+            <a:pPr>
+              <a:defRPr sz="1100"/>
+            </a:pPr>
+            <a:r>
+              <a:t>• Housing: €1,150</a:t>
+            </a:r>
+          </a:p>
+          <a:p>
+            <a:pPr>
+              <a:defRPr sz="1100"/>
+            </a:pPr>
+            <a:r>
+              <a:t>• Food: €304</a:t>
+            </a:r>
+          </a:p>
+          <a:p>
+            <a:pPr>
+              <a:defRPr sz="1100"/>
+            </a:pPr>
+            <a:r>
+              <a:t>• Utilities: €150</a:t>
+            </a:r>
+          </a:p>
+          <a:p>
+            <a:pPr>
+              <a:defRPr sz="1100"/>
+            </a:pPr>
+            <a:r>
+              <a:t>• Childcare: €200</a:t>
+            </a:r>
+          </a:p>
+          <a:p>
+            <a:pPr>
+              <a:defRPr sz="1100"/>
+            </a:pPr>
+            <a:r>
+              <a:t>• Transport: €100</a:t>
+            </a:r>
+          </a:p>
+          <a:p>
+            <a:pPr>
+              <a:defRPr sz="1100"/>
+            </a:pPr>
+            <a:r>
+              <a:t>• Other: €245</a:t>
+            </a:r>
+          </a:p>
+          <a:p>
+            <a:pPr>
+              <a:defRPr sz="1100"/>
+            </a:pPr>
+          </a:p>
+          <a:p>
+            <a:pPr>
+              <a:defRPr sz="1100"/>
+            </a:pPr>
+            <a:r>
+              <a:t>TOTAL: €2,249</a:t>
+            </a:r>
+          </a:p>
+          <a:p>
+            <a:pPr>
+              <a:defRPr sz="1100"/>
+            </a:pPr>
+          </a:p>
+          <a:p>
+            <a:pPr>
+              <a:defRPr sz="1100" b="1">
+                <a:solidFill>
+                  <a:srgbClr val="009600"/>
+                </a:solidFill>
+              </a:defRPr>
+            </a:pPr>
+            <a:r>
+              <a:t>MONTHLY SURPLUS:</a:t>
+            </a:r>
+          </a:p>
+          <a:p>
+            <a:pPr>
+              <a:defRPr sz="1100"/>
+            </a:pPr>
+            <a:r>
+              <a:t>+€1,251 per month</a:t>
+            </a:r>
+          </a:p>
+          <a:p>
+            <a:pPr>
+              <a:defRPr sz="1100"/>
+            </a:pPr>
+          </a:p>
+          <a:p>
+            <a:pPr>
+              <a:defRPr sz="1100"/>
+            </a:pPr>
+            <a:r>
+              <a:t>Can save, invest,</a:t>
+            </a:r>
+          </a:p>
+          <a:p>
+            <a:pPr>
+              <a:defRPr sz="1100"/>
+            </a:pPr>
+            <a:r>
+              <a:t>handle emergencies</a:t>
+            </a:r>
+          </a:p>
+        </p:txBody>
+      </p:sp>
+    </p:spTree>
+  </p:cSld>
+  <p:clrMapOvr>
+    <a:masterClrMapping/>
+  </p:clrMapOvr>
+</p:sld>
+</file>
+
 <file path=ppt/slides/slide3.xml><?xml version="1.0" encoding="utf-8"?>
 <p:sld xmlns:a="http://schemas.openxmlformats.org/drawingml/2006/main" xmlns:p="http://schemas.openxmlformats.org/presentationml/2006/main" xmlns:r="http://schemas.openxmlformats.org/officeDocument/2006/relationships">
   <p:cSld>
@@ -7819,6 +8371,246 @@
             </a:pPr>
             <a:r>
               <a:t>  • Wine, chocolate, treats - the cost of living, not just surviving</a:t>
+            </a:r>
+          </a:p>
+        </p:txBody>
+      </p:sp>
+    </p:spTree>
+  </p:cSld>
+  <p:clrMapOvr>
+    <a:masterClrMapping/>
+  </p:clrMapOvr>
+</p:sld>
+</file>
+
+<file path=ppt/slides/slide30.xml><?xml version="1.0" encoding="utf-8"?>
+<p:sld xmlns:a="http://schemas.openxmlformats.org/drawingml/2006/main" xmlns:p="http://schemas.openxmlformats.org/presentationml/2006/main" xmlns:r="http://schemas.openxmlformats.org/officeDocument/2006/relationships">
+  <p:cSld>
+    <p:bg>
+      <p:bgPr>
+        <a:solidFill>
+          <a:srgbClr val="F5F5F5"/>
+        </a:solidFill>
+        <a:effectLst/>
+      </p:bgPr>
+    </p:bg>
+    <p:spTree>
+      <p:nvGrpSpPr>
+        <p:cNvPr id="1" name=""/>
+        <p:cNvGrpSpPr/>
+        <p:nvPr/>
+      </p:nvGrpSpPr>
+      <p:grpSpPr/>
+      <p:sp>
+        <p:nvSpPr>
+          <p:cNvPr id="2" name="TextBox 1"/>
+          <p:cNvSpPr txBox="1"/>
+          <p:nvPr/>
+        </p:nvSpPr>
+        <p:spPr>
+          <a:xfrm>
+            <a:off x="457200" y="274320"/>
+            <a:ext cx="8229600" cy="548640"/>
+          </a:xfrm>
+          <a:prstGeom prst="rect">
+            <a:avLst/>
+          </a:prstGeom>
+          <a:noFill/>
+        </p:spPr>
+        <p:txBody>
+          <a:bodyPr wrap="none">
+            <a:spAutoFit/>
+          </a:bodyPr>
+          <a:lstStyle/>
+          <a:p>
+            <a:pPr>
+              <a:defRPr sz="3600" b="1">
+                <a:solidFill>
+                  <a:srgbClr val="1F4D76"/>
+                </a:solidFill>
+              </a:defRPr>
+            </a:pPr>
+            <a:r>
+              <a:t>Why This Matters: Poverty is Structural</a:t>
+            </a:r>
+          </a:p>
+        </p:txBody>
+      </p:sp>
+      <p:sp>
+        <p:nvSpPr>
+          <p:cNvPr id="3" name="TextBox 2"/>
+          <p:cNvSpPr txBox="1"/>
+          <p:nvPr/>
+        </p:nvSpPr>
+        <p:spPr>
+          <a:xfrm>
+            <a:off x="640080" y="1097280"/>
+            <a:ext cx="7863840" cy="4389120"/>
+          </a:xfrm>
+          <a:prstGeom prst="rect">
+            <a:avLst/>
+          </a:prstGeom>
+          <a:noFill/>
+        </p:spPr>
+        <p:txBody>
+          <a:bodyPr wrap="square">
+            <a:spAutoFit/>
+          </a:bodyPr>
+          <a:lstStyle/>
+          <a:p>
+            <a:pPr>
+              <a:defRPr sz="1400" b="1">
+                <a:solidFill>
+                  <a:srgbClr val="C80000"/>
+                </a:solidFill>
+              </a:defRPr>
+            </a:pPr>
+            <a:r>
+              <a:t>SMIC families cannot survive on SMIC income alone.</a:t>
+            </a:r>
+          </a:p>
+          <a:p>
+            <a:pPr>
+              <a:defRPr sz="1400">
+                <a:solidFill>
+                  <a:srgbClr val="000000"/>
+                </a:solidFill>
+              </a:defRPr>
+            </a:pPr>
+          </a:p>
+          <a:p>
+            <a:pPr>
+              <a:defRPr sz="1400">
+                <a:solidFill>
+                  <a:srgbClr val="000000"/>
+                </a:solidFill>
+              </a:defRPr>
+            </a:pPr>
+            <a:r>
+              <a:t>Government transfers (CAF, housing allowance: €300-550/month) are</a:t>
+            </a:r>
+          </a:p>
+          <a:p>
+            <a:pPr>
+              <a:defRPr sz="1400">
+                <a:solidFill>
+                  <a:srgbClr val="000000"/>
+                </a:solidFill>
+              </a:defRPr>
+            </a:pPr>
+            <a:r>
+              <a:t>structural survival requirement, not supplemental help.</a:t>
+            </a:r>
+          </a:p>
+          <a:p>
+            <a:pPr>
+              <a:defRPr sz="1400">
+                <a:solidFill>
+                  <a:srgbClr val="000000"/>
+                </a:solidFill>
+              </a:defRPr>
+            </a:pPr>
+          </a:p>
+          <a:p>
+            <a:pPr>
+              <a:defRPr sz="1400">
+                <a:solidFill>
+                  <a:srgbClr val="000000"/>
+                </a:solidFill>
+              </a:defRPr>
+            </a:pPr>
+            <a:r>
+              <a:t>With transfers, SMIC families break even with no margin for:</a:t>
+            </a:r>
+          </a:p>
+          <a:p>
+            <a:pPr>
+              <a:defRPr sz="1400">
+                <a:solidFill>
+                  <a:srgbClr val="646464"/>
+                </a:solidFill>
+              </a:defRPr>
+            </a:pPr>
+            <a:r>
+              <a:t>  • Emergencies (car repairs, medical events)</a:t>
+            </a:r>
+          </a:p>
+          <a:p>
+            <a:pPr>
+              <a:defRPr sz="1400">
+                <a:solidFill>
+                  <a:srgbClr val="646464"/>
+                </a:solidFill>
+              </a:defRPr>
+            </a:pPr>
+            <a:r>
+              <a:t>  • Savings (impossible)</a:t>
+            </a:r>
+          </a:p>
+          <a:p>
+            <a:pPr>
+              <a:defRPr sz="1400">
+                <a:solidFill>
+                  <a:srgbClr val="646464"/>
+                </a:solidFill>
+              </a:defRPr>
+            </a:pPr>
+            <a:r>
+              <a:t>  • Family composition changes (baby, aging parent)</a:t>
+            </a:r>
+          </a:p>
+          <a:p>
+            <a:pPr>
+              <a:defRPr sz="1400">
+                <a:solidFill>
+                  <a:srgbClr val="000000"/>
+                </a:solidFill>
+              </a:defRPr>
+            </a:pPr>
+          </a:p>
+          <a:p>
+            <a:pPr>
+              <a:defRPr sz="1400">
+                <a:solidFill>
+                  <a:srgbClr val="000000"/>
+                </a:solidFill>
+              </a:defRPr>
+            </a:pPr>
+            <a:r>
+              <a:t>When composition changes occur (teenage child costs €3,461/year more),</a:t>
+            </a:r>
+          </a:p>
+          <a:p>
+            <a:pPr>
+              <a:defRPr sz="1400" b="1">
+                <a:solidFill>
+                  <a:srgbClr val="C80000"/>
+                </a:solidFill>
+              </a:defRPr>
+            </a:pPr>
+            <a:r>
+              <a:t>SMIC families have NO margin to absorb the cost.</a:t>
+            </a:r>
+          </a:p>
+          <a:p>
+            <a:pPr>
+              <a:defRPr sz="1400">
+                <a:solidFill>
+                  <a:srgbClr val="000000"/>
+                </a:solidFill>
+              </a:defRPr>
+            </a:pPr>
+          </a:p>
+          <a:p>
+            <a:pPr>
+              <a:defRPr sz="1400" b="1">
+                <a:solidFill>
+                  <a:srgbClr val="C80000"/>
+                </a:solidFill>
+              </a:defRPr>
+            </a:pPr>
+            <a:r>
+              <a:t>Result: Debt accumulation OR going without essentials</a:t>
             </a:r>
           </a:p>
         </p:txBody>

--- a/CAPSTONE_DELIVERABLES/Snipper_Tool_Reality_vs_Official_Paris.pptx
+++ b/CAPSTONE_DELIVERABLES/Snipper_Tool_Reality_vs_Official_Paris.pptx
@@ -5,36 +5,31 @@
     <p:sldMasterId id="2147483648" r:id="rId1"/>
   </p:sldMasterIdLst>
   <p:sldIdLst>
-    <p:sldId id="256" r:id="rId7"/>
-    <p:sldId id="257" r:id="rId8"/>
-    <p:sldId id="258" r:id="rId9"/>
-    <p:sldId id="259" r:id="rId10"/>
-    <p:sldId id="260" r:id="rId11"/>
-    <p:sldId id="261" r:id="rId12"/>
-    <p:sldId id="262" r:id="rId13"/>
-    <p:sldId id="263" r:id="rId14"/>
-    <p:sldId id="264" r:id="rId15"/>
-    <p:sldId id="265" r:id="rId16"/>
-    <p:sldId id="266" r:id="rId17"/>
-    <p:sldId id="267" r:id="rId18"/>
-    <p:sldId id="268" r:id="rId19"/>
-    <p:sldId id="269" r:id="rId20"/>
-    <p:sldId id="270" r:id="rId21"/>
-    <p:sldId id="271" r:id="rId22"/>
-    <p:sldId id="272" r:id="rId23"/>
-    <p:sldId id="273" r:id="rId24"/>
-    <p:sldId id="274" r:id="rId25"/>
-    <p:sldId id="275" r:id="rId26"/>
-    <p:sldId id="276" r:id="rId27"/>
-    <p:sldId id="277" r:id="rId28"/>
-    <p:sldId id="278" r:id="rId29"/>
-    <p:sldId id="279" r:id="rId30"/>
-    <p:sldId id="280" r:id="rId31"/>
-    <p:sldId id="281" r:id="rId32"/>
-    <p:sldId id="282" r:id="rId33"/>
-    <p:sldId id="283" r:id="rId34"/>
-    <p:sldId id="284" r:id="rId35"/>
-    <p:sldId id="285" r:id="rId36"/>
+    <p:sldId id="256" r:id="rId2"/>
+    <p:sldId id="257" r:id="rId3"/>
+    <p:sldId id="258" r:id="rId4"/>
+    <p:sldId id="259" r:id="rId5"/>
+    <p:sldId id="260" r:id="rId6"/>
+    <p:sldId id="261" r:id="rId7"/>
+    <p:sldId id="262" r:id="rId8"/>
+    <p:sldId id="263" r:id="rId9"/>
+    <p:sldId id="264" r:id="rId10"/>
+    <p:sldId id="265" r:id="rId11"/>
+    <p:sldId id="266" r:id="rId12"/>
+    <p:sldId id="267" r:id="rId13"/>
+    <p:sldId id="268" r:id="rId14"/>
+    <p:sldId id="269" r:id="rId15"/>
+    <p:sldId id="270" r:id="rId16"/>
+    <p:sldId id="272" r:id="rId17"/>
+    <p:sldId id="273" r:id="rId18"/>
+    <p:sldId id="274" r:id="rId19"/>
+    <p:sldId id="275" r:id="rId20"/>
+    <p:sldId id="276" r:id="rId21"/>
+    <p:sldId id="277" r:id="rId22"/>
+    <p:sldId id="278" r:id="rId23"/>
+    <p:sldId id="279" r:id="rId24"/>
+    <p:sldId id="280" r:id="rId25"/>
+    <p:sldId id="285" r:id="rId26"/>
   </p:sldIdLst>
   <p:sldSz cx="9144000" cy="6858000" type="screen4x3"/>
   <p:notesSz cx="6858000" cy="9144000"/>
@@ -133,6 +128,22 @@
       </a:defRPr>
     </a:lvl9pPr>
   </p:defaultTextStyle>
+  <p:extLst>
+    <p:ext uri="{EFAFB233-063F-42B5-8137-9DF3F51BA10A}">
+      <p15:sldGuideLst xmlns:p15="http://schemas.microsoft.com/office/powerpoint/2012/main">
+        <p15:guide id="1" orient="horz" pos="2160">
+          <p15:clr>
+            <a:srgbClr val="A4A3A4"/>
+          </p15:clr>
+        </p15:guide>
+        <p15:guide id="2" pos="2880">
+          <p15:clr>
+            <a:srgbClr val="A4A3A4"/>
+          </p15:clr>
+        </p15:guide>
+      </p15:sldGuideLst>
+    </p:ext>
+  </p:extLst>
 </p:presentation>
 </file>
 
@@ -174,10 +185,9 @@
           <a:lstStyle/>
           <a:p>
             <a:r>
-              <a:rPr lang="en-US" smtClean="0"/>
+              <a:rPr lang="en-US"/>
               <a:t>Click to edit Master title style</a:t>
             </a:r>
-            <a:endParaRPr lang="en-US"/>
           </a:p>
         </p:txBody>
       </p:sp>
@@ -293,10 +303,9 @@
           </a:lstStyle>
           <a:p>
             <a:r>
-              <a:rPr lang="en-US" smtClean="0"/>
+              <a:rPr lang="en-US"/>
               <a:t>Click to edit Master subtitle style</a:t>
             </a:r>
-            <a:endParaRPr lang="en-US"/>
           </a:p>
         </p:txBody>
       </p:sp>
@@ -317,7 +326,7 @@
           <a:p>
             <a:fld id="{5BCAD085-E8A6-8845-BD4E-CB4CCA059FC4}" type="datetimeFigureOut">
               <a:rPr lang="en-US" smtClean="0"/>
-              <a:t>1/27/13</a:t>
+              <a:t>28-Apr-26</a:t>
             </a:fld>
             <a:endParaRPr lang="en-US"/>
           </a:p>
@@ -411,10 +420,9 @@
           <a:lstStyle/>
           <a:p>
             <a:r>
-              <a:rPr lang="en-US" smtClean="0"/>
+              <a:rPr lang="en-US"/>
               <a:t>Click to edit Master title style</a:t>
             </a:r>
-            <a:endParaRPr lang="en-US"/>
           </a:p>
         </p:txBody>
       </p:sp>
@@ -435,38 +443,37 @@
           <a:p>
             <a:pPr lvl="0"/>
             <a:r>
-              <a:rPr lang="en-US" smtClean="0"/>
+              <a:rPr lang="en-US"/>
               <a:t>Click to edit Master text styles</a:t>
             </a:r>
           </a:p>
           <a:p>
             <a:pPr lvl="1"/>
             <a:r>
-              <a:rPr lang="en-US" smtClean="0"/>
+              <a:rPr lang="en-US"/>
               <a:t>Second level</a:t>
             </a:r>
           </a:p>
           <a:p>
             <a:pPr lvl="2"/>
             <a:r>
-              <a:rPr lang="en-US" smtClean="0"/>
+              <a:rPr lang="en-US"/>
               <a:t>Third level</a:t>
             </a:r>
           </a:p>
           <a:p>
             <a:pPr lvl="3"/>
             <a:r>
-              <a:rPr lang="en-US" smtClean="0"/>
+              <a:rPr lang="en-US"/>
               <a:t>Fourth level</a:t>
             </a:r>
           </a:p>
           <a:p>
             <a:pPr lvl="4"/>
             <a:r>
-              <a:rPr lang="en-US" smtClean="0"/>
+              <a:rPr lang="en-US"/>
               <a:t>Fifth level</a:t>
             </a:r>
-            <a:endParaRPr lang="en-US"/>
           </a:p>
         </p:txBody>
       </p:sp>
@@ -487,7 +494,7 @@
           <a:p>
             <a:fld id="{5BCAD085-E8A6-8845-BD4E-CB4CCA059FC4}" type="datetimeFigureOut">
               <a:rPr lang="en-US" smtClean="0"/>
-              <a:t>1/27/13</a:t>
+              <a:t>28-Apr-26</a:t>
             </a:fld>
             <a:endParaRPr lang="en-US"/>
           </a:p>
@@ -586,10 +593,9 @@
           <a:lstStyle/>
           <a:p>
             <a:r>
-              <a:rPr lang="en-US" smtClean="0"/>
+              <a:rPr lang="en-US"/>
               <a:t>Click to edit Master title style</a:t>
             </a:r>
-            <a:endParaRPr lang="en-US"/>
           </a:p>
         </p:txBody>
       </p:sp>
@@ -615,38 +621,37 @@
           <a:p>
             <a:pPr lvl="0"/>
             <a:r>
-              <a:rPr lang="en-US" smtClean="0"/>
+              <a:rPr lang="en-US"/>
               <a:t>Click to edit Master text styles</a:t>
             </a:r>
           </a:p>
           <a:p>
             <a:pPr lvl="1"/>
             <a:r>
-              <a:rPr lang="en-US" smtClean="0"/>
+              <a:rPr lang="en-US"/>
               <a:t>Second level</a:t>
             </a:r>
           </a:p>
           <a:p>
             <a:pPr lvl="2"/>
             <a:r>
-              <a:rPr lang="en-US" smtClean="0"/>
+              <a:rPr lang="en-US"/>
               <a:t>Third level</a:t>
             </a:r>
           </a:p>
           <a:p>
             <a:pPr lvl="3"/>
             <a:r>
-              <a:rPr lang="en-US" smtClean="0"/>
+              <a:rPr lang="en-US"/>
               <a:t>Fourth level</a:t>
             </a:r>
           </a:p>
           <a:p>
             <a:pPr lvl="4"/>
             <a:r>
-              <a:rPr lang="en-US" smtClean="0"/>
+              <a:rPr lang="en-US"/>
               <a:t>Fifth level</a:t>
             </a:r>
-            <a:endParaRPr lang="en-US"/>
           </a:p>
         </p:txBody>
       </p:sp>
@@ -667,7 +672,7 @@
           <a:p>
             <a:fld id="{5BCAD085-E8A6-8845-BD4E-CB4CCA059FC4}" type="datetimeFigureOut">
               <a:rPr lang="en-US" smtClean="0"/>
-              <a:t>1/27/13</a:t>
+              <a:t>28-Apr-26</a:t>
             </a:fld>
             <a:endParaRPr lang="en-US"/>
           </a:p>
@@ -761,10 +766,9 @@
           <a:lstStyle/>
           <a:p>
             <a:r>
-              <a:rPr lang="en-US" smtClean="0"/>
+              <a:rPr lang="en-US"/>
               <a:t>Click to edit Master title style</a:t>
             </a:r>
-            <a:endParaRPr lang="en-US"/>
           </a:p>
         </p:txBody>
       </p:sp>
@@ -785,38 +789,37 @@
           <a:p>
             <a:pPr lvl="0"/>
             <a:r>
-              <a:rPr lang="en-US" smtClean="0"/>
+              <a:rPr lang="en-US"/>
               <a:t>Click to edit Master text styles</a:t>
             </a:r>
           </a:p>
           <a:p>
             <a:pPr lvl="1"/>
             <a:r>
-              <a:rPr lang="en-US" smtClean="0"/>
+              <a:rPr lang="en-US"/>
               <a:t>Second level</a:t>
             </a:r>
           </a:p>
           <a:p>
             <a:pPr lvl="2"/>
             <a:r>
-              <a:rPr lang="en-US" smtClean="0"/>
+              <a:rPr lang="en-US"/>
               <a:t>Third level</a:t>
             </a:r>
           </a:p>
           <a:p>
             <a:pPr lvl="3"/>
             <a:r>
-              <a:rPr lang="en-US" smtClean="0"/>
+              <a:rPr lang="en-US"/>
               <a:t>Fourth level</a:t>
             </a:r>
           </a:p>
           <a:p>
             <a:pPr lvl="4"/>
             <a:r>
-              <a:rPr lang="en-US" smtClean="0"/>
+              <a:rPr lang="en-US"/>
               <a:t>Fifth level</a:t>
             </a:r>
-            <a:endParaRPr lang="en-US"/>
           </a:p>
         </p:txBody>
       </p:sp>
@@ -837,7 +840,7 @@
           <a:p>
             <a:fld id="{5BCAD085-E8A6-8845-BD4E-CB4CCA059FC4}" type="datetimeFigureOut">
               <a:rPr lang="en-US" smtClean="0"/>
-              <a:t>1/27/13</a:t>
+              <a:t>28-Apr-26</a:t>
             </a:fld>
             <a:endParaRPr lang="en-US"/>
           </a:p>
@@ -940,10 +943,9 @@
           </a:lstStyle>
           <a:p>
             <a:r>
-              <a:rPr lang="en-US" smtClean="0"/>
+              <a:rPr lang="en-US"/>
               <a:t>Click to edit Master title style</a:t>
             </a:r>
-            <a:endParaRPr lang="en-US"/>
           </a:p>
         </p:txBody>
       </p:sp>
@@ -1060,7 +1062,7 @@
           <a:p>
             <a:pPr lvl="0"/>
             <a:r>
-              <a:rPr lang="en-US" smtClean="0"/>
+              <a:rPr lang="en-US"/>
               <a:t>Click to edit Master text styles</a:t>
             </a:r>
           </a:p>
@@ -1083,7 +1085,7 @@
           <a:p>
             <a:fld id="{5BCAD085-E8A6-8845-BD4E-CB4CCA059FC4}" type="datetimeFigureOut">
               <a:rPr lang="en-US" smtClean="0"/>
-              <a:t>1/27/13</a:t>
+              <a:t>28-Apr-26</a:t>
             </a:fld>
             <a:endParaRPr lang="en-US"/>
           </a:p>
@@ -1177,10 +1179,9 @@
           <a:lstStyle/>
           <a:p>
             <a:r>
-              <a:rPr lang="en-US" smtClean="0"/>
+              <a:rPr lang="en-US"/>
               <a:t>Click to edit Master title style</a:t>
             </a:r>
-            <a:endParaRPr lang="en-US"/>
           </a:p>
         </p:txBody>
       </p:sp>
@@ -1234,38 +1235,37 @@
           <a:p>
             <a:pPr lvl="0"/>
             <a:r>
-              <a:rPr lang="en-US" smtClean="0"/>
+              <a:rPr lang="en-US"/>
               <a:t>Click to edit Master text styles</a:t>
             </a:r>
           </a:p>
           <a:p>
             <a:pPr lvl="1"/>
             <a:r>
-              <a:rPr lang="en-US" smtClean="0"/>
+              <a:rPr lang="en-US"/>
               <a:t>Second level</a:t>
             </a:r>
           </a:p>
           <a:p>
             <a:pPr lvl="2"/>
             <a:r>
-              <a:rPr lang="en-US" smtClean="0"/>
+              <a:rPr lang="en-US"/>
               <a:t>Third level</a:t>
             </a:r>
           </a:p>
           <a:p>
             <a:pPr lvl="3"/>
             <a:r>
-              <a:rPr lang="en-US" smtClean="0"/>
+              <a:rPr lang="en-US"/>
               <a:t>Fourth level</a:t>
             </a:r>
           </a:p>
           <a:p>
             <a:pPr lvl="4"/>
             <a:r>
-              <a:rPr lang="en-US" smtClean="0"/>
+              <a:rPr lang="en-US"/>
               <a:t>Fifth level</a:t>
             </a:r>
-            <a:endParaRPr lang="en-US"/>
           </a:p>
         </p:txBody>
       </p:sp>
@@ -1319,38 +1319,37 @@
           <a:p>
             <a:pPr lvl="0"/>
             <a:r>
-              <a:rPr lang="en-US" smtClean="0"/>
+              <a:rPr lang="en-US"/>
               <a:t>Click to edit Master text styles</a:t>
             </a:r>
           </a:p>
           <a:p>
             <a:pPr lvl="1"/>
             <a:r>
-              <a:rPr lang="en-US" smtClean="0"/>
+              <a:rPr lang="en-US"/>
               <a:t>Second level</a:t>
             </a:r>
           </a:p>
           <a:p>
             <a:pPr lvl="2"/>
             <a:r>
-              <a:rPr lang="en-US" smtClean="0"/>
+              <a:rPr lang="en-US"/>
               <a:t>Third level</a:t>
             </a:r>
           </a:p>
           <a:p>
             <a:pPr lvl="3"/>
             <a:r>
-              <a:rPr lang="en-US" smtClean="0"/>
+              <a:rPr lang="en-US"/>
               <a:t>Fourth level</a:t>
             </a:r>
           </a:p>
           <a:p>
             <a:pPr lvl="4"/>
             <a:r>
-              <a:rPr lang="en-US" smtClean="0"/>
+              <a:rPr lang="en-US"/>
               <a:t>Fifth level</a:t>
             </a:r>
-            <a:endParaRPr lang="en-US"/>
           </a:p>
         </p:txBody>
       </p:sp>
@@ -1371,7 +1370,7 @@
           <a:p>
             <a:fld id="{5BCAD085-E8A6-8845-BD4E-CB4CCA059FC4}" type="datetimeFigureOut">
               <a:rPr lang="en-US" smtClean="0"/>
-              <a:t>1/27/13</a:t>
+              <a:t>28-Apr-26</a:t>
             </a:fld>
             <a:endParaRPr lang="en-US"/>
           </a:p>
@@ -1469,10 +1468,9 @@
           </a:lstStyle>
           <a:p>
             <a:r>
-              <a:rPr lang="en-US" smtClean="0"/>
+              <a:rPr lang="en-US"/>
               <a:t>Click to edit Master title style</a:t>
             </a:r>
-            <a:endParaRPr lang="en-US"/>
           </a:p>
         </p:txBody>
       </p:sp>
@@ -1535,7 +1533,7 @@
           <a:p>
             <a:pPr lvl="0"/>
             <a:r>
-              <a:rPr lang="en-US" smtClean="0"/>
+              <a:rPr lang="en-US"/>
               <a:t>Click to edit Master text styles</a:t>
             </a:r>
           </a:p>
@@ -1591,38 +1589,37 @@
           <a:p>
             <a:pPr lvl="0"/>
             <a:r>
-              <a:rPr lang="en-US" smtClean="0"/>
+              <a:rPr lang="en-US"/>
               <a:t>Click to edit Master text styles</a:t>
             </a:r>
           </a:p>
           <a:p>
             <a:pPr lvl="1"/>
             <a:r>
-              <a:rPr lang="en-US" smtClean="0"/>
+              <a:rPr lang="en-US"/>
               <a:t>Second level</a:t>
             </a:r>
           </a:p>
           <a:p>
             <a:pPr lvl="2"/>
             <a:r>
-              <a:rPr lang="en-US" smtClean="0"/>
+              <a:rPr lang="en-US"/>
               <a:t>Third level</a:t>
             </a:r>
           </a:p>
           <a:p>
             <a:pPr lvl="3"/>
             <a:r>
-              <a:rPr lang="en-US" smtClean="0"/>
+              <a:rPr lang="en-US"/>
               <a:t>Fourth level</a:t>
             </a:r>
           </a:p>
           <a:p>
             <a:pPr lvl="4"/>
             <a:r>
-              <a:rPr lang="en-US" smtClean="0"/>
+              <a:rPr lang="en-US"/>
               <a:t>Fifth level</a:t>
             </a:r>
-            <a:endParaRPr lang="en-US"/>
           </a:p>
         </p:txBody>
       </p:sp>
@@ -1685,7 +1682,7 @@
           <a:p>
             <a:pPr lvl="0"/>
             <a:r>
-              <a:rPr lang="en-US" smtClean="0"/>
+              <a:rPr lang="en-US"/>
               <a:t>Click to edit Master text styles</a:t>
             </a:r>
           </a:p>
@@ -1741,38 +1738,37 @@
           <a:p>
             <a:pPr lvl="0"/>
             <a:r>
-              <a:rPr lang="en-US" smtClean="0"/>
+              <a:rPr lang="en-US"/>
               <a:t>Click to edit Master text styles</a:t>
             </a:r>
           </a:p>
           <a:p>
             <a:pPr lvl="1"/>
             <a:r>
-              <a:rPr lang="en-US" smtClean="0"/>
+              <a:rPr lang="en-US"/>
               <a:t>Second level</a:t>
             </a:r>
           </a:p>
           <a:p>
             <a:pPr lvl="2"/>
             <a:r>
-              <a:rPr lang="en-US" smtClean="0"/>
+              <a:rPr lang="en-US"/>
               <a:t>Third level</a:t>
             </a:r>
           </a:p>
           <a:p>
             <a:pPr lvl="3"/>
             <a:r>
-              <a:rPr lang="en-US" smtClean="0"/>
+              <a:rPr lang="en-US"/>
               <a:t>Fourth level</a:t>
             </a:r>
           </a:p>
           <a:p>
             <a:pPr lvl="4"/>
             <a:r>
-              <a:rPr lang="en-US" smtClean="0"/>
+              <a:rPr lang="en-US"/>
               <a:t>Fifth level</a:t>
             </a:r>
-            <a:endParaRPr lang="en-US"/>
           </a:p>
         </p:txBody>
       </p:sp>
@@ -1793,7 +1789,7 @@
           <a:p>
             <a:fld id="{5BCAD085-E8A6-8845-BD4E-CB4CCA059FC4}" type="datetimeFigureOut">
               <a:rPr lang="en-US" smtClean="0"/>
-              <a:t>1/27/13</a:t>
+              <a:t>28-Apr-26</a:t>
             </a:fld>
             <a:endParaRPr lang="en-US"/>
           </a:p>
@@ -1887,10 +1883,9 @@
           <a:lstStyle/>
           <a:p>
             <a:r>
-              <a:rPr lang="en-US" smtClean="0"/>
+              <a:rPr lang="en-US"/>
               <a:t>Click to edit Master title style</a:t>
             </a:r>
-            <a:endParaRPr lang="en-US"/>
           </a:p>
         </p:txBody>
       </p:sp>
@@ -1911,7 +1906,7 @@
           <a:p>
             <a:fld id="{5BCAD085-E8A6-8845-BD4E-CB4CCA059FC4}" type="datetimeFigureOut">
               <a:rPr lang="en-US" smtClean="0"/>
-              <a:t>1/27/13</a:t>
+              <a:t>28-Apr-26</a:t>
             </a:fld>
             <a:endParaRPr lang="en-US"/>
           </a:p>
@@ -2006,7 +2001,7 @@
           <a:p>
             <a:fld id="{5BCAD085-E8A6-8845-BD4E-CB4CCA059FC4}" type="datetimeFigureOut">
               <a:rPr lang="en-US" smtClean="0"/>
-              <a:t>1/27/13</a:t>
+              <a:t>28-Apr-26</a:t>
             </a:fld>
             <a:endParaRPr lang="en-US"/>
           </a:p>
@@ -2109,10 +2104,9 @@
           </a:lstStyle>
           <a:p>
             <a:r>
-              <a:rPr lang="en-US" smtClean="0"/>
+              <a:rPr lang="en-US"/>
               <a:t>Click to edit Master title style</a:t>
             </a:r>
-            <a:endParaRPr lang="en-US"/>
           </a:p>
         </p:txBody>
       </p:sp>
@@ -2166,38 +2160,37 @@
           <a:p>
             <a:pPr lvl="0"/>
             <a:r>
-              <a:rPr lang="en-US" smtClean="0"/>
+              <a:rPr lang="en-US"/>
               <a:t>Click to edit Master text styles</a:t>
             </a:r>
           </a:p>
           <a:p>
             <a:pPr lvl="1"/>
             <a:r>
-              <a:rPr lang="en-US" smtClean="0"/>
+              <a:rPr lang="en-US"/>
               <a:t>Second level</a:t>
             </a:r>
           </a:p>
           <a:p>
             <a:pPr lvl="2"/>
             <a:r>
-              <a:rPr lang="en-US" smtClean="0"/>
+              <a:rPr lang="en-US"/>
               <a:t>Third level</a:t>
             </a:r>
           </a:p>
           <a:p>
             <a:pPr lvl="3"/>
             <a:r>
-              <a:rPr lang="en-US" smtClean="0"/>
+              <a:rPr lang="en-US"/>
               <a:t>Fourth level</a:t>
             </a:r>
           </a:p>
           <a:p>
             <a:pPr lvl="4"/>
             <a:r>
-              <a:rPr lang="en-US" smtClean="0"/>
+              <a:rPr lang="en-US"/>
               <a:t>Fifth level</a:t>
             </a:r>
-            <a:endParaRPr lang="en-US"/>
           </a:p>
         </p:txBody>
       </p:sp>
@@ -2260,7 +2253,7 @@
           <a:p>
             <a:pPr lvl="0"/>
             <a:r>
-              <a:rPr lang="en-US" smtClean="0"/>
+              <a:rPr lang="en-US"/>
               <a:t>Click to edit Master text styles</a:t>
             </a:r>
           </a:p>
@@ -2283,7 +2276,7 @@
           <a:p>
             <a:fld id="{5BCAD085-E8A6-8845-BD4E-CB4CCA059FC4}" type="datetimeFigureOut">
               <a:rPr lang="en-US" smtClean="0"/>
-              <a:t>1/27/13</a:t>
+              <a:t>28-Apr-26</a:t>
             </a:fld>
             <a:endParaRPr lang="en-US"/>
           </a:p>
@@ -2386,10 +2379,9 @@
           </a:lstStyle>
           <a:p>
             <a:r>
-              <a:rPr lang="en-US" smtClean="0"/>
+              <a:rPr lang="en-US"/>
               <a:t>Click to edit Master title style</a:t>
             </a:r>
-            <a:endParaRPr lang="en-US"/>
           </a:p>
         </p:txBody>
       </p:sp>
@@ -2513,7 +2505,7 @@
           <a:p>
             <a:pPr lvl="0"/>
             <a:r>
-              <a:rPr lang="en-US" smtClean="0"/>
+              <a:rPr lang="en-US"/>
               <a:t>Click to edit Master text styles</a:t>
             </a:r>
           </a:p>
@@ -2536,7 +2528,7 @@
           <a:p>
             <a:fld id="{5BCAD085-E8A6-8845-BD4E-CB4CCA059FC4}" type="datetimeFigureOut">
               <a:rPr lang="en-US" smtClean="0"/>
-              <a:t>1/27/13</a:t>
+              <a:t>28-Apr-26</a:t>
             </a:fld>
             <a:endParaRPr lang="en-US"/>
           </a:p>
@@ -2645,10 +2637,9 @@
           <a:lstStyle/>
           <a:p>
             <a:r>
-              <a:rPr lang="en-US" smtClean="0"/>
+              <a:rPr lang="en-US"/>
               <a:t>Click to edit Master title style</a:t>
             </a:r>
-            <a:endParaRPr lang="en-US"/>
           </a:p>
         </p:txBody>
       </p:sp>
@@ -2679,38 +2670,37 @@
           <a:p>
             <a:pPr lvl="0"/>
             <a:r>
-              <a:rPr lang="en-US" smtClean="0"/>
+              <a:rPr lang="en-US"/>
               <a:t>Click to edit Master text styles</a:t>
             </a:r>
           </a:p>
           <a:p>
             <a:pPr lvl="1"/>
             <a:r>
-              <a:rPr lang="en-US" smtClean="0"/>
+              <a:rPr lang="en-US"/>
               <a:t>Second level</a:t>
             </a:r>
           </a:p>
           <a:p>
             <a:pPr lvl="2"/>
             <a:r>
-              <a:rPr lang="en-US" smtClean="0"/>
+              <a:rPr lang="en-US"/>
               <a:t>Third level</a:t>
             </a:r>
           </a:p>
           <a:p>
             <a:pPr lvl="3"/>
             <a:r>
-              <a:rPr lang="en-US" smtClean="0"/>
+              <a:rPr lang="en-US"/>
               <a:t>Fourth level</a:t>
             </a:r>
           </a:p>
           <a:p>
             <a:pPr lvl="4"/>
             <a:r>
-              <a:rPr lang="en-US" smtClean="0"/>
+              <a:rPr lang="en-US"/>
               <a:t>Fifth level</a:t>
             </a:r>
-            <a:endParaRPr lang="en-US"/>
           </a:p>
         </p:txBody>
       </p:sp>
@@ -2749,7 +2739,7 @@
           <a:p>
             <a:fld id="{5BCAD085-E8A6-8845-BD4E-CB4CCA059FC4}" type="datetimeFigureOut">
               <a:rPr lang="en-US" smtClean="0"/>
-              <a:t>1/27/13</a:t>
+              <a:t>28-Apr-26</a:t>
             </a:fld>
             <a:endParaRPr lang="en-US"/>
           </a:p>
@@ -3108,7 +3098,7 @@
 </file>
 
 <file path=ppt/slides/slide1.xml><?xml version="1.0" encoding="utf-8"?>
-<p:sld xmlns:a="http://schemas.openxmlformats.org/drawingml/2006/main" xmlns:p="http://schemas.openxmlformats.org/presentationml/2006/main" xmlns:r="http://schemas.openxmlformats.org/officeDocument/2006/relationships">
+<p:sld xmlns:a="http://schemas.openxmlformats.org/drawingml/2006/main" xmlns:r="http://schemas.openxmlformats.org/officeDocument/2006/relationships" xmlns:p="http://schemas.openxmlformats.org/presentationml/2006/main">
   <p:cSld>
     <p:bg>
       <p:bgPr>
@@ -3124,7 +3114,14 @@
         <p:cNvGrpSpPr/>
         <p:nvPr/>
       </p:nvGrpSpPr>
-      <p:grpSpPr/>
+      <p:grpSpPr>
+        <a:xfrm>
+          <a:off x="0" y="0"/>
+          <a:ext cx="0" cy="0"/>
+          <a:chOff x="0" y="0"/>
+          <a:chExt cx="0" cy="0"/>
+        </a:xfrm>
+      </p:grpSpPr>
       <p:sp>
         <p:nvSpPr>
           <p:cNvPr id="2" name="TextBox 1"/>
@@ -3169,7 +3166,7 @@
         <p:spPr>
           <a:xfrm>
             <a:off x="457200" y="3840480"/>
-            <a:ext cx="8229600" cy="1828800"/>
+            <a:ext cx="8229600" cy="1077218"/>
           </a:xfrm>
           <a:prstGeom prst="rect">
             <a:avLst/>
@@ -3190,6 +3187,7 @@
               </a:defRPr>
             </a:pPr>
             <a:r>
+              <a:rPr sz="3200" dirty="0"/>
               <a:t>How Official Inflation Statistics Hide the True Cost of Living in Paris</a:t>
             </a:r>
           </a:p>
@@ -3204,7 +3202,7 @@
 </file>
 
 <file path=ppt/slides/slide10.xml><?xml version="1.0" encoding="utf-8"?>
-<p:sld xmlns:a="http://schemas.openxmlformats.org/drawingml/2006/main" xmlns:p="http://schemas.openxmlformats.org/presentationml/2006/main" xmlns:r="http://schemas.openxmlformats.org/officeDocument/2006/relationships">
+<p:sld xmlns:a="http://schemas.openxmlformats.org/drawingml/2006/main" xmlns:r="http://schemas.openxmlformats.org/officeDocument/2006/relationships" xmlns:p="http://schemas.openxmlformats.org/presentationml/2006/main">
   <p:cSld>
     <p:bg>
       <p:bgPr>
@@ -3220,7 +3218,14 @@
         <p:cNvGrpSpPr/>
         <p:nvPr/>
       </p:nvGrpSpPr>
-      <p:grpSpPr/>
+      <p:grpSpPr>
+        <a:xfrm>
+          <a:off x="0" y="0"/>
+          <a:ext cx="0" cy="0"/>
+          <a:chOff x="0" y="0"/>
+          <a:chExt cx="0" cy="0"/>
+        </a:xfrm>
+      </p:grpSpPr>
       <p:sp>
         <p:nvSpPr>
           <p:cNvPr id="2" name="TextBox 1"/>
@@ -3229,7 +3234,7 @@
         </p:nvSpPr>
         <p:spPr>
           <a:xfrm>
-            <a:off x="914400" y="2286000"/>
+            <a:off x="914400" y="859971"/>
             <a:ext cx="7315200" cy="2286000"/>
           </a:xfrm>
           <a:prstGeom prst="rect">
@@ -3251,54 +3256,29 @@
               </a:defRPr>
             </a:pPr>
             <a:r>
+              <a:rPr dirty="0"/>
               <a:t>Babies don't exist in official inflation baskets.</a:t>
             </a:r>
-            <a:br/>
-            <a:r>
+            <a:br>
+              <a:rPr dirty="0"/>
+            </a:br>
+            <a:r>
+              <a:rPr dirty="0"/>
               <a:t>Neither do allergy sufferers.</a:t>
             </a:r>
-            <a:br/>
-            <a:r>
+            <a:br>
+              <a:rPr dirty="0"/>
+            </a:br>
+            <a:r>
+              <a:rPr dirty="0"/>
               <a:t>Or single parents managing dietary needs.</a:t>
             </a:r>
-            <a:br/>
-            <a:r>
+            <a:br>
+              <a:rPr dirty="0"/>
+            </a:br>
+            <a:r>
+              <a:rPr dirty="0"/>
               <a:t>Statistical invisibility = institutional indifference.</a:t>
-            </a:r>
-          </a:p>
-        </p:txBody>
-      </p:sp>
-      <p:sp>
-        <p:nvSpPr>
-          <p:cNvPr id="3" name="TextBox 2"/>
-          <p:cNvSpPr txBox="1"/>
-          <p:nvPr/>
-        </p:nvSpPr>
-        <p:spPr>
-          <a:xfrm>
-            <a:off x="914400" y="4754880"/>
-            <a:ext cx="7315200" cy="914400"/>
-          </a:xfrm>
-          <a:prstGeom prst="rect">
-            <a:avLst/>
-          </a:prstGeom>
-          <a:noFill/>
-        </p:spPr>
-        <p:txBody>
-          <a:bodyPr wrap="none">
-            <a:spAutoFit/>
-          </a:bodyPr>
-          <a:lstStyle/>
-          <a:p>
-            <a:pPr algn="ctr">
-              <a:defRPr sz="2000">
-                <a:solidFill>
-                  <a:srgbClr val="FFFFFF"/>
-                </a:solidFill>
-              </a:defRPr>
-            </a:pPr>
-            <a:r>
-              <a:t>CREATIVE INSIGHT #1: The Erased Family Reality</a:t>
             </a:r>
           </a:p>
         </p:txBody>
@@ -3312,7 +3292,7 @@
 </file>
 
 <file path=ppt/slides/slide11.xml><?xml version="1.0" encoding="utf-8"?>
-<p:sld xmlns:a="http://schemas.openxmlformats.org/drawingml/2006/main" xmlns:p="http://schemas.openxmlformats.org/presentationml/2006/main" xmlns:r="http://schemas.openxmlformats.org/officeDocument/2006/relationships">
+<p:sld xmlns:a="http://schemas.openxmlformats.org/drawingml/2006/main" xmlns:r="http://schemas.openxmlformats.org/officeDocument/2006/relationships" xmlns:p="http://schemas.openxmlformats.org/presentationml/2006/main">
   <p:cSld>
     <p:bg>
       <p:bgPr>
@@ -3328,7 +3308,14 @@
         <p:cNvGrpSpPr/>
         <p:nvPr/>
       </p:nvGrpSpPr>
-      <p:grpSpPr/>
+      <p:grpSpPr>
+        <a:xfrm>
+          <a:off x="0" y="0"/>
+          <a:ext cx="0" cy="0"/>
+          <a:chOff x="0" y="0"/>
+          <a:chExt cx="0" cy="0"/>
+        </a:xfrm>
+      </p:grpSpPr>
       <p:sp>
         <p:nvSpPr>
           <p:cNvPr id="2" name="Rectangle 1"/>
@@ -3391,7 +3378,13 @@
       </p:sp>
       <p:pic>
         <p:nvPicPr>
-          <p:cNvPr id="3" name="Picture 2" descr="04_basket_composition.png"/>
+          <p:cNvPr id="5" name="Picture 4">
+            <a:extLst>
+              <a:ext uri="{FF2B5EF4-FFF2-40B4-BE49-F238E27FC236}">
+                <a16:creationId xmlns:a16="http://schemas.microsoft.com/office/drawing/2014/main" id="{954299C1-66FF-93BB-0CFF-F8FD0C7C45F4}"/>
+              </a:ext>
+            </a:extLst>
+          </p:cNvPr>
           <p:cNvPicPr>
             <a:picLocks noChangeAspect="1"/>
           </p:cNvPicPr>
@@ -3405,8 +3398,68 @@
         </p:blipFill>
         <p:spPr>
           <a:xfrm>
-            <a:off x="457200" y="1188720"/>
-            <a:ext cx="14255407" cy="4754880"/>
+            <a:off x="923416" y="1959450"/>
+            <a:ext cx="3648584" cy="3248478"/>
+          </a:xfrm>
+          <a:prstGeom prst="rect">
+            <a:avLst/>
+          </a:prstGeom>
+        </p:spPr>
+      </p:pic>
+      <p:pic>
+        <p:nvPicPr>
+          <p:cNvPr id="7" name="Picture 6">
+            <a:extLst>
+              <a:ext uri="{FF2B5EF4-FFF2-40B4-BE49-F238E27FC236}">
+                <a16:creationId xmlns:a16="http://schemas.microsoft.com/office/drawing/2014/main" id="{1E7DDECC-C71C-7910-8DF3-CC45342DE2AB}"/>
+              </a:ext>
+            </a:extLst>
+          </p:cNvPr>
+          <p:cNvPicPr>
+            <a:picLocks noChangeAspect="1"/>
+          </p:cNvPicPr>
+          <p:nvPr/>
+        </p:nvPicPr>
+        <p:blipFill>
+          <a:blip r:embed="rId3"/>
+          <a:stretch>
+            <a:fillRect/>
+          </a:stretch>
+        </p:blipFill>
+        <p:spPr>
+          <a:xfrm>
+            <a:off x="5333999" y="840819"/>
+            <a:ext cx="3115416" cy="2849466"/>
+          </a:xfrm>
+          <a:prstGeom prst="rect">
+            <a:avLst/>
+          </a:prstGeom>
+        </p:spPr>
+      </p:pic>
+      <p:pic>
+        <p:nvPicPr>
+          <p:cNvPr id="9" name="Picture 8">
+            <a:extLst>
+              <a:ext uri="{FF2B5EF4-FFF2-40B4-BE49-F238E27FC236}">
+                <a16:creationId xmlns:a16="http://schemas.microsoft.com/office/drawing/2014/main" id="{F9E04535-FF0A-4FD4-6539-B9803A8AF01F}"/>
+              </a:ext>
+            </a:extLst>
+          </p:cNvPr>
+          <p:cNvPicPr>
+            <a:picLocks noChangeAspect="1"/>
+          </p:cNvPicPr>
+          <p:nvPr/>
+        </p:nvPicPr>
+        <p:blipFill>
+          <a:blip r:embed="rId4"/>
+          <a:stretch>
+            <a:fillRect/>
+          </a:stretch>
+        </p:blipFill>
+        <p:spPr>
+          <a:xfrm>
+            <a:off x="5333999" y="3690285"/>
+            <a:ext cx="3152349" cy="3035286"/>
           </a:xfrm>
           <a:prstGeom prst="rect">
             <a:avLst/>
@@ -3422,7 +3475,7 @@
 </file>
 
 <file path=ppt/slides/slide12.xml><?xml version="1.0" encoding="utf-8"?>
-<p:sld xmlns:a="http://schemas.openxmlformats.org/drawingml/2006/main" xmlns:p="http://schemas.openxmlformats.org/presentationml/2006/main" xmlns:r="http://schemas.openxmlformats.org/officeDocument/2006/relationships">
+<p:sld xmlns:a="http://schemas.openxmlformats.org/drawingml/2006/main" xmlns:r="http://schemas.openxmlformats.org/officeDocument/2006/relationships" xmlns:p="http://schemas.openxmlformats.org/presentationml/2006/main">
   <p:cSld>
     <p:bg>
       <p:bgPr>
@@ -3438,7 +3491,238 @@
         <p:cNvGrpSpPr/>
         <p:nvPr/>
       </p:nvGrpSpPr>
-      <p:grpSpPr/>
+      <p:grpSpPr>
+        <a:xfrm>
+          <a:off x="0" y="0"/>
+          <a:ext cx="0" cy="0"/>
+          <a:chOff x="0" y="0"/>
+          <a:chExt cx="0" cy="0"/>
+        </a:xfrm>
+      </p:grpSpPr>
+      <p:sp>
+        <p:nvSpPr>
+          <p:cNvPr id="2" name="Rectangle 1"/>
+          <p:cNvSpPr/>
+          <p:nvPr/>
+        </p:nvSpPr>
+        <p:spPr>
+          <a:xfrm>
+            <a:off x="0" y="0"/>
+            <a:ext cx="9144000" cy="1143000"/>
+          </a:xfrm>
+          <a:prstGeom prst="rect">
+            <a:avLst/>
+          </a:prstGeom>
+          <a:solidFill>
+            <a:srgbClr val="1F4E79"/>
+          </a:solidFill>
+          <a:ln>
+            <a:solidFill>
+              <a:srgbClr val="1F4E79"/>
+            </a:solidFill>
+          </a:ln>
+        </p:spPr>
+        <p:style>
+          <a:lnRef idx="1">
+            <a:schemeClr val="accent1"/>
+          </a:lnRef>
+          <a:fillRef idx="3">
+            <a:schemeClr val="accent1"/>
+          </a:fillRef>
+          <a:effectRef idx="2">
+            <a:schemeClr val="accent1"/>
+          </a:effectRef>
+          <a:fontRef idx="minor">
+            <a:schemeClr val="lt1"/>
+          </a:fontRef>
+        </p:style>
+        <p:txBody>
+          <a:bodyPr rtlCol="0" anchor="ctr"/>
+          <a:lstStyle/>
+          <a:p>
+            <a:pPr algn="ctr">
+              <a:spcBef>
+                <a:spcPts val="1200"/>
+              </a:spcBef>
+              <a:spcAft>
+                <a:spcPts val="1200"/>
+              </a:spcAft>
+              <a:defRPr sz="4400" b="1">
+                <a:solidFill>
+                  <a:srgbClr val="FFFFFF"/>
+                </a:solidFill>
+              </a:defRPr>
+            </a:pPr>
+            <a:r>
+              <a:rPr dirty="0"/>
+              <a:t>The Health Paradox: When Healthy Becomes Impossible</a:t>
+            </a:r>
+          </a:p>
+        </p:txBody>
+      </p:sp>
+      <p:pic>
+        <p:nvPicPr>
+          <p:cNvPr id="5" name="Picture 4">
+            <a:extLst>
+              <a:ext uri="{FF2B5EF4-FFF2-40B4-BE49-F238E27FC236}">
+                <a16:creationId xmlns:a16="http://schemas.microsoft.com/office/drawing/2014/main" id="{2B64FFCC-E4D9-BFE9-56FA-7ABA9002E5EE}"/>
+              </a:ext>
+            </a:extLst>
+          </p:cNvPr>
+          <p:cNvPicPr>
+            <a:picLocks noChangeAspect="1"/>
+          </p:cNvPicPr>
+          <p:nvPr/>
+        </p:nvPicPr>
+        <p:blipFill>
+          <a:blip r:embed="rId2"/>
+          <a:stretch>
+            <a:fillRect/>
+          </a:stretch>
+        </p:blipFill>
+        <p:spPr>
+          <a:xfrm>
+            <a:off x="0" y="1284969"/>
+            <a:ext cx="9144000" cy="4854120"/>
+          </a:xfrm>
+          <a:prstGeom prst="rect">
+            <a:avLst/>
+          </a:prstGeom>
+        </p:spPr>
+      </p:pic>
+    </p:spTree>
+  </p:cSld>
+  <p:clrMapOvr>
+    <a:masterClrMapping/>
+  </p:clrMapOvr>
+</p:sld>
+</file>
+
+<file path=ppt/slides/slide13.xml><?xml version="1.0" encoding="utf-8"?>
+<p:sld xmlns:a="http://schemas.openxmlformats.org/drawingml/2006/main" xmlns:r="http://schemas.openxmlformats.org/officeDocument/2006/relationships" xmlns:p="http://schemas.openxmlformats.org/presentationml/2006/main">
+  <p:cSld>
+    <p:bg>
+      <p:bgPr>
+        <a:solidFill>
+          <a:srgbClr val="1F4E79"/>
+        </a:solidFill>
+        <a:effectLst/>
+      </p:bgPr>
+    </p:bg>
+    <p:spTree>
+      <p:nvGrpSpPr>
+        <p:cNvPr id="1" name=""/>
+        <p:cNvGrpSpPr/>
+        <p:nvPr/>
+      </p:nvGrpSpPr>
+      <p:grpSpPr>
+        <a:xfrm>
+          <a:off x="0" y="0"/>
+          <a:ext cx="0" cy="0"/>
+          <a:chOff x="0" y="0"/>
+          <a:chExt cx="0" cy="0"/>
+        </a:xfrm>
+      </p:grpSpPr>
+      <p:sp>
+        <p:nvSpPr>
+          <p:cNvPr id="2" name="TextBox 1"/>
+          <p:cNvSpPr txBox="1"/>
+          <p:nvPr/>
+        </p:nvSpPr>
+        <p:spPr>
+          <a:xfrm>
+            <a:off x="914400" y="1188720"/>
+            <a:ext cx="7315200" cy="4401205"/>
+          </a:xfrm>
+          <a:prstGeom prst="rect">
+            <a:avLst/>
+          </a:prstGeom>
+          <a:noFill/>
+        </p:spPr>
+        <p:txBody>
+          <a:bodyPr wrap="square">
+            <a:spAutoFit/>
+          </a:bodyPr>
+          <a:lstStyle/>
+          <a:p>
+            <a:pPr algn="ctr">
+              <a:defRPr sz="3200" b="1" i="1">
+                <a:solidFill>
+                  <a:srgbClr val="ED7D31"/>
+                </a:solidFill>
+              </a:defRPr>
+            </a:pPr>
+            <a:r>
+              <a:rPr sz="4000" dirty="0"/>
+              <a:t>The poor eat cheap and get sick.</a:t>
+            </a:r>
+            <a:br>
+              <a:rPr sz="4000" dirty="0"/>
+            </a:br>
+            <a:r>
+              <a:rPr sz="4000" dirty="0"/>
+              <a:t>The sick can't afford healthcare.</a:t>
+            </a:r>
+            <a:br>
+              <a:rPr sz="4000" dirty="0"/>
+            </a:br>
+            <a:r>
+              <a:rPr sz="4000" dirty="0"/>
+              <a:t>Healthcare costs break the budget.</a:t>
+            </a:r>
+            <a:endParaRPr lang="en-US" sz="4000" dirty="0"/>
+          </a:p>
+          <a:p>
+            <a:pPr algn="ctr">
+              <a:defRPr sz="3200" b="1" i="1">
+                <a:solidFill>
+                  <a:srgbClr val="ED7D31"/>
+                </a:solidFill>
+              </a:defRPr>
+            </a:pPr>
+            <a:br>
+              <a:rPr sz="4000" dirty="0"/>
+            </a:br>
+            <a:r>
+              <a:rPr sz="4000" dirty="0"/>
+              <a:t>Food affordability creates a poverty trap.</a:t>
+            </a:r>
+          </a:p>
+        </p:txBody>
+      </p:sp>
+    </p:spTree>
+  </p:cSld>
+  <p:clrMapOvr>
+    <a:masterClrMapping/>
+  </p:clrMapOvr>
+</p:sld>
+</file>
+
+<file path=ppt/slides/slide14.xml><?xml version="1.0" encoding="utf-8"?>
+<p:sld xmlns:a="http://schemas.openxmlformats.org/drawingml/2006/main" xmlns:r="http://schemas.openxmlformats.org/officeDocument/2006/relationships" xmlns:p="http://schemas.openxmlformats.org/presentationml/2006/main">
+  <p:cSld>
+    <p:bg>
+      <p:bgPr>
+        <a:solidFill>
+          <a:srgbClr val="FFFFFF"/>
+        </a:solidFill>
+        <a:effectLst/>
+      </p:bgPr>
+    </p:bg>
+    <p:spTree>
+      <p:nvGrpSpPr>
+        <p:cNvPr id="1" name=""/>
+        <p:cNvGrpSpPr/>
+        <p:nvPr/>
+      </p:nvGrpSpPr>
+      <p:grpSpPr>
+        <a:xfrm>
+          <a:off x="0" y="0"/>
+          <a:ext cx="0" cy="0"/>
+          <a:chOff x="0" y="0"/>
+          <a:chExt cx="0" cy="0"/>
+        </a:xfrm>
+      </p:grpSpPr>
       <p:sp>
         <p:nvSpPr>
           <p:cNvPr id="2" name="Rectangle 1"/>
@@ -3494,14 +3778,346 @@
               </a:defRPr>
             </a:pPr>
             <a:r>
-              <a:t>The Health Paradox: When Healthy Becomes Impossible</a:t>
+              <a:t>The Data Reveals the Truth</a:t>
+            </a:r>
+          </a:p>
+        </p:txBody>
+      </p:sp>
+      <p:sp>
+        <p:nvSpPr>
+          <p:cNvPr id="3" name="TextBox 2"/>
+          <p:cNvSpPr txBox="1"/>
+          <p:nvPr/>
+        </p:nvSpPr>
+        <p:spPr>
+          <a:xfrm>
+            <a:off x="600892" y="992778"/>
+            <a:ext cx="7680960" cy="5273238"/>
+          </a:xfrm>
+          <a:prstGeom prst="rect">
+            <a:avLst/>
+          </a:prstGeom>
+          <a:noFill/>
+        </p:spPr>
+        <p:txBody>
+          <a:bodyPr wrap="square">
+            <a:spAutoFit/>
+          </a:bodyPr>
+          <a:lstStyle/>
+          <a:p>
+            <a:pPr>
+              <a:spcBef>
+                <a:spcPts val="600"/>
+              </a:spcBef>
+              <a:spcAft>
+                <a:spcPts val="800"/>
+              </a:spcAft>
+              <a:defRPr sz="2000">
+                <a:solidFill>
+                  <a:srgbClr val="333333"/>
+                </a:solidFill>
+              </a:defRPr>
+            </a:pPr>
+            <a:r>
+              <a:rPr b="1" dirty="0"/>
+              <a:t>OFFICIAL MINIMAL BASKET (Monthly): 259 EUR</a:t>
+            </a:r>
+          </a:p>
+          <a:p>
+            <a:pPr>
+              <a:spcBef>
+                <a:spcPts val="600"/>
+              </a:spcBef>
+              <a:spcAft>
+                <a:spcPts val="800"/>
+              </a:spcAft>
+              <a:defRPr sz="2000">
+                <a:solidFill>
+                  <a:srgbClr val="333333"/>
+                </a:solidFill>
+              </a:defRPr>
+            </a:pPr>
+            <a:r>
+              <a:rPr dirty="0"/>
+              <a:t>  • Items counted: 11 emblematic products</a:t>
+            </a:r>
+          </a:p>
+          <a:p>
+            <a:pPr>
+              <a:spcBef>
+                <a:spcPts val="600"/>
+              </a:spcBef>
+              <a:spcAft>
+                <a:spcPts val="800"/>
+              </a:spcAft>
+              <a:defRPr sz="2000">
+                <a:solidFill>
+                  <a:srgbClr val="333333"/>
+                </a:solidFill>
+              </a:defRPr>
+            </a:pPr>
+            <a:r>
+              <a:rPr dirty="0"/>
+              <a:t>  • Annual cost: 3,107 EUR</a:t>
+            </a:r>
+          </a:p>
+          <a:p>
+            <a:pPr>
+              <a:spcBef>
+                <a:spcPts val="600"/>
+              </a:spcBef>
+              <a:spcAft>
+                <a:spcPts val="800"/>
+              </a:spcAft>
+              <a:defRPr sz="2000">
+                <a:solidFill>
+                  <a:srgbClr val="333333"/>
+                </a:solidFill>
+              </a:defRPr>
+            </a:pPr>
+            <a:r>
+              <a:rPr b="1" dirty="0"/>
+              <a:t>REAL COMPLETE BASKET (Monthly): 510 EUR</a:t>
+            </a:r>
+          </a:p>
+          <a:p>
+            <a:pPr>
+              <a:spcBef>
+                <a:spcPts val="600"/>
+              </a:spcBef>
+              <a:spcAft>
+                <a:spcPts val="800"/>
+              </a:spcAft>
+              <a:defRPr sz="2000">
+                <a:solidFill>
+                  <a:srgbClr val="333333"/>
+                </a:solidFill>
+              </a:defRPr>
+            </a:pPr>
+            <a:r>
+              <a:rPr dirty="0"/>
+              <a:t>  • Items needed: 29 products</a:t>
+            </a:r>
+          </a:p>
+          <a:p>
+            <a:pPr>
+              <a:spcBef>
+                <a:spcPts val="600"/>
+              </a:spcBef>
+              <a:spcAft>
+                <a:spcPts val="800"/>
+              </a:spcAft>
+              <a:defRPr sz="2000">
+                <a:solidFill>
+                  <a:srgbClr val="333333"/>
+                </a:solidFill>
+              </a:defRPr>
+            </a:pPr>
+            <a:r>
+              <a:rPr dirty="0"/>
+              <a:t>  • Annual cost: 6,119 EUR</a:t>
+            </a:r>
+          </a:p>
+          <a:p>
+            <a:pPr>
+              <a:spcBef>
+                <a:spcPts val="600"/>
+              </a:spcBef>
+              <a:spcAft>
+                <a:spcPts val="800"/>
+              </a:spcAft>
+              <a:defRPr sz="2000">
+                <a:solidFill>
+                  <a:srgbClr val="333333"/>
+                </a:solidFill>
+              </a:defRPr>
+            </a:pPr>
+            <a:r>
+              <a:rPr dirty="0"/>
+              <a:t>  • Hidden gap: +97% more than official</a:t>
+            </a:r>
+          </a:p>
+          <a:p>
+            <a:pPr>
+              <a:spcBef>
+                <a:spcPts val="600"/>
+              </a:spcBef>
+              <a:spcAft>
+                <a:spcPts val="800"/>
+              </a:spcAft>
+              <a:defRPr sz="2000">
+                <a:solidFill>
+                  <a:srgbClr val="333333"/>
+                </a:solidFill>
+              </a:defRPr>
+            </a:pPr>
+            <a:r>
+              <a:rPr b="1" dirty="0"/>
+              <a:t>HEALTHY COMPLETE BASKET (Monthly): 630 EUR</a:t>
+            </a:r>
+          </a:p>
+          <a:p>
+            <a:pPr>
+              <a:spcBef>
+                <a:spcPts val="600"/>
+              </a:spcBef>
+              <a:spcAft>
+                <a:spcPts val="800"/>
+              </a:spcAft>
+              <a:defRPr sz="2000">
+                <a:solidFill>
+                  <a:srgbClr val="333333"/>
+                </a:solidFill>
+              </a:defRPr>
+            </a:pPr>
+            <a:r>
+              <a:rPr dirty="0"/>
+              <a:t>  • Items for health: 36 products</a:t>
+            </a:r>
+          </a:p>
+          <a:p>
+            <a:pPr>
+              <a:spcBef>
+                <a:spcPts val="600"/>
+              </a:spcBef>
+              <a:spcAft>
+                <a:spcPts val="800"/>
+              </a:spcAft>
+              <a:defRPr sz="2000">
+                <a:solidFill>
+                  <a:srgbClr val="333333"/>
+                </a:solidFill>
+              </a:defRPr>
+            </a:pPr>
+            <a:r>
+              <a:rPr dirty="0"/>
+              <a:t>  • Annual cost: 7,558 EUR</a:t>
+            </a:r>
+          </a:p>
+          <a:p>
+            <a:pPr>
+              <a:spcBef>
+                <a:spcPts val="600"/>
+              </a:spcBef>
+              <a:spcAft>
+                <a:spcPts val="800"/>
+              </a:spcAft>
+              <a:defRPr sz="2000">
+                <a:solidFill>
+                  <a:srgbClr val="333333"/>
+                </a:solidFill>
+              </a:defRPr>
+            </a:pPr>
+            <a:r>
+              <a:rPr dirty="0"/>
+              <a:t>  • Health premium: +24% more than real basket</a:t>
+            </a:r>
+          </a:p>
+        </p:txBody>
+      </p:sp>
+    </p:spTree>
+  </p:cSld>
+  <p:clrMapOvr>
+    <a:masterClrMapping/>
+  </p:clrMapOvr>
+</p:sld>
+</file>
+
+<file path=ppt/slides/slide15.xml><?xml version="1.0" encoding="utf-8"?>
+<p:sld xmlns:a="http://schemas.openxmlformats.org/drawingml/2006/main" xmlns:r="http://schemas.openxmlformats.org/officeDocument/2006/relationships" xmlns:p="http://schemas.openxmlformats.org/presentationml/2006/main">
+  <p:cSld>
+    <p:bg>
+      <p:bgPr>
+        <a:solidFill>
+          <a:srgbClr val="FFFFFF"/>
+        </a:solidFill>
+        <a:effectLst/>
+      </p:bgPr>
+    </p:bg>
+    <p:spTree>
+      <p:nvGrpSpPr>
+        <p:cNvPr id="1" name=""/>
+        <p:cNvGrpSpPr/>
+        <p:nvPr/>
+      </p:nvGrpSpPr>
+      <p:grpSpPr>
+        <a:xfrm>
+          <a:off x="0" y="0"/>
+          <a:ext cx="0" cy="0"/>
+          <a:chOff x="0" y="0"/>
+          <a:chExt cx="0" cy="0"/>
+        </a:xfrm>
+      </p:grpSpPr>
+      <p:sp>
+        <p:nvSpPr>
+          <p:cNvPr id="2" name="Rectangle 1"/>
+          <p:cNvSpPr/>
+          <p:nvPr/>
+        </p:nvSpPr>
+        <p:spPr>
+          <a:xfrm>
+            <a:off x="0" y="0"/>
+            <a:ext cx="9144000" cy="1360714"/>
+          </a:xfrm>
+          <a:prstGeom prst="rect">
+            <a:avLst/>
+          </a:prstGeom>
+          <a:solidFill>
+            <a:srgbClr val="1F4E79"/>
+          </a:solidFill>
+          <a:ln>
+            <a:solidFill>
+              <a:srgbClr val="1F4E79"/>
+            </a:solidFill>
+          </a:ln>
+        </p:spPr>
+        <p:style>
+          <a:lnRef idx="1">
+            <a:schemeClr val="accent1"/>
+          </a:lnRef>
+          <a:fillRef idx="3">
+            <a:schemeClr val="accent1"/>
+          </a:fillRef>
+          <a:effectRef idx="2">
+            <a:schemeClr val="accent1"/>
+          </a:effectRef>
+          <a:fontRef idx="minor">
+            <a:schemeClr val="lt1"/>
+          </a:fontRef>
+        </p:style>
+        <p:txBody>
+          <a:bodyPr rtlCol="0" anchor="ctr"/>
+          <a:lstStyle/>
+          <a:p>
+            <a:pPr algn="ctr">
+              <a:spcBef>
+                <a:spcPts val="1200"/>
+              </a:spcBef>
+              <a:spcAft>
+                <a:spcPts val="1200"/>
+              </a:spcAft>
+              <a:defRPr sz="4400" b="1">
+                <a:solidFill>
+                  <a:srgbClr val="FFFFFF"/>
+                </a:solidFill>
+              </a:defRPr>
+            </a:pPr>
+            <a:r>
+              <a:rPr dirty="0"/>
+              <a:t>The Affordability Multiplier: Household Composition Impact</a:t>
             </a:r>
           </a:p>
         </p:txBody>
       </p:sp>
       <p:pic>
         <p:nvPicPr>
-          <p:cNvPr id="3" name="Picture 2" descr="05_healthy_cliff.png"/>
+          <p:cNvPr id="5" name="Picture 4">
+            <a:extLst>
+              <a:ext uri="{FF2B5EF4-FFF2-40B4-BE49-F238E27FC236}">
+                <a16:creationId xmlns:a16="http://schemas.microsoft.com/office/drawing/2014/main" id="{E94CE415-7DAF-B010-3AE6-B5A522317B2F}"/>
+              </a:ext>
+            </a:extLst>
+          </p:cNvPr>
           <p:cNvPicPr>
             <a:picLocks noChangeAspect="1"/>
           </p:cNvPicPr>
@@ -3515,8 +4131,8 @@
         </p:blipFill>
         <p:spPr>
           <a:xfrm>
-            <a:off x="457200" y="1188720"/>
-            <a:ext cx="9055829" cy="4846320"/>
+            <a:off x="0" y="1500260"/>
+            <a:ext cx="9144000" cy="5272621"/>
           </a:xfrm>
           <a:prstGeom prst="rect">
             <a:avLst/>
@@ -3531,8 +4147,676 @@
 </p:sld>
 </file>
 
-<file path=ppt/slides/slide13.xml><?xml version="1.0" encoding="utf-8"?>
-<p:sld xmlns:a="http://schemas.openxmlformats.org/drawingml/2006/main" xmlns:p="http://schemas.openxmlformats.org/presentationml/2006/main" xmlns:r="http://schemas.openxmlformats.org/officeDocument/2006/relationships">
+<file path=ppt/slides/slide16.xml><?xml version="1.0" encoding="utf-8"?>
+<p:sld xmlns:a="http://schemas.openxmlformats.org/drawingml/2006/main" xmlns:r="http://schemas.openxmlformats.org/officeDocument/2006/relationships" xmlns:p="http://schemas.openxmlformats.org/presentationml/2006/main">
+  <p:cSld>
+    <p:bg>
+      <p:bgPr>
+        <a:solidFill>
+          <a:srgbClr val="FFFFFF"/>
+        </a:solidFill>
+        <a:effectLst/>
+      </p:bgPr>
+    </p:bg>
+    <p:spTree>
+      <p:nvGrpSpPr>
+        <p:cNvPr id="1" name=""/>
+        <p:cNvGrpSpPr/>
+        <p:nvPr/>
+      </p:nvGrpSpPr>
+      <p:grpSpPr>
+        <a:xfrm>
+          <a:off x="0" y="0"/>
+          <a:ext cx="0" cy="0"/>
+          <a:chOff x="0" y="0"/>
+          <a:chExt cx="0" cy="0"/>
+        </a:xfrm>
+      </p:grpSpPr>
+      <p:sp>
+        <p:nvSpPr>
+          <p:cNvPr id="2" name="Rectangle 1"/>
+          <p:cNvSpPr/>
+          <p:nvPr/>
+        </p:nvSpPr>
+        <p:spPr>
+          <a:xfrm>
+            <a:off x="0" y="0"/>
+            <a:ext cx="9144000" cy="1188720"/>
+          </a:xfrm>
+          <a:prstGeom prst="rect">
+            <a:avLst/>
+          </a:prstGeom>
+          <a:solidFill>
+            <a:srgbClr val="1F4E79"/>
+          </a:solidFill>
+          <a:ln>
+            <a:solidFill>
+              <a:srgbClr val="1F4E79"/>
+            </a:solidFill>
+          </a:ln>
+        </p:spPr>
+        <p:style>
+          <a:lnRef idx="1">
+            <a:schemeClr val="accent1"/>
+          </a:lnRef>
+          <a:fillRef idx="3">
+            <a:schemeClr val="accent1"/>
+          </a:fillRef>
+          <a:effectRef idx="2">
+            <a:schemeClr val="accent1"/>
+          </a:effectRef>
+          <a:fontRef idx="minor">
+            <a:schemeClr val="lt1"/>
+          </a:fontRef>
+        </p:style>
+        <p:txBody>
+          <a:bodyPr rtlCol="0" anchor="ctr"/>
+          <a:lstStyle/>
+          <a:p>
+            <a:pPr algn="ctr">
+              <a:spcBef>
+                <a:spcPts val="1200"/>
+              </a:spcBef>
+              <a:spcAft>
+                <a:spcPts val="1200"/>
+              </a:spcAft>
+              <a:defRPr sz="4400" b="1">
+                <a:solidFill>
+                  <a:srgbClr val="FFFFFF"/>
+                </a:solidFill>
+              </a:defRPr>
+            </a:pPr>
+            <a:r>
+              <a:rPr dirty="0"/>
+              <a:t>The Household Composition Multiplier Crisis</a:t>
+            </a:r>
+          </a:p>
+        </p:txBody>
+      </p:sp>
+      <p:sp>
+        <p:nvSpPr>
+          <p:cNvPr id="3" name="TextBox 2"/>
+          <p:cNvSpPr txBox="1"/>
+          <p:nvPr/>
+        </p:nvSpPr>
+        <p:spPr>
+          <a:xfrm>
+            <a:off x="261257" y="1188720"/>
+            <a:ext cx="8632372" cy="5760551"/>
+          </a:xfrm>
+          <a:prstGeom prst="rect">
+            <a:avLst/>
+          </a:prstGeom>
+          <a:noFill/>
+        </p:spPr>
+        <p:txBody>
+          <a:bodyPr wrap="square">
+            <a:spAutoFit/>
+          </a:bodyPr>
+          <a:lstStyle/>
+          <a:p>
+            <a:pPr>
+              <a:spcBef>
+                <a:spcPts val="600"/>
+              </a:spcBef>
+              <a:spcAft>
+                <a:spcPts val="800"/>
+              </a:spcAft>
+              <a:defRPr sz="2000">
+                <a:solidFill>
+                  <a:srgbClr val="333333"/>
+                </a:solidFill>
+              </a:defRPr>
+            </a:pPr>
+            <a:r>
+              <a:rPr b="1" dirty="0"/>
+              <a:t>SMIC WORKER (21,000 EUR/year = 1,750 EUR/month):</a:t>
+            </a:r>
+          </a:p>
+          <a:p>
+            <a:pPr>
+              <a:spcBef>
+                <a:spcPts val="600"/>
+              </a:spcBef>
+              <a:spcAft>
+                <a:spcPts val="800"/>
+              </a:spcAft>
+              <a:defRPr sz="2000">
+                <a:solidFill>
+                  <a:srgbClr val="333333"/>
+                </a:solidFill>
+              </a:defRPr>
+            </a:pPr>
+            <a:r>
+              <a:rPr dirty="0"/>
+              <a:t>  • Base (2 adults + 1 child): 17.4% of income (MANAGEABLE)</a:t>
+            </a:r>
+          </a:p>
+          <a:p>
+            <a:pPr>
+              <a:spcBef>
+                <a:spcPts val="600"/>
+              </a:spcBef>
+              <a:spcAft>
+                <a:spcPts val="800"/>
+              </a:spcAft>
+              <a:defRPr sz="2000">
+                <a:solidFill>
+                  <a:srgbClr val="333333"/>
+                </a:solidFill>
+              </a:defRPr>
+            </a:pPr>
+            <a:r>
+              <a:rPr dirty="0"/>
+              <a:t>  • +1 Teenager: 33.8% of income (IMPOSSIBLE - NO MONEY FOR HOUSING)</a:t>
+            </a:r>
+          </a:p>
+          <a:p>
+            <a:pPr>
+              <a:spcBef>
+                <a:spcPts val="600"/>
+              </a:spcBef>
+              <a:spcAft>
+                <a:spcPts val="800"/>
+              </a:spcAft>
+              <a:defRPr sz="2000">
+                <a:solidFill>
+                  <a:srgbClr val="333333"/>
+                </a:solidFill>
+              </a:defRPr>
+            </a:pPr>
+            <a:r>
+              <a:rPr dirty="0"/>
+              <a:t>  • +1 Senior: 36.4% of income (CATASTROPHIC)</a:t>
+            </a:r>
+          </a:p>
+          <a:p>
+            <a:pPr>
+              <a:spcBef>
+                <a:spcPts val="600"/>
+              </a:spcBef>
+              <a:spcAft>
+                <a:spcPts val="800"/>
+              </a:spcAft>
+              <a:defRPr sz="2000">
+                <a:solidFill>
+                  <a:srgbClr val="333333"/>
+                </a:solidFill>
+              </a:defRPr>
+            </a:pPr>
+            <a:r>
+              <a:rPr b="1" dirty="0"/>
+              <a:t>MEDIAN PARIS (42,000 EUR/year):</a:t>
+            </a:r>
+          </a:p>
+          <a:p>
+            <a:pPr>
+              <a:spcBef>
+                <a:spcPts val="600"/>
+              </a:spcBef>
+              <a:spcAft>
+                <a:spcPts val="800"/>
+              </a:spcAft>
+              <a:defRPr sz="2000">
+                <a:solidFill>
+                  <a:srgbClr val="333333"/>
+                </a:solidFill>
+              </a:defRPr>
+            </a:pPr>
+            <a:r>
+              <a:rPr dirty="0"/>
+              <a:t>  • Base: 8.7% of income (EXCELLENT)</a:t>
+            </a:r>
+          </a:p>
+          <a:p>
+            <a:pPr>
+              <a:spcBef>
+                <a:spcPts val="600"/>
+              </a:spcBef>
+              <a:spcAft>
+                <a:spcPts val="800"/>
+              </a:spcAft>
+              <a:defRPr sz="2000">
+                <a:solidFill>
+                  <a:srgbClr val="333333"/>
+                </a:solidFill>
+              </a:defRPr>
+            </a:pPr>
+            <a:r>
+              <a:rPr dirty="0"/>
+              <a:t>  • +1 Teenager: 16.9% of income (MANAGEABLE)</a:t>
+            </a:r>
+          </a:p>
+          <a:p>
+            <a:pPr>
+              <a:spcBef>
+                <a:spcPts val="600"/>
+              </a:spcBef>
+              <a:spcAft>
+                <a:spcPts val="800"/>
+              </a:spcAft>
+              <a:defRPr sz="2000">
+                <a:solidFill>
+                  <a:srgbClr val="333333"/>
+                </a:solidFill>
+              </a:defRPr>
+            </a:pPr>
+            <a:r>
+              <a:rPr dirty="0"/>
+              <a:t>  • +1 Senior: 18.2% of income (DIFFICULT BUT POSSIBLE)</a:t>
+            </a:r>
+          </a:p>
+          <a:p>
+            <a:pPr>
+              <a:spcBef>
+                <a:spcPts val="600"/>
+              </a:spcBef>
+              <a:spcAft>
+                <a:spcPts val="800"/>
+              </a:spcAft>
+              <a:defRPr sz="2000">
+                <a:solidFill>
+                  <a:srgbClr val="333333"/>
+                </a:solidFill>
+              </a:defRPr>
+            </a:pPr>
+            <a:r>
+              <a:rPr b="1" dirty="0"/>
+              <a:t>THE CRUEL REALITY:</a:t>
+            </a:r>
+          </a:p>
+          <a:p>
+            <a:pPr>
+              <a:spcBef>
+                <a:spcPts val="600"/>
+              </a:spcBef>
+              <a:spcAft>
+                <a:spcPts val="800"/>
+              </a:spcAft>
+              <a:defRPr sz="2000">
+                <a:solidFill>
+                  <a:srgbClr val="333333"/>
+                </a:solidFill>
+              </a:defRPr>
+            </a:pPr>
+            <a:r>
+              <a:rPr dirty="0"/>
+              <a:t>Families don't control their composition. They have children, care for aging</a:t>
+            </a:r>
+          </a:p>
+          <a:p>
+            <a:pPr>
+              <a:spcBef>
+                <a:spcPts val="600"/>
+              </a:spcBef>
+              <a:spcAft>
+                <a:spcPts val="800"/>
+              </a:spcAft>
+              <a:defRPr sz="2000">
+                <a:solidFill>
+                  <a:srgbClr val="333333"/>
+                </a:solidFill>
+              </a:defRPr>
+            </a:pPr>
+            <a:r>
+              <a:rPr dirty="0"/>
+              <a:t>parents. Yet affordability multiplies with each family member.</a:t>
+            </a:r>
+          </a:p>
+          <a:p>
+            <a:pPr>
+              <a:spcBef>
+                <a:spcPts val="600"/>
+              </a:spcBef>
+              <a:spcAft>
+                <a:spcPts val="800"/>
+              </a:spcAft>
+              <a:defRPr sz="2000">
+                <a:solidFill>
+                  <a:srgbClr val="333333"/>
+                </a:solidFill>
+              </a:defRPr>
+            </a:pPr>
+            <a:r>
+              <a:rPr dirty="0"/>
+              <a:t>Below 35k income: Growing families become impossible families.</a:t>
+            </a:r>
+          </a:p>
+        </p:txBody>
+      </p:sp>
+    </p:spTree>
+  </p:cSld>
+  <p:clrMapOvr>
+    <a:masterClrMapping/>
+  </p:clrMapOvr>
+</p:sld>
+</file>
+
+<file path=ppt/slides/slide17.xml><?xml version="1.0" encoding="utf-8"?>
+<p:sld xmlns:a="http://schemas.openxmlformats.org/drawingml/2006/main" xmlns:r="http://schemas.openxmlformats.org/officeDocument/2006/relationships" xmlns:p="http://schemas.openxmlformats.org/presentationml/2006/main">
+  <p:cSld>
+    <p:bg>
+      <p:bgPr>
+        <a:solidFill>
+          <a:srgbClr val="FFFFFF"/>
+        </a:solidFill>
+        <a:effectLst/>
+      </p:bgPr>
+    </p:bg>
+    <p:spTree>
+      <p:nvGrpSpPr>
+        <p:cNvPr id="1" name=""/>
+        <p:cNvGrpSpPr/>
+        <p:nvPr/>
+      </p:nvGrpSpPr>
+      <p:grpSpPr>
+        <a:xfrm>
+          <a:off x="0" y="0"/>
+          <a:ext cx="0" cy="0"/>
+          <a:chOff x="0" y="0"/>
+          <a:chExt cx="0" cy="0"/>
+        </a:xfrm>
+      </p:grpSpPr>
+      <p:sp>
+        <p:nvSpPr>
+          <p:cNvPr id="2" name="Rectangle 1"/>
+          <p:cNvSpPr/>
+          <p:nvPr/>
+        </p:nvSpPr>
+        <p:spPr>
+          <a:xfrm>
+            <a:off x="0" y="0"/>
+            <a:ext cx="9144000" cy="1188720"/>
+          </a:xfrm>
+          <a:prstGeom prst="rect">
+            <a:avLst/>
+          </a:prstGeom>
+          <a:solidFill>
+            <a:srgbClr val="1F4E79"/>
+          </a:solidFill>
+          <a:ln>
+            <a:solidFill>
+              <a:srgbClr val="1F4E79"/>
+            </a:solidFill>
+          </a:ln>
+        </p:spPr>
+        <p:style>
+          <a:lnRef idx="1">
+            <a:schemeClr val="accent1"/>
+          </a:lnRef>
+          <a:fillRef idx="3">
+            <a:schemeClr val="accent1"/>
+          </a:fillRef>
+          <a:effectRef idx="2">
+            <a:schemeClr val="accent1"/>
+          </a:effectRef>
+          <a:fontRef idx="minor">
+            <a:schemeClr val="lt1"/>
+          </a:fontRef>
+        </p:style>
+        <p:txBody>
+          <a:bodyPr rtlCol="0" anchor="ctr"/>
+          <a:lstStyle/>
+          <a:p>
+            <a:pPr algn="ctr">
+              <a:spcBef>
+                <a:spcPts val="1200"/>
+              </a:spcBef>
+              <a:spcAft>
+                <a:spcPts val="1200"/>
+              </a:spcAft>
+              <a:defRPr sz="4400" b="1">
+                <a:solidFill>
+                  <a:srgbClr val="FFFFFF"/>
+                </a:solidFill>
+              </a:defRPr>
+            </a:pPr>
+            <a:r>
+              <a:rPr dirty="0"/>
+              <a:t>The Invisibility Crisis: Who Official Statistics Erase</a:t>
+            </a:r>
+          </a:p>
+        </p:txBody>
+      </p:sp>
+      <p:sp>
+        <p:nvSpPr>
+          <p:cNvPr id="3" name="TextBox 2"/>
+          <p:cNvSpPr txBox="1"/>
+          <p:nvPr/>
+        </p:nvSpPr>
+        <p:spPr>
+          <a:xfrm>
+            <a:off x="217713" y="1188720"/>
+            <a:ext cx="8806543" cy="4785926"/>
+          </a:xfrm>
+          <a:prstGeom prst="rect">
+            <a:avLst/>
+          </a:prstGeom>
+          <a:noFill/>
+        </p:spPr>
+        <p:txBody>
+          <a:bodyPr wrap="square">
+            <a:spAutoFit/>
+          </a:bodyPr>
+          <a:lstStyle/>
+          <a:p>
+            <a:pPr>
+              <a:spcBef>
+                <a:spcPts val="600"/>
+              </a:spcBef>
+              <a:spcAft>
+                <a:spcPts val="800"/>
+              </a:spcAft>
+              <a:defRPr sz="2000">
+                <a:solidFill>
+                  <a:srgbClr val="333333"/>
+                </a:solidFill>
+              </a:defRPr>
+            </a:pPr>
+            <a:r>
+              <a:rPr b="1" dirty="0"/>
+              <a:t>SENIORS:</a:t>
+            </a:r>
+            <a:r>
+              <a:rPr dirty="0"/>
+              <a:t> Specialized dietary needs (soft foods, health management)</a:t>
+            </a:r>
+          </a:p>
+          <a:p>
+            <a:pPr>
+              <a:spcBef>
+                <a:spcPts val="600"/>
+              </a:spcBef>
+              <a:spcAft>
+                <a:spcPts val="800"/>
+              </a:spcAft>
+              <a:defRPr sz="2000">
+                <a:solidFill>
+                  <a:srgbClr val="333333"/>
+                </a:solidFill>
+              </a:defRPr>
+            </a:pPr>
+            <a:r>
+              <a:rPr dirty="0"/>
+              <a:t>  • €334/month more than baseline, but counted as 'standard adult'</a:t>
+            </a:r>
+          </a:p>
+          <a:p>
+            <a:pPr>
+              <a:spcBef>
+                <a:spcPts val="600"/>
+              </a:spcBef>
+              <a:spcAft>
+                <a:spcPts val="800"/>
+              </a:spcAft>
+              <a:defRPr sz="2000">
+                <a:solidFill>
+                  <a:srgbClr val="333333"/>
+                </a:solidFill>
+              </a:defRPr>
+            </a:pPr>
+            <a:r>
+              <a:rPr dirty="0"/>
+              <a:t>  • Elderly people disappear from policy view</a:t>
+            </a:r>
+          </a:p>
+          <a:p>
+            <a:pPr>
+              <a:spcBef>
+                <a:spcPts val="600"/>
+              </a:spcBef>
+              <a:spcAft>
+                <a:spcPts val="800"/>
+              </a:spcAft>
+              <a:defRPr sz="2000">
+                <a:solidFill>
+                  <a:srgbClr val="333333"/>
+                </a:solidFill>
+              </a:defRPr>
+            </a:pPr>
+            <a:r>
+              <a:rPr b="1" dirty="0"/>
+              <a:t>TEENAGERS: </a:t>
+            </a:r>
+            <a:r>
+              <a:rPr dirty="0"/>
+              <a:t>Abrupt appetite transition (110% cost jump at age 13)</a:t>
+            </a:r>
+          </a:p>
+          <a:p>
+            <a:pPr>
+              <a:spcBef>
+                <a:spcPts val="600"/>
+              </a:spcBef>
+              <a:spcAft>
+                <a:spcPts val="800"/>
+              </a:spcAft>
+              <a:defRPr sz="2000">
+                <a:solidFill>
+                  <a:srgbClr val="333333"/>
+                </a:solidFill>
+              </a:defRPr>
+            </a:pPr>
+            <a:r>
+              <a:rPr dirty="0"/>
+              <a:t>  • Malnutrition risk precisely when growth is critical</a:t>
+            </a:r>
+          </a:p>
+          <a:p>
+            <a:pPr>
+              <a:spcBef>
+                <a:spcPts val="600"/>
+              </a:spcBef>
+              <a:spcAft>
+                <a:spcPts val="800"/>
+              </a:spcAft>
+              <a:defRPr sz="2000">
+                <a:solidFill>
+                  <a:srgbClr val="333333"/>
+                </a:solidFill>
+              </a:defRPr>
+            </a:pPr>
+            <a:r>
+              <a:rPr dirty="0"/>
+              <a:t>  • Not child-cost, not adult-cost—uncounted gap</a:t>
+            </a:r>
+          </a:p>
+          <a:p>
+            <a:pPr>
+              <a:spcBef>
+                <a:spcPts val="600"/>
+              </a:spcBef>
+              <a:spcAft>
+                <a:spcPts val="800"/>
+              </a:spcAft>
+              <a:defRPr sz="2000">
+                <a:solidFill>
+                  <a:srgbClr val="333333"/>
+                </a:solidFill>
+              </a:defRPr>
+            </a:pPr>
+            <a:r>
+              <a:rPr b="1" dirty="0"/>
+              <a:t>THE SANDWICH GENERATION: </a:t>
+            </a:r>
+            <a:r>
+              <a:rPr dirty="0">
+                <a:solidFill>
+                  <a:srgbClr val="FF0000"/>
+                </a:solidFill>
+              </a:rPr>
+              <a:t>Supporting both elderly AND children</a:t>
+            </a:r>
+          </a:p>
+          <a:p>
+            <a:pPr>
+              <a:spcBef>
+                <a:spcPts val="600"/>
+              </a:spcBef>
+              <a:spcAft>
+                <a:spcPts val="800"/>
+              </a:spcAft>
+              <a:defRPr sz="2000">
+                <a:solidFill>
+                  <a:srgbClr val="333333"/>
+                </a:solidFill>
+              </a:defRPr>
+            </a:pPr>
+            <a:r>
+              <a:rPr dirty="0"/>
+              <a:t>  • 45-year-old: Parent +€334, Child +€304 = household multiplied</a:t>
+            </a:r>
+          </a:p>
+          <a:p>
+            <a:pPr>
+              <a:spcBef>
+                <a:spcPts val="600"/>
+              </a:spcBef>
+              <a:spcAft>
+                <a:spcPts val="800"/>
+              </a:spcAft>
+              <a:defRPr sz="2000">
+                <a:solidFill>
+                  <a:srgbClr val="333333"/>
+                </a:solidFill>
+              </a:defRPr>
+            </a:pPr>
+            <a:r>
+              <a:rPr dirty="0"/>
+              <a:t>  • €941/month food costs (27% of median income)</a:t>
+            </a:r>
+          </a:p>
+          <a:p>
+            <a:pPr>
+              <a:spcBef>
+                <a:spcPts val="600"/>
+              </a:spcBef>
+              <a:spcAft>
+                <a:spcPts val="800"/>
+              </a:spcAft>
+              <a:defRPr sz="2000">
+                <a:solidFill>
+                  <a:srgbClr val="333333"/>
+                </a:solidFill>
+              </a:defRPr>
+            </a:pPr>
+            <a:r>
+              <a:rPr dirty="0"/>
+              <a:t>  • Silent burden. Invisible in statistics. Breaking quietly.</a:t>
+            </a:r>
+          </a:p>
+        </p:txBody>
+      </p:sp>
+    </p:spTree>
+  </p:cSld>
+  <p:clrMapOvr>
+    <a:masterClrMapping/>
+  </p:clrMapOvr>
+</p:sld>
+</file>
+
+<file path=ppt/slides/slide18.xml><?xml version="1.0" encoding="utf-8"?>
+<p:sld xmlns:a="http://schemas.openxmlformats.org/drawingml/2006/main" xmlns:r="http://schemas.openxmlformats.org/officeDocument/2006/relationships" xmlns:p="http://schemas.openxmlformats.org/presentationml/2006/main">
   <p:cSld>
     <p:bg>
       <p:bgPr>
@@ -3548,7 +4832,14 @@
         <p:cNvGrpSpPr/>
         <p:nvPr/>
       </p:nvGrpSpPr>
-      <p:grpSpPr/>
+      <p:grpSpPr>
+        <a:xfrm>
+          <a:off x="0" y="0"/>
+          <a:ext cx="0" cy="0"/>
+          <a:chOff x="0" y="0"/>
+          <a:chExt cx="0" cy="0"/>
+        </a:xfrm>
+      </p:grpSpPr>
       <p:sp>
         <p:nvSpPr>
           <p:cNvPr id="2" name="TextBox 1"/>
@@ -3579,19 +4870,15 @@
               </a:defRPr>
             </a:pPr>
             <a:r>
-              <a:t>The poor eat cheap and get sick.</a:t>
+              <a:t>What gets priced out of reach doesn't get born.</a:t>
             </a:r>
             <a:br/>
             <a:r>
-              <a:t>The sick can't afford healthcare.</a:t>
+              <a:t>Food affordability is not just poverty.</a:t>
             </a:r>
             <a:br/>
             <a:r>
-              <a:t>Healthcare costs break the budget.</a:t>
-            </a:r>
-            <a:br/>
-            <a:r>
-              <a:t>Food affordability creates a poverty trap.</a:t>
+              <a:t>It's a demographic determinant.</a:t>
             </a:r>
           </a:p>
         </p:txBody>
@@ -3626,7 +4913,7 @@
               </a:defRPr>
             </a:pPr>
             <a:r>
-              <a:t>CREATIVE INSIGHT #2: The Poverty Health Trap</a:t>
+              <a:t>THE HIDDEN CONSEQUENCE: Why Birth Rates Are Collapsing</a:t>
             </a:r>
           </a:p>
         </p:txBody>
@@ -3639,8 +4926,8 @@
 </p:sld>
 </file>
 
-<file path=ppt/slides/slide14.xml><?xml version="1.0" encoding="utf-8"?>
-<p:sld xmlns:a="http://schemas.openxmlformats.org/drawingml/2006/main" xmlns:p="http://schemas.openxmlformats.org/presentationml/2006/main" xmlns:r="http://schemas.openxmlformats.org/officeDocument/2006/relationships">
+<file path=ppt/slides/slide19.xml><?xml version="1.0" encoding="utf-8"?>
+<p:sld xmlns:a="http://schemas.openxmlformats.org/drawingml/2006/main" xmlns:r="http://schemas.openxmlformats.org/officeDocument/2006/relationships" xmlns:p="http://schemas.openxmlformats.org/presentationml/2006/main">
   <p:cSld>
     <p:bg>
       <p:bgPr>
@@ -3656,7 +4943,14 @@
         <p:cNvGrpSpPr/>
         <p:nvPr/>
       </p:nvGrpSpPr>
-      <p:grpSpPr/>
+      <p:grpSpPr>
+        <a:xfrm>
+          <a:off x="0" y="0"/>
+          <a:ext cx="0" cy="0"/>
+          <a:chOff x="0" y="0"/>
+          <a:chExt cx="0" cy="0"/>
+        </a:xfrm>
+      </p:grpSpPr>
       <p:sp>
         <p:nvSpPr>
           <p:cNvPr id="2" name="Rectangle 1"/>
@@ -3712,7 +5006,7 @@
               </a:defRPr>
             </a:pPr>
             <a:r>
-              <a:t>The Data Reveals the Truth</a:t>
+              <a:t>Birth Rate as Economic Rationing</a:t>
             </a:r>
           </a:p>
         </p:txBody>
@@ -3726,7 +5020,7 @@
         <p:spPr>
           <a:xfrm>
             <a:off x="731520" y="1188720"/>
-            <a:ext cx="7680960" cy="5212080"/>
+            <a:ext cx="7680960" cy="5339923"/>
           </a:xfrm>
           <a:prstGeom prst="rect">
             <a:avLst/>
@@ -3753,217 +5047,331 @@
               </a:defRPr>
             </a:pPr>
             <a:r>
-              <a:t>OFFICIAL MINIMAL BASKET (Monthly): 259 EUR</a:t>
-            </a:r>
-          </a:p>
-          <a:p>
-            <a:pPr>
-              <a:spcBef>
-                <a:spcPts val="600"/>
-              </a:spcBef>
-              <a:spcAft>
-                <a:spcPts val="800"/>
-              </a:spcAft>
-              <a:defRPr sz="2000">
-                <a:solidFill>
-                  <a:srgbClr val="333333"/>
-                </a:solidFill>
-              </a:defRPr>
-            </a:pPr>
-            <a:r>
-              <a:t>  • Items counted: 11 emblematic products</a:t>
-            </a:r>
-          </a:p>
-          <a:p>
-            <a:pPr>
-              <a:spcBef>
-                <a:spcPts val="600"/>
-              </a:spcBef>
-              <a:spcAft>
-                <a:spcPts val="800"/>
-              </a:spcAft>
-              <a:defRPr sz="2000">
-                <a:solidFill>
-                  <a:srgbClr val="333333"/>
-                </a:solidFill>
-              </a:defRPr>
-            </a:pPr>
-            <a:r>
-              <a:t>  • Annual cost: 3,107 EUR</a:t>
-            </a:r>
-          </a:p>
-          <a:p>
-            <a:pPr>
-              <a:spcBef>
-                <a:spcPts val="600"/>
-              </a:spcBef>
-              <a:spcAft>
-                <a:spcPts val="800"/>
-              </a:spcAft>
-              <a:defRPr sz="2000">
-                <a:solidFill>
-                  <a:srgbClr val="333333"/>
-                </a:solidFill>
-              </a:defRPr>
-            </a:pPr>
-          </a:p>
-          <a:p>
-            <a:pPr>
-              <a:spcBef>
-                <a:spcPts val="600"/>
-              </a:spcBef>
-              <a:spcAft>
-                <a:spcPts val="800"/>
-              </a:spcAft>
-              <a:defRPr sz="2000">
-                <a:solidFill>
-                  <a:srgbClr val="333333"/>
-                </a:solidFill>
-              </a:defRPr>
-            </a:pPr>
-            <a:r>
-              <a:t>REAL COMPLETE BASKET (Monthly): 510 EUR</a:t>
-            </a:r>
-          </a:p>
-          <a:p>
-            <a:pPr>
-              <a:spcBef>
-                <a:spcPts val="600"/>
-              </a:spcBef>
-              <a:spcAft>
-                <a:spcPts val="800"/>
-              </a:spcAft>
-              <a:defRPr sz="2000">
-                <a:solidFill>
-                  <a:srgbClr val="333333"/>
-                </a:solidFill>
-              </a:defRPr>
-            </a:pPr>
-            <a:r>
-              <a:t>  • Items needed: 29 products</a:t>
-            </a:r>
-          </a:p>
-          <a:p>
-            <a:pPr>
-              <a:spcBef>
-                <a:spcPts val="600"/>
-              </a:spcBef>
-              <a:spcAft>
-                <a:spcPts val="800"/>
-              </a:spcAft>
-              <a:defRPr sz="2000">
-                <a:solidFill>
-                  <a:srgbClr val="333333"/>
-                </a:solidFill>
-              </a:defRPr>
-            </a:pPr>
-            <a:r>
-              <a:t>  • Annual cost: 6,119 EUR</a:t>
-            </a:r>
-          </a:p>
-          <a:p>
-            <a:pPr>
-              <a:spcBef>
-                <a:spcPts val="600"/>
-              </a:spcBef>
-              <a:spcAft>
-                <a:spcPts val="800"/>
-              </a:spcAft>
-              <a:defRPr sz="2000">
-                <a:solidFill>
-                  <a:srgbClr val="333333"/>
-                </a:solidFill>
-              </a:defRPr>
-            </a:pPr>
-            <a:r>
-              <a:t>  • Hidden gap: +97% more than official</a:t>
-            </a:r>
-          </a:p>
-          <a:p>
-            <a:pPr>
-              <a:spcBef>
-                <a:spcPts val="600"/>
-              </a:spcBef>
-              <a:spcAft>
-                <a:spcPts val="800"/>
-              </a:spcAft>
-              <a:defRPr sz="2000">
-                <a:solidFill>
-                  <a:srgbClr val="333333"/>
-                </a:solidFill>
-              </a:defRPr>
-            </a:pPr>
-          </a:p>
-          <a:p>
-            <a:pPr>
-              <a:spcBef>
-                <a:spcPts val="600"/>
-              </a:spcBef>
-              <a:spcAft>
-                <a:spcPts val="800"/>
-              </a:spcAft>
-              <a:defRPr sz="2000">
-                <a:solidFill>
-                  <a:srgbClr val="333333"/>
-                </a:solidFill>
-              </a:defRPr>
-            </a:pPr>
-            <a:r>
-              <a:t>HEALTHY COMPLETE BASKET (Monthly): 630 EUR</a:t>
-            </a:r>
-          </a:p>
-          <a:p>
-            <a:pPr>
-              <a:spcBef>
-                <a:spcPts val="600"/>
-              </a:spcBef>
-              <a:spcAft>
-                <a:spcPts val="800"/>
-              </a:spcAft>
-              <a:defRPr sz="2000">
-                <a:solidFill>
-                  <a:srgbClr val="333333"/>
-                </a:solidFill>
-              </a:defRPr>
-            </a:pPr>
-            <a:r>
-              <a:t>  • Items for health: 36 products</a:t>
-            </a:r>
-          </a:p>
-          <a:p>
-            <a:pPr>
-              <a:spcBef>
-                <a:spcPts val="600"/>
-              </a:spcBef>
-              <a:spcAft>
-                <a:spcPts val="800"/>
-              </a:spcAft>
-              <a:defRPr sz="2000">
-                <a:solidFill>
-                  <a:srgbClr val="333333"/>
-                </a:solidFill>
-              </a:defRPr>
-            </a:pPr>
-            <a:r>
-              <a:t>  • Annual cost: 7,558 EUR</a:t>
-            </a:r>
-          </a:p>
-          <a:p>
-            <a:pPr>
-              <a:spcBef>
-                <a:spcPts val="600"/>
-              </a:spcBef>
-              <a:spcAft>
-                <a:spcPts val="800"/>
-              </a:spcAft>
-              <a:defRPr sz="2000">
-                <a:solidFill>
-                  <a:srgbClr val="333333"/>
-                </a:solidFill>
-              </a:defRPr>
-            </a:pPr>
-            <a:r>
-              <a:t>  • Health premium: +24% more than real basket</a:t>
+              <a:rPr sz="2400" b="1" dirty="0"/>
+              <a:t>Young couple, median Paris in</a:t>
+            </a:r>
+            <a:r>
+              <a:rPr sz="2400" b="1" dirty="0">
+                <a:solidFill>
+                  <a:srgbClr val="333333"/>
+                </a:solidFill>
+              </a:rPr>
+              <a:t>come</a:t>
+            </a:r>
+            <a:r>
+              <a:rPr sz="2400" dirty="0"/>
+              <a:t> </a:t>
+            </a:r>
+            <a:r>
+              <a:rPr dirty="0"/>
+              <a:t>(</a:t>
+            </a:r>
+            <a:r>
+              <a:rPr dirty="0">
+                <a:solidFill>
+                  <a:srgbClr val="FF0000"/>
+                </a:solidFill>
+              </a:rPr>
+              <a:t>42,000 EUR</a:t>
+            </a:r>
+            <a:r>
+              <a:rPr dirty="0"/>
+              <a:t>/year):</a:t>
+            </a:r>
+          </a:p>
+          <a:p>
+            <a:pPr>
+              <a:spcBef>
+                <a:spcPts val="600"/>
+              </a:spcBef>
+              <a:spcAft>
+                <a:spcPts val="800"/>
+              </a:spcAft>
+              <a:defRPr sz="2000">
+                <a:solidFill>
+                  <a:srgbClr val="333333"/>
+                </a:solidFill>
+              </a:defRPr>
+            </a:pPr>
+            <a:r>
+              <a:rPr dirty="0"/>
+              <a:t>  • 1 child: 12.6% of income on food (MANAGEABLE)</a:t>
+            </a:r>
+          </a:p>
+          <a:p>
+            <a:pPr>
+              <a:spcBef>
+                <a:spcPts val="600"/>
+              </a:spcBef>
+              <a:spcAft>
+                <a:spcPts val="800"/>
+              </a:spcAft>
+              <a:defRPr sz="2000">
+                <a:solidFill>
+                  <a:srgbClr val="333333"/>
+                </a:solidFill>
+              </a:defRPr>
+            </a:pPr>
+            <a:r>
+              <a:rPr dirty="0"/>
+              <a:t>  • </a:t>
+            </a:r>
+            <a:r>
+              <a:rPr dirty="0">
+                <a:solidFill>
+                  <a:srgbClr val="FF0000"/>
+                </a:solidFill>
+              </a:rPr>
+              <a:t>2 children</a:t>
+            </a:r>
+            <a:r>
+              <a:rPr dirty="0"/>
+              <a:t>: 16.5% of income on food (</a:t>
+            </a:r>
+            <a:r>
+              <a:rPr dirty="0">
+                <a:solidFill>
+                  <a:srgbClr val="FF0000"/>
+                </a:solidFill>
+              </a:rPr>
+              <a:t>DIFFICULT</a:t>
+            </a:r>
+            <a:r>
+              <a:rPr dirty="0"/>
+              <a:t>)</a:t>
+            </a:r>
+          </a:p>
+          <a:p>
+            <a:pPr>
+              <a:spcBef>
+                <a:spcPts val="600"/>
+              </a:spcBef>
+              <a:spcAft>
+                <a:spcPts val="800"/>
+              </a:spcAft>
+              <a:defRPr sz="2000">
+                <a:solidFill>
+                  <a:srgbClr val="333333"/>
+                </a:solidFill>
+              </a:defRPr>
+            </a:pPr>
+            <a:r>
+              <a:rPr dirty="0"/>
+              <a:t>  • </a:t>
+            </a:r>
+            <a:r>
+              <a:rPr dirty="0">
+                <a:solidFill>
+                  <a:srgbClr val="FF0000"/>
+                </a:solidFill>
+              </a:rPr>
+              <a:t>3 children</a:t>
+            </a:r>
+            <a:r>
+              <a:rPr dirty="0"/>
+              <a:t>: 20.4% of income on food (</a:t>
+            </a:r>
+            <a:r>
+              <a:rPr dirty="0">
+                <a:solidFill>
+                  <a:srgbClr val="FF0000"/>
+                </a:solidFill>
+              </a:rPr>
+              <a:t>IMPOSSIBLE</a:t>
+            </a:r>
+            <a:r>
+              <a:rPr dirty="0"/>
+              <a:t>)</a:t>
+            </a:r>
+          </a:p>
+          <a:p>
+            <a:pPr>
+              <a:spcBef>
+                <a:spcPts val="600"/>
+              </a:spcBef>
+              <a:spcAft>
+                <a:spcPts val="800"/>
+              </a:spcAft>
+              <a:defRPr sz="2000">
+                <a:solidFill>
+                  <a:srgbClr val="333333"/>
+                </a:solidFill>
+              </a:defRPr>
+            </a:pPr>
+            <a:r>
+              <a:rPr sz="2400" b="1" dirty="0"/>
+              <a:t>Young couple, SMIC </a:t>
+            </a:r>
+            <a:r>
+              <a:rPr dirty="0"/>
+              <a:t>(</a:t>
+            </a:r>
+            <a:r>
+              <a:rPr dirty="0">
+                <a:solidFill>
+                  <a:srgbClr val="FF0000"/>
+                </a:solidFill>
+              </a:rPr>
+              <a:t>21,000 EUR</a:t>
+            </a:r>
+            <a:r>
+              <a:rPr dirty="0"/>
+              <a:t>/year):</a:t>
+            </a:r>
+          </a:p>
+          <a:p>
+            <a:pPr>
+              <a:spcBef>
+                <a:spcPts val="600"/>
+              </a:spcBef>
+              <a:spcAft>
+                <a:spcPts val="800"/>
+              </a:spcAft>
+              <a:defRPr sz="2000">
+                <a:solidFill>
+                  <a:srgbClr val="333333"/>
+                </a:solidFill>
+              </a:defRPr>
+            </a:pPr>
+            <a:r>
+              <a:rPr dirty="0"/>
+              <a:t>  • </a:t>
+            </a:r>
+            <a:r>
+              <a:rPr dirty="0">
+                <a:solidFill>
+                  <a:srgbClr val="FF0000"/>
+                </a:solidFill>
+              </a:rPr>
+              <a:t>1 child</a:t>
+            </a:r>
+            <a:r>
+              <a:rPr dirty="0"/>
+              <a:t>: 25.2% of income (</a:t>
+            </a:r>
+            <a:r>
+              <a:rPr dirty="0">
+                <a:solidFill>
+                  <a:srgbClr val="FF0000"/>
+                </a:solidFill>
+              </a:rPr>
+              <a:t>CRISIS</a:t>
+            </a:r>
+            <a:r>
+              <a:rPr dirty="0"/>
+              <a:t>)</a:t>
+            </a:r>
+          </a:p>
+          <a:p>
+            <a:pPr>
+              <a:spcBef>
+                <a:spcPts val="600"/>
+              </a:spcBef>
+              <a:spcAft>
+                <a:spcPts val="800"/>
+              </a:spcAft>
+              <a:defRPr sz="2000">
+                <a:solidFill>
+                  <a:srgbClr val="333333"/>
+                </a:solidFill>
+              </a:defRPr>
+            </a:pPr>
+            <a:r>
+              <a:rPr dirty="0"/>
+              <a:t>  • </a:t>
+            </a:r>
+            <a:r>
+              <a:rPr dirty="0">
+                <a:solidFill>
+                  <a:srgbClr val="FF0000"/>
+                </a:solidFill>
+              </a:rPr>
+              <a:t>2 children</a:t>
+            </a:r>
+            <a:r>
+              <a:rPr dirty="0"/>
+              <a:t>: 38.9% of income (</a:t>
+            </a:r>
+            <a:r>
+              <a:rPr dirty="0">
+                <a:solidFill>
+                  <a:srgbClr val="FF0000"/>
+                </a:solidFill>
+              </a:rPr>
+              <a:t>IMPOSSIBLE</a:t>
+            </a:r>
+            <a:r>
+              <a:rPr dirty="0"/>
+              <a:t> - CHOOSE: FOOD OR HOUSING)</a:t>
+            </a:r>
+          </a:p>
+          <a:p>
+            <a:pPr>
+              <a:spcBef>
+                <a:spcPts val="600"/>
+              </a:spcBef>
+              <a:spcAft>
+                <a:spcPts val="800"/>
+              </a:spcAft>
+              <a:defRPr sz="2000">
+                <a:solidFill>
+                  <a:srgbClr val="333333"/>
+                </a:solidFill>
+              </a:defRPr>
+            </a:pPr>
+            <a:r>
+              <a:rPr sz="2400" b="1" dirty="0"/>
+              <a:t>Paris birth rate: </a:t>
+            </a:r>
+            <a:r>
+              <a:rPr dirty="0">
+                <a:solidFill>
+                  <a:srgbClr val="FF0000"/>
+                </a:solidFill>
+              </a:rPr>
+              <a:t>1.4 children</a:t>
+            </a:r>
+            <a:r>
+              <a:rPr dirty="0"/>
+              <a:t>/woman (replacement: 2.1)</a:t>
+            </a:r>
+          </a:p>
+          <a:p>
+            <a:pPr>
+              <a:spcBef>
+                <a:spcPts val="600"/>
+              </a:spcBef>
+              <a:spcAft>
+                <a:spcPts val="800"/>
+              </a:spcAft>
+              <a:defRPr sz="2000">
+                <a:solidFill>
+                  <a:srgbClr val="333333"/>
+                </a:solidFill>
+              </a:defRPr>
+            </a:pPr>
+            <a:r>
+              <a:rPr dirty="0"/>
+              <a:t>This is not cultural choice. This is economic calculus.</a:t>
+            </a:r>
+          </a:p>
+          <a:p>
+            <a:pPr>
+              <a:spcBef>
+                <a:spcPts val="600"/>
+              </a:spcBef>
+              <a:spcAft>
+                <a:spcPts val="800"/>
+              </a:spcAft>
+              <a:defRPr sz="2000">
+                <a:solidFill>
+                  <a:srgbClr val="333333"/>
+                </a:solidFill>
+              </a:defRPr>
+            </a:pPr>
+            <a:r>
+              <a:rPr dirty="0"/>
+              <a:t>Families are rationing their size. Demographic collapse is silent rationing.</a:t>
             </a:r>
           </a:p>
         </p:txBody>
@@ -3976,8 +5384,8 @@
 </p:sld>
 </file>
 
-<file path=ppt/slides/slide15.xml><?xml version="1.0" encoding="utf-8"?>
-<p:sld xmlns:a="http://schemas.openxmlformats.org/drawingml/2006/main" xmlns:p="http://schemas.openxmlformats.org/presentationml/2006/main" xmlns:r="http://schemas.openxmlformats.org/officeDocument/2006/relationships">
+<file path=ppt/slides/slide2.xml><?xml version="1.0" encoding="utf-8"?>
+<p:sld xmlns:a="http://schemas.openxmlformats.org/drawingml/2006/main" xmlns:r="http://schemas.openxmlformats.org/officeDocument/2006/relationships" xmlns:p="http://schemas.openxmlformats.org/presentationml/2006/main">
   <p:cSld>
     <p:bg>
       <p:bgPr>
@@ -3993,7 +5401,14 @@
         <p:cNvGrpSpPr/>
         <p:nvPr/>
       </p:nvGrpSpPr>
-      <p:grpSpPr/>
+      <p:grpSpPr>
+        <a:xfrm>
+          <a:off x="0" y="0"/>
+          <a:ext cx="0" cy="0"/>
+          <a:chOff x="0" y="0"/>
+          <a:chExt cx="0" cy="0"/>
+        </a:xfrm>
+      </p:grpSpPr>
       <p:sp>
         <p:nvSpPr>
           <p:cNvPr id="2" name="Rectangle 1"/>
@@ -4049,35 +5464,210 @@
               </a:defRPr>
             </a:pPr>
             <a:r>
-              <a:t>The Affordability Multiplier: Household Composition Impact</a:t>
-            </a:r>
-          </a:p>
-        </p:txBody>
-      </p:sp>
-      <p:pic>
-        <p:nvPicPr>
-          <p:cNvPr id="3" name="Picture 2" descr="06_household_cost_impact.png"/>
-          <p:cNvPicPr>
-            <a:picLocks noChangeAspect="1"/>
-          </p:cNvPicPr>
+              <a:t>The Problem: Official Baskets are Incomplete</a:t>
+            </a:r>
+          </a:p>
+        </p:txBody>
+      </p:sp>
+      <p:sp>
+        <p:nvSpPr>
+          <p:cNvPr id="3" name="TextBox 2"/>
+          <p:cNvSpPr txBox="1"/>
           <p:nvPr/>
-        </p:nvPicPr>
-        <p:blipFill>
-          <a:blip r:embed="rId2"/>
-          <a:stretch>
-            <a:fillRect/>
-          </a:stretch>
-        </p:blipFill>
+        </p:nvSpPr>
         <p:spPr>
           <a:xfrm>
-            <a:off x="457200" y="1188720"/>
-            <a:ext cx="8352169" cy="4846320"/>
+            <a:off x="731520" y="1188720"/>
+            <a:ext cx="7680960" cy="5212080"/>
           </a:xfrm>
           <a:prstGeom prst="rect">
             <a:avLst/>
           </a:prstGeom>
+          <a:noFill/>
         </p:spPr>
-      </p:pic>
+        <p:txBody>
+          <a:bodyPr wrap="square">
+            <a:spAutoFit/>
+          </a:bodyPr>
+          <a:lstStyle/>
+          <a:p>
+            <a:pPr>
+              <a:spcBef>
+                <a:spcPts val="600"/>
+              </a:spcBef>
+              <a:spcAft>
+                <a:spcPts val="800"/>
+              </a:spcAft>
+              <a:defRPr sz="2000">
+                <a:solidFill>
+                  <a:srgbClr val="333333"/>
+                </a:solidFill>
+              </a:defRPr>
+            </a:pPr>
+            <a:r>
+              <a:t>INSEE reports inflation based on a MINIMAL BASKET of emblematic products:</a:t>
+            </a:r>
+          </a:p>
+          <a:p>
+            <a:pPr>
+              <a:spcBef>
+                <a:spcPts val="600"/>
+              </a:spcBef>
+              <a:spcAft>
+                <a:spcPts val="800"/>
+              </a:spcAft>
+              <a:defRPr sz="2000">
+                <a:solidFill>
+                  <a:srgbClr val="333333"/>
+                </a:solidFill>
+              </a:defRPr>
+            </a:pPr>
+            <a:r>
+              <a:t>  • Milk, bread, eggs, cheese, butter, pasta...</a:t>
+            </a:r>
+          </a:p>
+          <a:p>
+            <a:pPr>
+              <a:spcBef>
+                <a:spcPts val="600"/>
+              </a:spcBef>
+              <a:spcAft>
+                <a:spcPts val="800"/>
+              </a:spcAft>
+              <a:defRPr sz="2000">
+                <a:solidFill>
+                  <a:srgbClr val="333333"/>
+                </a:solidFill>
+              </a:defRPr>
+            </a:pPr>
+            <a:endParaRPr/>
+          </a:p>
+          <a:p>
+            <a:pPr>
+              <a:spcBef>
+                <a:spcPts val="600"/>
+              </a:spcBef>
+              <a:spcAft>
+                <a:spcPts val="800"/>
+              </a:spcAft>
+              <a:defRPr sz="2000">
+                <a:solidFill>
+                  <a:srgbClr val="333333"/>
+                </a:solidFill>
+              </a:defRPr>
+            </a:pPr>
+            <a:r>
+              <a:t>But official baskets IGNORE the complementary items families actually need:</a:t>
+            </a:r>
+          </a:p>
+          <a:p>
+            <a:pPr>
+              <a:spcBef>
+                <a:spcPts val="600"/>
+              </a:spcBef>
+              <a:spcAft>
+                <a:spcPts val="800"/>
+              </a:spcAft>
+              <a:defRPr sz="2000">
+                <a:solidFill>
+                  <a:srgbClr val="333333"/>
+                </a:solidFill>
+              </a:defRPr>
+            </a:pPr>
+            <a:r>
+              <a:t>  • Different milk types (lactose-free, baby formula)</a:t>
+            </a:r>
+          </a:p>
+          <a:p>
+            <a:pPr>
+              <a:spcBef>
+                <a:spcPts val="600"/>
+              </a:spcBef>
+              <a:spcAft>
+                <a:spcPts val="800"/>
+              </a:spcAft>
+              <a:defRPr sz="2000">
+                <a:solidFill>
+                  <a:srgbClr val="333333"/>
+                </a:solidFill>
+              </a:defRPr>
+            </a:pPr>
+            <a:r>
+              <a:t>  • Items that complete meals (sauces, oils, spices)</a:t>
+            </a:r>
+          </a:p>
+          <a:p>
+            <a:pPr>
+              <a:spcBef>
+                <a:spcPts val="600"/>
+              </a:spcBef>
+              <a:spcAft>
+                <a:spcPts val="800"/>
+              </a:spcAft>
+              <a:defRPr sz="2000">
+                <a:solidFill>
+                  <a:srgbClr val="333333"/>
+                </a:solidFill>
+              </a:defRPr>
+            </a:pPr>
+            <a:r>
+              <a:t>  • Baby essentials (diapers, creams)</a:t>
+            </a:r>
+          </a:p>
+          <a:p>
+            <a:pPr>
+              <a:spcBef>
+                <a:spcPts val="600"/>
+              </a:spcBef>
+              <a:spcAft>
+                <a:spcPts val="800"/>
+              </a:spcAft>
+              <a:defRPr sz="2000">
+                <a:solidFill>
+                  <a:srgbClr val="333333"/>
+                </a:solidFill>
+              </a:defRPr>
+            </a:pPr>
+            <a:r>
+              <a:t>  • Dietary alternatives (allergies, intolerances)</a:t>
+            </a:r>
+          </a:p>
+          <a:p>
+            <a:pPr>
+              <a:spcBef>
+                <a:spcPts val="600"/>
+              </a:spcBef>
+              <a:spcAft>
+                <a:spcPts val="800"/>
+              </a:spcAft>
+              <a:defRPr sz="2000">
+                <a:solidFill>
+                  <a:srgbClr val="333333"/>
+                </a:solidFill>
+              </a:defRPr>
+            </a:pPr>
+            <a:endParaRPr/>
+          </a:p>
+          <a:p>
+            <a:pPr>
+              <a:spcBef>
+                <a:spcPts val="600"/>
+              </a:spcBef>
+              <a:spcAft>
+                <a:spcPts val="800"/>
+              </a:spcAft>
+              <a:defRPr sz="2000">
+                <a:solidFill>
+                  <a:srgbClr val="333333"/>
+                </a:solidFill>
+              </a:defRPr>
+            </a:pPr>
+            <a:r>
+              <a:t>Result: Official inflation numbers measure SURVIVAL, not LIVING</a:t>
+            </a:r>
+          </a:p>
+        </p:txBody>
+      </p:sp>
     </p:spTree>
   </p:cSld>
   <p:clrMapOvr>
@@ -4086,8 +5676,8 @@
 </p:sld>
 </file>
 
-<file path=ppt/slides/slide16.xml><?xml version="1.0" encoding="utf-8"?>
-<p:sld xmlns:a="http://schemas.openxmlformats.org/drawingml/2006/main" xmlns:p="http://schemas.openxmlformats.org/presentationml/2006/main" xmlns:r="http://schemas.openxmlformats.org/officeDocument/2006/relationships">
+<file path=ppt/slides/slide20.xml><?xml version="1.0" encoding="utf-8"?>
+<p:sld xmlns:a="http://schemas.openxmlformats.org/drawingml/2006/main" xmlns:r="http://schemas.openxmlformats.org/officeDocument/2006/relationships" xmlns:p="http://schemas.openxmlformats.org/presentationml/2006/main">
   <p:cSld>
     <p:bg>
       <p:bgPr>
@@ -4103,7 +5693,14 @@
         <p:cNvGrpSpPr/>
         <p:nvPr/>
       </p:nvGrpSpPr>
-      <p:grpSpPr/>
+      <p:grpSpPr>
+        <a:xfrm>
+          <a:off x="0" y="0"/>
+          <a:ext cx="0" cy="0"/>
+          <a:chOff x="0" y="0"/>
+          <a:chExt cx="0" cy="0"/>
+        </a:xfrm>
+      </p:grpSpPr>
       <p:sp>
         <p:nvSpPr>
           <p:cNvPr id="2" name="Rectangle 1"/>
@@ -4159,35 +5756,194 @@
               </a:defRPr>
             </a:pPr>
             <a:r>
-              <a:t>The Multiplication Effect: Composition × Income = Crisis</a:t>
-            </a:r>
-          </a:p>
-        </p:txBody>
-      </p:sp>
-      <p:pic>
-        <p:nvPicPr>
-          <p:cNvPr id="3" name="Picture 2" descr="07_affordability_by_composition.png"/>
-          <p:cNvPicPr>
-            <a:picLocks noChangeAspect="1"/>
-          </p:cNvPicPr>
+              <a:t>Why This Matters</a:t>
+            </a:r>
+          </a:p>
+        </p:txBody>
+      </p:sp>
+      <p:sp>
+        <p:nvSpPr>
+          <p:cNvPr id="3" name="TextBox 2"/>
+          <p:cNvSpPr txBox="1"/>
           <p:nvPr/>
-        </p:nvPicPr>
-        <p:blipFill>
-          <a:blip r:embed="rId2"/>
-          <a:stretch>
-            <a:fillRect/>
-          </a:stretch>
-        </p:blipFill>
+        </p:nvSpPr>
         <p:spPr>
           <a:xfrm>
-            <a:off x="457200" y="1188720"/>
-            <a:ext cx="8367291" cy="4846320"/>
+            <a:off x="731520" y="1188720"/>
+            <a:ext cx="7680960" cy="5042406"/>
           </a:xfrm>
           <a:prstGeom prst="rect">
             <a:avLst/>
           </a:prstGeom>
+          <a:noFill/>
         </p:spPr>
-      </p:pic>
+        <p:txBody>
+          <a:bodyPr wrap="square">
+            <a:spAutoFit/>
+          </a:bodyPr>
+          <a:lstStyle/>
+          <a:p>
+            <a:pPr>
+              <a:spcBef>
+                <a:spcPts val="600"/>
+              </a:spcBef>
+              <a:spcAft>
+                <a:spcPts val="800"/>
+              </a:spcAft>
+              <a:defRPr sz="2000">
+                <a:solidFill>
+                  <a:srgbClr val="333333"/>
+                </a:solidFill>
+              </a:defRPr>
+            </a:pPr>
+            <a:r>
+              <a:rPr dirty="0"/>
+              <a:t>POLICY MAKERS base decisions on official inflation rates that underestimate</a:t>
+            </a:r>
+          </a:p>
+          <a:p>
+            <a:pPr>
+              <a:spcBef>
+                <a:spcPts val="600"/>
+              </a:spcBef>
+              <a:spcAft>
+                <a:spcPts val="800"/>
+              </a:spcAft>
+              <a:defRPr sz="2000">
+                <a:solidFill>
+                  <a:srgbClr val="333333"/>
+                </a:solidFill>
+              </a:defRPr>
+            </a:pPr>
+            <a:r>
+              <a:rPr dirty="0"/>
+              <a:t>real costs by 30-50%</a:t>
+            </a:r>
+          </a:p>
+          <a:p>
+            <a:pPr>
+              <a:spcBef>
+                <a:spcPts val="600"/>
+              </a:spcBef>
+              <a:spcAft>
+                <a:spcPts val="800"/>
+              </a:spcAft>
+              <a:defRPr sz="2000">
+                <a:solidFill>
+                  <a:srgbClr val="333333"/>
+                </a:solidFill>
+              </a:defRPr>
+            </a:pPr>
+            <a:r>
+              <a:rPr dirty="0"/>
+              <a:t>WORKERS see their salaries (linked to inflation) never keep pace with actual</a:t>
+            </a:r>
+          </a:p>
+          <a:p>
+            <a:pPr>
+              <a:spcBef>
+                <a:spcPts val="600"/>
+              </a:spcBef>
+              <a:spcAft>
+                <a:spcPts val="800"/>
+              </a:spcAft>
+              <a:defRPr sz="2000">
+                <a:solidFill>
+                  <a:srgbClr val="333333"/>
+                </a:solidFill>
+              </a:defRPr>
+            </a:pPr>
+            <a:r>
+              <a:rPr dirty="0"/>
+              <a:t>living expenses</a:t>
+            </a:r>
+          </a:p>
+          <a:p>
+            <a:pPr>
+              <a:spcBef>
+                <a:spcPts val="600"/>
+              </a:spcBef>
+              <a:spcAft>
+                <a:spcPts val="800"/>
+              </a:spcAft>
+              <a:defRPr sz="2000">
+                <a:solidFill>
+                  <a:srgbClr val="333333"/>
+                </a:solidFill>
+              </a:defRPr>
+            </a:pPr>
+            <a:r>
+              <a:rPr dirty="0"/>
+              <a:t>FAMILIES make impossible choices: healthy food OR paying rent?</a:t>
+            </a:r>
+          </a:p>
+          <a:p>
+            <a:pPr>
+              <a:spcBef>
+                <a:spcPts val="600"/>
+              </a:spcBef>
+              <a:spcAft>
+                <a:spcPts val="800"/>
+              </a:spcAft>
+              <a:defRPr sz="2000">
+                <a:solidFill>
+                  <a:srgbClr val="333333"/>
+                </a:solidFill>
+              </a:defRPr>
+            </a:pPr>
+            <a:r>
+              <a:rPr dirty="0"/>
+              <a:t>Diapers OR transportation?</a:t>
+            </a:r>
+          </a:p>
+          <a:p>
+            <a:pPr>
+              <a:spcBef>
+                <a:spcPts val="600"/>
+              </a:spcBef>
+              <a:spcAft>
+                <a:spcPts val="800"/>
+              </a:spcAft>
+              <a:defRPr sz="2000">
+                <a:solidFill>
+                  <a:srgbClr val="333333"/>
+                </a:solidFill>
+              </a:defRPr>
+            </a:pPr>
+            <a:r>
+              <a:rPr dirty="0"/>
+              <a:t>INEQUALITY is hidden in the numbers. What's not measured is not managed.</a:t>
+            </a:r>
+          </a:p>
+          <a:p>
+            <a:pPr>
+              <a:spcBef>
+                <a:spcPts val="600"/>
+              </a:spcBef>
+              <a:spcAft>
+                <a:spcPts val="800"/>
+              </a:spcAft>
+              <a:defRPr sz="2000">
+                <a:solidFill>
+                  <a:srgbClr val="333333"/>
+                </a:solidFill>
+              </a:defRPr>
+            </a:pPr>
+            <a:r>
+              <a:rPr dirty="0"/>
+              <a:t>STATISTICS are not neutral. They reveal what society has decided to COUNT</a:t>
+            </a:r>
+            <a:r>
+              <a:rPr lang="en-US" dirty="0"/>
+              <a:t> </a:t>
+            </a:r>
+            <a:r>
+              <a:rPr dirty="0"/>
+              <a:t>and what it chooses to IGNORE.</a:t>
+            </a:r>
+          </a:p>
+        </p:txBody>
+      </p:sp>
     </p:spTree>
   </p:cSld>
   <p:clrMapOvr>
@@ -4196,8 +5952,8 @@
 </p:sld>
 </file>
 
-<file path=ppt/slides/slide17.xml><?xml version="1.0" encoding="utf-8"?>
-<p:sld xmlns:a="http://schemas.openxmlformats.org/drawingml/2006/main" xmlns:p="http://schemas.openxmlformats.org/presentationml/2006/main" xmlns:r="http://schemas.openxmlformats.org/officeDocument/2006/relationships">
+<file path=ppt/slides/slide21.xml><?xml version="1.0" encoding="utf-8"?>
+<p:sld xmlns:a="http://schemas.openxmlformats.org/drawingml/2006/main" xmlns:r="http://schemas.openxmlformats.org/officeDocument/2006/relationships" xmlns:p="http://schemas.openxmlformats.org/presentationml/2006/main">
   <p:cSld>
     <p:bg>
       <p:bgPr>
@@ -4213,7 +5969,430 @@
         <p:cNvGrpSpPr/>
         <p:nvPr/>
       </p:nvGrpSpPr>
-      <p:grpSpPr/>
+      <p:grpSpPr>
+        <a:xfrm>
+          <a:off x="0" y="0"/>
+          <a:ext cx="0" cy="0"/>
+          <a:chOff x="0" y="0"/>
+          <a:chExt cx="0" cy="0"/>
+        </a:xfrm>
+      </p:grpSpPr>
+      <p:sp>
+        <p:nvSpPr>
+          <p:cNvPr id="2" name="Rectangle 1"/>
+          <p:cNvSpPr/>
+          <p:nvPr/>
+        </p:nvSpPr>
+        <p:spPr>
+          <a:xfrm>
+            <a:off x="0" y="0"/>
+            <a:ext cx="9144000" cy="1188720"/>
+          </a:xfrm>
+          <a:prstGeom prst="rect">
+            <a:avLst/>
+          </a:prstGeom>
+          <a:solidFill>
+            <a:srgbClr val="1F4E79"/>
+          </a:solidFill>
+          <a:ln>
+            <a:solidFill>
+              <a:srgbClr val="1F4E79"/>
+            </a:solidFill>
+          </a:ln>
+        </p:spPr>
+        <p:style>
+          <a:lnRef idx="1">
+            <a:schemeClr val="accent1"/>
+          </a:lnRef>
+          <a:fillRef idx="3">
+            <a:schemeClr val="accent1"/>
+          </a:fillRef>
+          <a:effectRef idx="2">
+            <a:schemeClr val="accent1"/>
+          </a:effectRef>
+          <a:fontRef idx="minor">
+            <a:schemeClr val="lt1"/>
+          </a:fontRef>
+        </p:style>
+        <p:txBody>
+          <a:bodyPr rtlCol="0" anchor="ctr"/>
+          <a:lstStyle/>
+          <a:p>
+            <a:pPr algn="ctr">
+              <a:spcBef>
+                <a:spcPts val="1200"/>
+              </a:spcBef>
+              <a:spcAft>
+                <a:spcPts val="1200"/>
+              </a:spcAft>
+              <a:defRPr sz="4400" b="1">
+                <a:solidFill>
+                  <a:srgbClr val="FFFFFF"/>
+                </a:solidFill>
+              </a:defRPr>
+            </a:pPr>
+            <a:r>
+              <a:rPr dirty="0"/>
+              <a:t>The Opportunity: Real Data for Real Decisions</a:t>
+            </a:r>
+          </a:p>
+        </p:txBody>
+      </p:sp>
+      <p:sp>
+        <p:nvSpPr>
+          <p:cNvPr id="3" name="TextBox 2"/>
+          <p:cNvSpPr txBox="1"/>
+          <p:nvPr/>
+        </p:nvSpPr>
+        <p:spPr>
+          <a:xfrm>
+            <a:off x="731520" y="1188720"/>
+            <a:ext cx="7680960" cy="4975721"/>
+          </a:xfrm>
+          <a:prstGeom prst="rect">
+            <a:avLst/>
+          </a:prstGeom>
+          <a:noFill/>
+        </p:spPr>
+        <p:txBody>
+          <a:bodyPr wrap="square">
+            <a:spAutoFit/>
+          </a:bodyPr>
+          <a:lstStyle/>
+          <a:p>
+            <a:pPr>
+              <a:spcBef>
+                <a:spcPts val="600"/>
+              </a:spcBef>
+              <a:spcAft>
+                <a:spcPts val="800"/>
+              </a:spcAft>
+              <a:defRPr sz="2000">
+                <a:solidFill>
+                  <a:srgbClr val="333333"/>
+                </a:solidFill>
+              </a:defRPr>
+            </a:pPr>
+            <a:r>
+              <a:rPr sz="2400" b="1" dirty="0"/>
+              <a:t>Snipper Tool </a:t>
+            </a:r>
+            <a:r>
+              <a:rPr dirty="0"/>
+              <a:t>changes this by collecting REAL pricing data for REAL baskets:</a:t>
+            </a:r>
+          </a:p>
+          <a:p>
+            <a:pPr>
+              <a:spcBef>
+                <a:spcPts val="600"/>
+              </a:spcBef>
+              <a:spcAft>
+                <a:spcPts val="800"/>
+              </a:spcAft>
+              <a:defRPr sz="2000">
+                <a:solidFill>
+                  <a:srgbClr val="333333"/>
+                </a:solidFill>
+              </a:defRPr>
+            </a:pPr>
+            <a:r>
+              <a:rPr dirty="0">
+                <a:solidFill>
+                  <a:srgbClr val="FF0000"/>
+                </a:solidFill>
+              </a:rPr>
+              <a:t>Real families don't buy INSEE baskets</a:t>
+            </a:r>
+            <a:r>
+              <a:rPr dirty="0"/>
+              <a:t>.</a:t>
+            </a:r>
+          </a:p>
+          <a:p>
+            <a:pPr>
+              <a:spcBef>
+                <a:spcPts val="600"/>
+              </a:spcBef>
+              <a:spcAft>
+                <a:spcPts val="800"/>
+              </a:spcAft>
+              <a:defRPr sz="2000">
+                <a:solidFill>
+                  <a:srgbClr val="333333"/>
+                </a:solidFill>
+              </a:defRPr>
+            </a:pPr>
+            <a:r>
+              <a:rPr dirty="0"/>
+              <a:t>They buy complete meals, dietary alternatives, baby products, and items</a:t>
+            </a:r>
+          </a:p>
+          <a:p>
+            <a:pPr>
+              <a:spcBef>
+                <a:spcPts val="600"/>
+              </a:spcBef>
+              <a:spcAft>
+                <a:spcPts val="800"/>
+              </a:spcAft>
+              <a:defRPr sz="2000">
+                <a:solidFill>
+                  <a:srgbClr val="333333"/>
+                </a:solidFill>
+              </a:defRPr>
+            </a:pPr>
+            <a:r>
+              <a:rPr dirty="0"/>
+              <a:t>that support healthy, dignified family life.</a:t>
+            </a:r>
+          </a:p>
+          <a:p>
+            <a:pPr>
+              <a:spcBef>
+                <a:spcPts val="600"/>
+              </a:spcBef>
+              <a:spcAft>
+                <a:spcPts val="800"/>
+              </a:spcAft>
+              <a:defRPr sz="2000">
+                <a:solidFill>
+                  <a:srgbClr val="333333"/>
+                </a:solidFill>
+              </a:defRPr>
+            </a:pPr>
+            <a:r>
+              <a:rPr dirty="0"/>
+              <a:t>By tracking ACTUAL purchases across Paris supermarkets, </a:t>
+            </a:r>
+            <a:r>
+              <a:rPr b="1" dirty="0"/>
+              <a:t>Snipper Tool </a:t>
+            </a:r>
+            <a:r>
+              <a:rPr dirty="0"/>
+              <a:t>can:</a:t>
+            </a:r>
+          </a:p>
+          <a:p>
+            <a:pPr>
+              <a:spcBef>
+                <a:spcPts val="600"/>
+              </a:spcBef>
+              <a:spcAft>
+                <a:spcPts val="800"/>
+              </a:spcAft>
+              <a:defRPr sz="2000">
+                <a:solidFill>
+                  <a:srgbClr val="333333"/>
+                </a:solidFill>
+              </a:defRPr>
+            </a:pPr>
+            <a:r>
+              <a:rPr dirty="0"/>
+              <a:t>  • </a:t>
+            </a:r>
+            <a:r>
+              <a:rPr b="1" dirty="0"/>
+              <a:t>Expose the gap </a:t>
+            </a:r>
+            <a:r>
+              <a:rPr dirty="0"/>
+              <a:t>between official statistics and real costs</a:t>
+            </a:r>
+          </a:p>
+          <a:p>
+            <a:pPr>
+              <a:spcBef>
+                <a:spcPts val="600"/>
+              </a:spcBef>
+              <a:spcAft>
+                <a:spcPts val="800"/>
+              </a:spcAft>
+              <a:defRPr sz="2000">
+                <a:solidFill>
+                  <a:srgbClr val="333333"/>
+                </a:solidFill>
+              </a:defRPr>
+            </a:pPr>
+            <a:r>
+              <a:rPr dirty="0"/>
+              <a:t>  • </a:t>
+            </a:r>
+            <a:r>
+              <a:rPr b="1" dirty="0"/>
+              <a:t>Track health-focused </a:t>
+            </a:r>
+            <a:r>
+              <a:rPr dirty="0"/>
+              <a:t>pricing decisions</a:t>
+            </a:r>
+          </a:p>
+          <a:p>
+            <a:pPr>
+              <a:spcBef>
+                <a:spcPts val="600"/>
+              </a:spcBef>
+              <a:spcAft>
+                <a:spcPts val="800"/>
+              </a:spcAft>
+              <a:defRPr sz="2000">
+                <a:solidFill>
+                  <a:srgbClr val="333333"/>
+                </a:solidFill>
+              </a:defRPr>
+            </a:pPr>
+            <a:r>
+              <a:rPr dirty="0"/>
+              <a:t>  • </a:t>
+            </a:r>
+            <a:r>
+              <a:rPr b="1" dirty="0"/>
+              <a:t>Identify affordability cliffs </a:t>
+            </a:r>
+            <a:r>
+              <a:rPr dirty="0"/>
+              <a:t>by income and family type</a:t>
+            </a:r>
+          </a:p>
+          <a:p>
+            <a:pPr>
+              <a:spcBef>
+                <a:spcPts val="600"/>
+              </a:spcBef>
+              <a:spcAft>
+                <a:spcPts val="800"/>
+              </a:spcAft>
+              <a:defRPr sz="2000">
+                <a:solidFill>
+                  <a:srgbClr val="333333"/>
+                </a:solidFill>
+              </a:defRPr>
+            </a:pPr>
+            <a:r>
+              <a:rPr dirty="0"/>
+              <a:t>  • </a:t>
+            </a:r>
+            <a:r>
+              <a:rPr b="1" dirty="0"/>
+              <a:t>Provide data </a:t>
+            </a:r>
+            <a:r>
+              <a:rPr dirty="0"/>
+              <a:t>for better policy and wage decisions</a:t>
+            </a:r>
+          </a:p>
+        </p:txBody>
+      </p:sp>
+    </p:spTree>
+  </p:cSld>
+  <p:clrMapOvr>
+    <a:masterClrMapping/>
+  </p:clrMapOvr>
+</p:sld>
+</file>
+
+<file path=ppt/slides/slide22.xml><?xml version="1.0" encoding="utf-8"?>
+<p:sld xmlns:a="http://schemas.openxmlformats.org/drawingml/2006/main" xmlns:r="http://schemas.openxmlformats.org/officeDocument/2006/relationships" xmlns:p="http://schemas.openxmlformats.org/presentationml/2006/main">
+  <p:cSld>
+    <p:bg>
+      <p:bgPr>
+        <a:solidFill>
+          <a:srgbClr val="1F4E79"/>
+        </a:solidFill>
+        <a:effectLst/>
+      </p:bgPr>
+    </p:bg>
+    <p:spTree>
+      <p:nvGrpSpPr>
+        <p:cNvPr id="1" name=""/>
+        <p:cNvGrpSpPr/>
+        <p:nvPr/>
+      </p:nvGrpSpPr>
+      <p:grpSpPr>
+        <a:xfrm>
+          <a:off x="0" y="0"/>
+          <a:ext cx="0" cy="0"/>
+          <a:chOff x="0" y="0"/>
+          <a:chExt cx="0" cy="0"/>
+        </a:xfrm>
+      </p:grpSpPr>
+      <p:sp>
+        <p:nvSpPr>
+          <p:cNvPr id="2" name="TextBox 1"/>
+          <p:cNvSpPr txBox="1"/>
+          <p:nvPr/>
+        </p:nvSpPr>
+        <p:spPr>
+          <a:xfrm>
+            <a:off x="914400" y="2286000"/>
+            <a:ext cx="7315200" cy="1938992"/>
+          </a:xfrm>
+          <a:prstGeom prst="rect">
+            <a:avLst/>
+          </a:prstGeom>
+          <a:noFill/>
+        </p:spPr>
+        <p:txBody>
+          <a:bodyPr wrap="square">
+            <a:spAutoFit/>
+          </a:bodyPr>
+          <a:lstStyle/>
+          <a:p>
+            <a:pPr algn="ctr">
+              <a:defRPr sz="3200" b="1" i="1">
+                <a:solidFill>
+                  <a:srgbClr val="ED7D31"/>
+                </a:solidFill>
+              </a:defRPr>
+            </a:pPr>
+            <a:r>
+              <a:rPr sz="4000" dirty="0"/>
+              <a:t>The numbers never lie.</a:t>
+            </a:r>
+            <a:br>
+              <a:rPr sz="4000" dirty="0"/>
+            </a:br>
+            <a:r>
+              <a:rPr sz="4000" dirty="0"/>
+              <a:t>But incomplete numbers hide the truth.</a:t>
+            </a:r>
+          </a:p>
+        </p:txBody>
+      </p:sp>
+    </p:spTree>
+  </p:cSld>
+  <p:clrMapOvr>
+    <a:masterClrMapping/>
+  </p:clrMapOvr>
+</p:sld>
+</file>
+
+<file path=ppt/slides/slide23.xml><?xml version="1.0" encoding="utf-8"?>
+<p:sld xmlns:a="http://schemas.openxmlformats.org/drawingml/2006/main" xmlns:r="http://schemas.openxmlformats.org/officeDocument/2006/relationships" xmlns:p="http://schemas.openxmlformats.org/presentationml/2006/main">
+  <p:cSld>
+    <p:bg>
+      <p:bgPr>
+        <a:solidFill>
+          <a:srgbClr val="FFFFFF"/>
+        </a:solidFill>
+        <a:effectLst/>
+      </p:bgPr>
+    </p:bg>
+    <p:spTree>
+      <p:nvGrpSpPr>
+        <p:cNvPr id="1" name=""/>
+        <p:cNvGrpSpPr/>
+        <p:nvPr/>
+      </p:nvGrpSpPr>
+      <p:grpSpPr>
+        <a:xfrm>
+          <a:off x="0" y="0"/>
+          <a:ext cx="0" cy="0"/>
+          <a:chOff x="0" y="0"/>
+          <a:chExt cx="0" cy="0"/>
+        </a:xfrm>
+      </p:grpSpPr>
       <p:sp>
         <p:nvSpPr>
           <p:cNvPr id="2" name="Rectangle 1"/>
@@ -4269,7 +6448,7 @@
               </a:defRPr>
             </a:pPr>
             <a:r>
-              <a:t>The Household Composition Multiplier Crisis</a:t>
+              <a:t>This Analysis</a:t>
             </a:r>
           </a:p>
         </p:txBody>
@@ -4310,1992 +6489,253 @@
               </a:defRPr>
             </a:pPr>
             <a:r>
-              <a:t>SMIC WORKER (21,000 EUR/year = 1,750 EUR/month):</a:t>
-            </a:r>
-          </a:p>
-          <a:p>
-            <a:pPr>
-              <a:spcBef>
-                <a:spcPts val="600"/>
-              </a:spcBef>
-              <a:spcAft>
-                <a:spcPts val="800"/>
-              </a:spcAft>
-              <a:defRPr sz="2000">
-                <a:solidFill>
-                  <a:srgbClr val="333333"/>
-                </a:solidFill>
-              </a:defRPr>
-            </a:pPr>
-            <a:r>
-              <a:t>  • Base (2 adults + 1 child): 17.4% of income (MANAGEABLE)</a:t>
-            </a:r>
-          </a:p>
-          <a:p>
-            <a:pPr>
-              <a:spcBef>
-                <a:spcPts val="600"/>
-              </a:spcBef>
-              <a:spcAft>
-                <a:spcPts val="800"/>
-              </a:spcAft>
-              <a:defRPr sz="2000">
-                <a:solidFill>
-                  <a:srgbClr val="333333"/>
-                </a:solidFill>
-              </a:defRPr>
-            </a:pPr>
-            <a:r>
-              <a:t>  • +1 Teenager: 33.8% of income (IMPOSSIBLE - NO MONEY FOR HOUSING)</a:t>
-            </a:r>
-          </a:p>
-          <a:p>
-            <a:pPr>
-              <a:spcBef>
-                <a:spcPts val="600"/>
-              </a:spcBef>
-              <a:spcAft>
-                <a:spcPts val="800"/>
-              </a:spcAft>
-              <a:defRPr sz="2000">
-                <a:solidFill>
-                  <a:srgbClr val="333333"/>
-                </a:solidFill>
-              </a:defRPr>
-            </a:pPr>
-            <a:r>
-              <a:t>  • +1 Senior: 36.4% of income (CATASTROPHIC)</a:t>
-            </a:r>
-          </a:p>
-          <a:p>
-            <a:pPr>
-              <a:spcBef>
-                <a:spcPts val="600"/>
-              </a:spcBef>
-              <a:spcAft>
-                <a:spcPts val="800"/>
-              </a:spcAft>
-              <a:defRPr sz="2000">
-                <a:solidFill>
-                  <a:srgbClr val="333333"/>
-                </a:solidFill>
-              </a:defRPr>
-            </a:pPr>
-          </a:p>
-          <a:p>
-            <a:pPr>
-              <a:spcBef>
-                <a:spcPts val="600"/>
-              </a:spcBef>
-              <a:spcAft>
-                <a:spcPts val="800"/>
-              </a:spcAft>
-              <a:defRPr sz="2000">
-                <a:solidFill>
-                  <a:srgbClr val="333333"/>
-                </a:solidFill>
-              </a:defRPr>
-            </a:pPr>
-            <a:r>
-              <a:t>MEDIAN PARIS (42,000 EUR/year):</a:t>
-            </a:r>
-          </a:p>
-          <a:p>
-            <a:pPr>
-              <a:spcBef>
-                <a:spcPts val="600"/>
-              </a:spcBef>
-              <a:spcAft>
-                <a:spcPts val="800"/>
-              </a:spcAft>
-              <a:defRPr sz="2000">
-                <a:solidFill>
-                  <a:srgbClr val="333333"/>
-                </a:solidFill>
-              </a:defRPr>
-            </a:pPr>
-            <a:r>
-              <a:t>  • Base: 8.7% of income (EXCELLENT)</a:t>
-            </a:r>
-          </a:p>
-          <a:p>
-            <a:pPr>
-              <a:spcBef>
-                <a:spcPts val="600"/>
-              </a:spcBef>
-              <a:spcAft>
-                <a:spcPts val="800"/>
-              </a:spcAft>
-              <a:defRPr sz="2000">
-                <a:solidFill>
-                  <a:srgbClr val="333333"/>
-                </a:solidFill>
-              </a:defRPr>
-            </a:pPr>
-            <a:r>
-              <a:t>  • +1 Teenager: 16.9% of income (MANAGEABLE)</a:t>
-            </a:r>
-          </a:p>
-          <a:p>
-            <a:pPr>
-              <a:spcBef>
-                <a:spcPts val="600"/>
-              </a:spcBef>
-              <a:spcAft>
-                <a:spcPts val="800"/>
-              </a:spcAft>
-              <a:defRPr sz="2000">
-                <a:solidFill>
-                  <a:srgbClr val="333333"/>
-                </a:solidFill>
-              </a:defRPr>
-            </a:pPr>
-            <a:r>
-              <a:t>  • +1 Senior: 18.2% of income (DIFFICULT BUT POSSIBLE)</a:t>
-            </a:r>
-          </a:p>
-          <a:p>
-            <a:pPr>
-              <a:spcBef>
-                <a:spcPts val="600"/>
-              </a:spcBef>
-              <a:spcAft>
-                <a:spcPts val="800"/>
-              </a:spcAft>
-              <a:defRPr sz="2000">
-                <a:solidFill>
-                  <a:srgbClr val="333333"/>
-                </a:solidFill>
-              </a:defRPr>
-            </a:pPr>
-          </a:p>
-          <a:p>
-            <a:pPr>
-              <a:spcBef>
-                <a:spcPts val="600"/>
-              </a:spcBef>
-              <a:spcAft>
-                <a:spcPts val="800"/>
-              </a:spcAft>
-              <a:defRPr sz="2000">
-                <a:solidFill>
-                  <a:srgbClr val="333333"/>
-                </a:solidFill>
-              </a:defRPr>
-            </a:pPr>
-            <a:r>
-              <a:t>THE CRUEL REALITY:</a:t>
-            </a:r>
-          </a:p>
-          <a:p>
-            <a:pPr>
-              <a:spcBef>
-                <a:spcPts val="600"/>
-              </a:spcBef>
-              <a:spcAft>
-                <a:spcPts val="800"/>
-              </a:spcAft>
-              <a:defRPr sz="2000">
-                <a:solidFill>
-                  <a:srgbClr val="333333"/>
-                </a:solidFill>
-              </a:defRPr>
-            </a:pPr>
-            <a:r>
-              <a:t>Families don't control their composition. They have children, care for aging</a:t>
-            </a:r>
-          </a:p>
-          <a:p>
-            <a:pPr>
-              <a:spcBef>
-                <a:spcPts val="600"/>
-              </a:spcBef>
-              <a:spcAft>
-                <a:spcPts val="800"/>
-              </a:spcAft>
-              <a:defRPr sz="2000">
-                <a:solidFill>
-                  <a:srgbClr val="333333"/>
-                </a:solidFill>
-              </a:defRPr>
-            </a:pPr>
-            <a:r>
-              <a:t>parents. Yet affordability multiplies with each family member.</a:t>
-            </a:r>
-          </a:p>
-          <a:p>
-            <a:pPr>
-              <a:spcBef>
-                <a:spcPts val="600"/>
-              </a:spcBef>
-              <a:spcAft>
-                <a:spcPts val="800"/>
-              </a:spcAft>
-              <a:defRPr sz="2000">
-                <a:solidFill>
-                  <a:srgbClr val="333333"/>
-                </a:solidFill>
-              </a:defRPr>
-            </a:pPr>
-            <a:r>
-              <a:t>Below 35k income: Growing families become impossible families.</a:t>
-            </a:r>
-          </a:p>
-        </p:txBody>
-      </p:sp>
-    </p:spTree>
-  </p:cSld>
-  <p:clrMapOvr>
-    <a:masterClrMapping/>
-  </p:clrMapOvr>
-</p:sld>
-</file>
-
-<file path=ppt/slides/slide18.xml><?xml version="1.0" encoding="utf-8"?>
-<p:sld xmlns:a="http://schemas.openxmlformats.org/drawingml/2006/main" xmlns:p="http://schemas.openxmlformats.org/presentationml/2006/main" xmlns:r="http://schemas.openxmlformats.org/officeDocument/2006/relationships">
-  <p:cSld>
-    <p:bg>
-      <p:bgPr>
-        <a:solidFill>
-          <a:srgbClr val="FFFFFF"/>
-        </a:solidFill>
-        <a:effectLst/>
-      </p:bgPr>
-    </p:bg>
-    <p:spTree>
-      <p:nvGrpSpPr>
-        <p:cNvPr id="1" name=""/>
-        <p:cNvGrpSpPr/>
-        <p:nvPr/>
-      </p:nvGrpSpPr>
-      <p:grpSpPr/>
-      <p:sp>
-        <p:nvSpPr>
-          <p:cNvPr id="2" name="Rectangle 1"/>
-          <p:cNvSpPr/>
-          <p:nvPr/>
-        </p:nvSpPr>
-        <p:spPr>
-          <a:xfrm>
-            <a:off x="0" y="0"/>
-            <a:ext cx="9144000" cy="822960"/>
-          </a:xfrm>
-          <a:prstGeom prst="rect">
-            <a:avLst/>
-          </a:prstGeom>
-          <a:solidFill>
-            <a:srgbClr val="1F4E79"/>
-          </a:solidFill>
-          <a:ln>
-            <a:solidFill>
-              <a:srgbClr val="1F4E79"/>
-            </a:solidFill>
-          </a:ln>
-        </p:spPr>
-        <p:style>
-          <a:lnRef idx="1">
-            <a:schemeClr val="accent1"/>
-          </a:lnRef>
-          <a:fillRef idx="3">
-            <a:schemeClr val="accent1"/>
-          </a:fillRef>
-          <a:effectRef idx="2">
-            <a:schemeClr val="accent1"/>
-          </a:effectRef>
-          <a:fontRef idx="minor">
-            <a:schemeClr val="lt1"/>
-          </a:fontRef>
-        </p:style>
-        <p:txBody>
-          <a:bodyPr rtlCol="0" anchor="ctr"/>
-          <a:lstStyle/>
-          <a:p>
-            <a:pPr algn="ctr">
-              <a:spcBef>
-                <a:spcPts val="1200"/>
-              </a:spcBef>
-              <a:spcAft>
-                <a:spcPts val="1200"/>
-              </a:spcAft>
-              <a:defRPr sz="4400" b="1">
-                <a:solidFill>
-                  <a:srgbClr val="FFFFFF"/>
-                </a:solidFill>
-              </a:defRPr>
-            </a:pPr>
-            <a:r>
-              <a:t>The Invisibility Crisis: Who Official Statistics Erase</a:t>
-            </a:r>
-          </a:p>
-        </p:txBody>
-      </p:sp>
-      <p:sp>
-        <p:nvSpPr>
-          <p:cNvPr id="3" name="TextBox 2"/>
-          <p:cNvSpPr txBox="1"/>
-          <p:nvPr/>
-        </p:nvSpPr>
-        <p:spPr>
-          <a:xfrm>
-            <a:off x="731520" y="1188720"/>
-            <a:ext cx="7680960" cy="5212080"/>
-          </a:xfrm>
-          <a:prstGeom prst="rect">
-            <a:avLst/>
-          </a:prstGeom>
-          <a:noFill/>
-        </p:spPr>
-        <p:txBody>
-          <a:bodyPr wrap="square">
-            <a:spAutoFit/>
-          </a:bodyPr>
-          <a:lstStyle/>
-          <a:p>
-            <a:pPr>
-              <a:spcBef>
-                <a:spcPts val="600"/>
-              </a:spcBef>
-              <a:spcAft>
-                <a:spcPts val="800"/>
-              </a:spcAft>
-              <a:defRPr sz="2000">
-                <a:solidFill>
-                  <a:srgbClr val="333333"/>
-                </a:solidFill>
-              </a:defRPr>
-            </a:pPr>
-            <a:r>
-              <a:t>SENIORS: Specialized dietary needs (soft foods, health management)</a:t>
-            </a:r>
-          </a:p>
-          <a:p>
-            <a:pPr>
-              <a:spcBef>
-                <a:spcPts val="600"/>
-              </a:spcBef>
-              <a:spcAft>
-                <a:spcPts val="800"/>
-              </a:spcAft>
-              <a:defRPr sz="2000">
-                <a:solidFill>
-                  <a:srgbClr val="333333"/>
-                </a:solidFill>
-              </a:defRPr>
-            </a:pPr>
-            <a:r>
-              <a:t>  • €334/month more than baseline, but counted as 'standard adult'</a:t>
-            </a:r>
-          </a:p>
-          <a:p>
-            <a:pPr>
-              <a:spcBef>
-                <a:spcPts val="600"/>
-              </a:spcBef>
-              <a:spcAft>
-                <a:spcPts val="800"/>
-              </a:spcAft>
-              <a:defRPr sz="2000">
-                <a:solidFill>
-                  <a:srgbClr val="333333"/>
-                </a:solidFill>
-              </a:defRPr>
-            </a:pPr>
-            <a:r>
-              <a:t>  • Elderly people disappear from policy view</a:t>
-            </a:r>
-          </a:p>
-          <a:p>
-            <a:pPr>
-              <a:spcBef>
-                <a:spcPts val="600"/>
-              </a:spcBef>
-              <a:spcAft>
-                <a:spcPts val="800"/>
-              </a:spcAft>
-              <a:defRPr sz="2000">
-                <a:solidFill>
-                  <a:srgbClr val="333333"/>
-                </a:solidFill>
-              </a:defRPr>
-            </a:pPr>
-          </a:p>
-          <a:p>
-            <a:pPr>
-              <a:spcBef>
-                <a:spcPts val="600"/>
-              </a:spcBef>
-              <a:spcAft>
-                <a:spcPts val="800"/>
-              </a:spcAft>
-              <a:defRPr sz="2000">
-                <a:solidFill>
-                  <a:srgbClr val="333333"/>
-                </a:solidFill>
-              </a:defRPr>
-            </a:pPr>
-            <a:r>
-              <a:t>TEENAGERS: Abrupt appetite transition (110% cost jump at age 13)</a:t>
-            </a:r>
-          </a:p>
-          <a:p>
-            <a:pPr>
-              <a:spcBef>
-                <a:spcPts val="600"/>
-              </a:spcBef>
-              <a:spcAft>
-                <a:spcPts val="800"/>
-              </a:spcAft>
-              <a:defRPr sz="2000">
-                <a:solidFill>
-                  <a:srgbClr val="333333"/>
-                </a:solidFill>
-              </a:defRPr>
-            </a:pPr>
-            <a:r>
-              <a:t>  • Malnutrition risk precisely when growth is critical</a:t>
-            </a:r>
-          </a:p>
-          <a:p>
-            <a:pPr>
-              <a:spcBef>
-                <a:spcPts val="600"/>
-              </a:spcBef>
-              <a:spcAft>
-                <a:spcPts val="800"/>
-              </a:spcAft>
-              <a:defRPr sz="2000">
-                <a:solidFill>
-                  <a:srgbClr val="333333"/>
-                </a:solidFill>
-              </a:defRPr>
-            </a:pPr>
-            <a:r>
-              <a:t>  • Not child-cost, not adult-cost—uncounted gap</a:t>
-            </a:r>
-          </a:p>
-          <a:p>
-            <a:pPr>
-              <a:spcBef>
-                <a:spcPts val="600"/>
-              </a:spcBef>
-              <a:spcAft>
-                <a:spcPts val="800"/>
-              </a:spcAft>
-              <a:defRPr sz="2000">
-                <a:solidFill>
-                  <a:srgbClr val="333333"/>
-                </a:solidFill>
-              </a:defRPr>
-            </a:pPr>
-          </a:p>
-          <a:p>
-            <a:pPr>
-              <a:spcBef>
-                <a:spcPts val="600"/>
-              </a:spcBef>
-              <a:spcAft>
-                <a:spcPts val="800"/>
-              </a:spcAft>
-              <a:defRPr sz="2000">
-                <a:solidFill>
-                  <a:srgbClr val="333333"/>
-                </a:solidFill>
-              </a:defRPr>
-            </a:pPr>
-            <a:r>
-              <a:t>THE SANDWICH GENERATION: Supporting both elderly AND children</a:t>
-            </a:r>
-          </a:p>
-          <a:p>
-            <a:pPr>
-              <a:spcBef>
-                <a:spcPts val="600"/>
-              </a:spcBef>
-              <a:spcAft>
-                <a:spcPts val="800"/>
-              </a:spcAft>
-              <a:defRPr sz="2000">
-                <a:solidFill>
-                  <a:srgbClr val="333333"/>
-                </a:solidFill>
-              </a:defRPr>
-            </a:pPr>
-            <a:r>
-              <a:t>  • 45-year-old: Parent +€334, Child +€304 = household multiplied</a:t>
-            </a:r>
-          </a:p>
-          <a:p>
-            <a:pPr>
-              <a:spcBef>
-                <a:spcPts val="600"/>
-              </a:spcBef>
-              <a:spcAft>
-                <a:spcPts val="800"/>
-              </a:spcAft>
-              <a:defRPr sz="2000">
-                <a:solidFill>
-                  <a:srgbClr val="333333"/>
-                </a:solidFill>
-              </a:defRPr>
-            </a:pPr>
-            <a:r>
-              <a:t>  • €941/month food costs (27% of median income)</a:t>
-            </a:r>
-          </a:p>
-          <a:p>
-            <a:pPr>
-              <a:spcBef>
-                <a:spcPts val="600"/>
-              </a:spcBef>
-              <a:spcAft>
-                <a:spcPts val="800"/>
-              </a:spcAft>
-              <a:defRPr sz="2000">
-                <a:solidFill>
-                  <a:srgbClr val="333333"/>
-                </a:solidFill>
-              </a:defRPr>
-            </a:pPr>
-            <a:r>
-              <a:t>  • Silent burden. Invisible in statistics. Breaking quietly.</a:t>
-            </a:r>
-          </a:p>
-        </p:txBody>
-      </p:sp>
-    </p:spTree>
-  </p:cSld>
-  <p:clrMapOvr>
-    <a:masterClrMapping/>
-  </p:clrMapOvr>
-</p:sld>
-</file>
-
-<file path=ppt/slides/slide19.xml><?xml version="1.0" encoding="utf-8"?>
-<p:sld xmlns:a="http://schemas.openxmlformats.org/drawingml/2006/main" xmlns:p="http://schemas.openxmlformats.org/presentationml/2006/main" xmlns:r="http://schemas.openxmlformats.org/officeDocument/2006/relationships">
-  <p:cSld>
-    <p:bg>
-      <p:bgPr>
-        <a:solidFill>
-          <a:srgbClr val="1F4E79"/>
-        </a:solidFill>
-        <a:effectLst/>
-      </p:bgPr>
-    </p:bg>
-    <p:spTree>
-      <p:nvGrpSpPr>
-        <p:cNvPr id="1" name=""/>
-        <p:cNvGrpSpPr/>
-        <p:nvPr/>
-      </p:nvGrpSpPr>
-      <p:grpSpPr/>
-      <p:sp>
-        <p:nvSpPr>
-          <p:cNvPr id="2" name="TextBox 1"/>
-          <p:cNvSpPr txBox="1"/>
-          <p:nvPr/>
-        </p:nvSpPr>
-        <p:spPr>
-          <a:xfrm>
-            <a:off x="914400" y="2286000"/>
-            <a:ext cx="7315200" cy="2286000"/>
-          </a:xfrm>
-          <a:prstGeom prst="rect">
-            <a:avLst/>
-          </a:prstGeom>
-          <a:noFill/>
-        </p:spPr>
-        <p:txBody>
-          <a:bodyPr wrap="square">
-            <a:spAutoFit/>
-          </a:bodyPr>
-          <a:lstStyle/>
-          <a:p>
-            <a:pPr algn="ctr">
-              <a:defRPr sz="3200" b="1" i="1">
-                <a:solidFill>
-                  <a:srgbClr val="ED7D31"/>
-                </a:solidFill>
-              </a:defRPr>
-            </a:pPr>
-            <a:r>
-              <a:t>What gets priced out of reach doesn't get born.</a:t>
-            </a:r>
-            <a:br/>
-            <a:r>
-              <a:t>Food affordability is not just poverty.</a:t>
-            </a:r>
-            <a:br/>
-            <a:r>
-              <a:t>It's a demographic determinant.</a:t>
-            </a:r>
-          </a:p>
-        </p:txBody>
-      </p:sp>
-      <p:sp>
-        <p:nvSpPr>
-          <p:cNvPr id="3" name="TextBox 2"/>
-          <p:cNvSpPr txBox="1"/>
-          <p:nvPr/>
-        </p:nvSpPr>
-        <p:spPr>
-          <a:xfrm>
-            <a:off x="914400" y="4754880"/>
-            <a:ext cx="7315200" cy="914400"/>
-          </a:xfrm>
-          <a:prstGeom prst="rect">
-            <a:avLst/>
-          </a:prstGeom>
-          <a:noFill/>
-        </p:spPr>
-        <p:txBody>
-          <a:bodyPr wrap="none">
-            <a:spAutoFit/>
-          </a:bodyPr>
-          <a:lstStyle/>
-          <a:p>
-            <a:pPr algn="ctr">
-              <a:defRPr sz="2000">
-                <a:solidFill>
-                  <a:srgbClr val="FFFFFF"/>
-                </a:solidFill>
-              </a:defRPr>
-            </a:pPr>
-            <a:r>
-              <a:t>THE HIDDEN CONSEQUENCE: Why Birth Rates Are Collapsing</a:t>
-            </a:r>
-          </a:p>
-        </p:txBody>
-      </p:sp>
-    </p:spTree>
-  </p:cSld>
-  <p:clrMapOvr>
-    <a:masterClrMapping/>
-  </p:clrMapOvr>
-</p:sld>
-</file>
-
-<file path=ppt/slides/slide2.xml><?xml version="1.0" encoding="utf-8"?>
-<p:sld xmlns:a="http://schemas.openxmlformats.org/drawingml/2006/main" xmlns:p="http://schemas.openxmlformats.org/presentationml/2006/main" xmlns:r="http://schemas.openxmlformats.org/officeDocument/2006/relationships">
-  <p:cSld>
-    <p:bg>
-      <p:bgPr>
-        <a:solidFill>
-          <a:srgbClr val="FFFFFF"/>
-        </a:solidFill>
-        <a:effectLst/>
-      </p:bgPr>
-    </p:bg>
-    <p:spTree>
-      <p:nvGrpSpPr>
-        <p:cNvPr id="1" name=""/>
-        <p:cNvGrpSpPr/>
-        <p:nvPr/>
-      </p:nvGrpSpPr>
-      <p:grpSpPr/>
-      <p:sp>
-        <p:nvSpPr>
-          <p:cNvPr id="2" name="Rectangle 1"/>
-          <p:cNvSpPr/>
-          <p:nvPr/>
-        </p:nvSpPr>
-        <p:spPr>
-          <a:xfrm>
-            <a:off x="0" y="0"/>
-            <a:ext cx="9144000" cy="822960"/>
-          </a:xfrm>
-          <a:prstGeom prst="rect">
-            <a:avLst/>
-          </a:prstGeom>
-          <a:solidFill>
-            <a:srgbClr val="1F4E79"/>
-          </a:solidFill>
-          <a:ln>
-            <a:solidFill>
-              <a:srgbClr val="1F4E79"/>
-            </a:solidFill>
-          </a:ln>
-        </p:spPr>
-        <p:style>
-          <a:lnRef idx="1">
-            <a:schemeClr val="accent1"/>
-          </a:lnRef>
-          <a:fillRef idx="3">
-            <a:schemeClr val="accent1"/>
-          </a:fillRef>
-          <a:effectRef idx="2">
-            <a:schemeClr val="accent1"/>
-          </a:effectRef>
-          <a:fontRef idx="minor">
-            <a:schemeClr val="lt1"/>
-          </a:fontRef>
-        </p:style>
-        <p:txBody>
-          <a:bodyPr rtlCol="0" anchor="ctr"/>
-          <a:lstStyle/>
-          <a:p>
-            <a:pPr algn="ctr">
-              <a:spcBef>
-                <a:spcPts val="1200"/>
-              </a:spcBef>
-              <a:spcAft>
-                <a:spcPts val="1200"/>
-              </a:spcAft>
-              <a:defRPr sz="4400" b="1">
-                <a:solidFill>
-                  <a:srgbClr val="FFFFFF"/>
-                </a:solidFill>
-              </a:defRPr>
-            </a:pPr>
-            <a:r>
-              <a:t>The Problem: Official Baskets are Incomplete</a:t>
-            </a:r>
-          </a:p>
-        </p:txBody>
-      </p:sp>
-      <p:sp>
-        <p:nvSpPr>
-          <p:cNvPr id="3" name="TextBox 2"/>
-          <p:cNvSpPr txBox="1"/>
-          <p:nvPr/>
-        </p:nvSpPr>
-        <p:spPr>
-          <a:xfrm>
-            <a:off x="731520" y="1188720"/>
-            <a:ext cx="7680960" cy="5212080"/>
-          </a:xfrm>
-          <a:prstGeom prst="rect">
-            <a:avLst/>
-          </a:prstGeom>
-          <a:noFill/>
-        </p:spPr>
-        <p:txBody>
-          <a:bodyPr wrap="square">
-            <a:spAutoFit/>
-          </a:bodyPr>
-          <a:lstStyle/>
-          <a:p>
-            <a:pPr>
-              <a:spcBef>
-                <a:spcPts val="600"/>
-              </a:spcBef>
-              <a:spcAft>
-                <a:spcPts val="800"/>
-              </a:spcAft>
-              <a:defRPr sz="2000">
-                <a:solidFill>
-                  <a:srgbClr val="333333"/>
-                </a:solidFill>
-              </a:defRPr>
-            </a:pPr>
-            <a:r>
-              <a:t>INSEE reports inflation based on a MINIMAL BASKET of emblematic products:</a:t>
-            </a:r>
-          </a:p>
-          <a:p>
-            <a:pPr>
-              <a:spcBef>
-                <a:spcPts val="600"/>
-              </a:spcBef>
-              <a:spcAft>
-                <a:spcPts val="800"/>
-              </a:spcAft>
-              <a:defRPr sz="2000">
-                <a:solidFill>
-                  <a:srgbClr val="333333"/>
-                </a:solidFill>
-              </a:defRPr>
-            </a:pPr>
-            <a:r>
-              <a:t>  • Milk, bread, eggs, cheese, butter, pasta...</a:t>
-            </a:r>
-          </a:p>
-          <a:p>
-            <a:pPr>
-              <a:spcBef>
-                <a:spcPts val="600"/>
-              </a:spcBef>
-              <a:spcAft>
-                <a:spcPts val="800"/>
-              </a:spcAft>
-              <a:defRPr sz="2000">
-                <a:solidFill>
-                  <a:srgbClr val="333333"/>
-                </a:solidFill>
-              </a:defRPr>
-            </a:pPr>
-          </a:p>
-          <a:p>
-            <a:pPr>
-              <a:spcBef>
-                <a:spcPts val="600"/>
-              </a:spcBef>
-              <a:spcAft>
-                <a:spcPts val="800"/>
-              </a:spcAft>
-              <a:defRPr sz="2000">
-                <a:solidFill>
-                  <a:srgbClr val="333333"/>
-                </a:solidFill>
-              </a:defRPr>
-            </a:pPr>
-            <a:r>
-              <a:t>But official baskets IGNORE the complementary items families actually need:</a:t>
-            </a:r>
-          </a:p>
-          <a:p>
-            <a:pPr>
-              <a:spcBef>
-                <a:spcPts val="600"/>
-              </a:spcBef>
-              <a:spcAft>
-                <a:spcPts val="800"/>
-              </a:spcAft>
-              <a:defRPr sz="2000">
-                <a:solidFill>
-                  <a:srgbClr val="333333"/>
-                </a:solidFill>
-              </a:defRPr>
-            </a:pPr>
-            <a:r>
-              <a:t>  • Different milk types (lactose-free, baby formula)</a:t>
-            </a:r>
-          </a:p>
-          <a:p>
-            <a:pPr>
-              <a:spcBef>
-                <a:spcPts val="600"/>
-              </a:spcBef>
-              <a:spcAft>
-                <a:spcPts val="800"/>
-              </a:spcAft>
-              <a:defRPr sz="2000">
-                <a:solidFill>
-                  <a:srgbClr val="333333"/>
-                </a:solidFill>
-              </a:defRPr>
-            </a:pPr>
-            <a:r>
-              <a:t>  • Items that complete meals (sauces, oils, spices)</a:t>
-            </a:r>
-          </a:p>
-          <a:p>
-            <a:pPr>
-              <a:spcBef>
-                <a:spcPts val="600"/>
-              </a:spcBef>
-              <a:spcAft>
-                <a:spcPts val="800"/>
-              </a:spcAft>
-              <a:defRPr sz="2000">
-                <a:solidFill>
-                  <a:srgbClr val="333333"/>
-                </a:solidFill>
-              </a:defRPr>
-            </a:pPr>
-            <a:r>
-              <a:t>  • Baby essentials (diapers, creams)</a:t>
-            </a:r>
-          </a:p>
-          <a:p>
-            <a:pPr>
-              <a:spcBef>
-                <a:spcPts val="600"/>
-              </a:spcBef>
-              <a:spcAft>
-                <a:spcPts val="800"/>
-              </a:spcAft>
-              <a:defRPr sz="2000">
-                <a:solidFill>
-                  <a:srgbClr val="333333"/>
-                </a:solidFill>
-              </a:defRPr>
-            </a:pPr>
-            <a:r>
-              <a:t>  • Dietary alternatives (allergies, intolerances)</a:t>
-            </a:r>
-          </a:p>
-          <a:p>
-            <a:pPr>
-              <a:spcBef>
-                <a:spcPts val="600"/>
-              </a:spcBef>
-              <a:spcAft>
-                <a:spcPts val="800"/>
-              </a:spcAft>
-              <a:defRPr sz="2000">
-                <a:solidFill>
-                  <a:srgbClr val="333333"/>
-                </a:solidFill>
-              </a:defRPr>
-            </a:pPr>
-          </a:p>
-          <a:p>
-            <a:pPr>
-              <a:spcBef>
-                <a:spcPts val="600"/>
-              </a:spcBef>
-              <a:spcAft>
-                <a:spcPts val="800"/>
-              </a:spcAft>
-              <a:defRPr sz="2000">
-                <a:solidFill>
-                  <a:srgbClr val="333333"/>
-                </a:solidFill>
-              </a:defRPr>
-            </a:pPr>
-            <a:r>
-              <a:t>Result: Official inflation numbers measure SURVIVAL, not LIVING</a:t>
-            </a:r>
-          </a:p>
-        </p:txBody>
-      </p:sp>
-    </p:spTree>
-  </p:cSld>
-  <p:clrMapOvr>
-    <a:masterClrMapping/>
-  </p:clrMapOvr>
-</p:sld>
-</file>
-
-<file path=ppt/slides/slide20.xml><?xml version="1.0" encoding="utf-8"?>
-<p:sld xmlns:a="http://schemas.openxmlformats.org/drawingml/2006/main" xmlns:p="http://schemas.openxmlformats.org/presentationml/2006/main" xmlns:r="http://schemas.openxmlformats.org/officeDocument/2006/relationships">
-  <p:cSld>
-    <p:bg>
-      <p:bgPr>
-        <a:solidFill>
-          <a:srgbClr val="FFFFFF"/>
-        </a:solidFill>
-        <a:effectLst/>
-      </p:bgPr>
-    </p:bg>
-    <p:spTree>
-      <p:nvGrpSpPr>
-        <p:cNvPr id="1" name=""/>
-        <p:cNvGrpSpPr/>
-        <p:nvPr/>
-      </p:nvGrpSpPr>
-      <p:grpSpPr/>
-      <p:sp>
-        <p:nvSpPr>
-          <p:cNvPr id="2" name="Rectangle 1"/>
-          <p:cNvSpPr/>
-          <p:nvPr/>
-        </p:nvSpPr>
-        <p:spPr>
-          <a:xfrm>
-            <a:off x="0" y="0"/>
-            <a:ext cx="9144000" cy="822960"/>
-          </a:xfrm>
-          <a:prstGeom prst="rect">
-            <a:avLst/>
-          </a:prstGeom>
-          <a:solidFill>
-            <a:srgbClr val="1F4E79"/>
-          </a:solidFill>
-          <a:ln>
-            <a:solidFill>
-              <a:srgbClr val="1F4E79"/>
-            </a:solidFill>
-          </a:ln>
-        </p:spPr>
-        <p:style>
-          <a:lnRef idx="1">
-            <a:schemeClr val="accent1"/>
-          </a:lnRef>
-          <a:fillRef idx="3">
-            <a:schemeClr val="accent1"/>
-          </a:fillRef>
-          <a:effectRef idx="2">
-            <a:schemeClr val="accent1"/>
-          </a:effectRef>
-          <a:fontRef idx="minor">
-            <a:schemeClr val="lt1"/>
-          </a:fontRef>
-        </p:style>
-        <p:txBody>
-          <a:bodyPr rtlCol="0" anchor="ctr"/>
-          <a:lstStyle/>
-          <a:p>
-            <a:pPr algn="ctr">
-              <a:spcBef>
-                <a:spcPts val="1200"/>
-              </a:spcBef>
-              <a:spcAft>
-                <a:spcPts val="1200"/>
-              </a:spcAft>
-              <a:defRPr sz="4400" b="1">
-                <a:solidFill>
-                  <a:srgbClr val="FFFFFF"/>
-                </a:solidFill>
-              </a:defRPr>
-            </a:pPr>
-            <a:r>
-              <a:t>Birth Rate as Economic Rationing</a:t>
-            </a:r>
-          </a:p>
-        </p:txBody>
-      </p:sp>
-      <p:sp>
-        <p:nvSpPr>
-          <p:cNvPr id="3" name="TextBox 2"/>
-          <p:cNvSpPr txBox="1"/>
-          <p:nvPr/>
-        </p:nvSpPr>
-        <p:spPr>
-          <a:xfrm>
-            <a:off x="731520" y="1188720"/>
-            <a:ext cx="7680960" cy="5212080"/>
-          </a:xfrm>
-          <a:prstGeom prst="rect">
-            <a:avLst/>
-          </a:prstGeom>
-          <a:noFill/>
-        </p:spPr>
-        <p:txBody>
-          <a:bodyPr wrap="square">
-            <a:spAutoFit/>
-          </a:bodyPr>
-          <a:lstStyle/>
-          <a:p>
-            <a:pPr>
-              <a:spcBef>
-                <a:spcPts val="600"/>
-              </a:spcBef>
-              <a:spcAft>
-                <a:spcPts val="800"/>
-              </a:spcAft>
-              <a:defRPr sz="2000">
-                <a:solidFill>
-                  <a:srgbClr val="333333"/>
-                </a:solidFill>
-              </a:defRPr>
-            </a:pPr>
-            <a:r>
-              <a:t>Young couple, median Paris income (42,000 EUR/year):</a:t>
-            </a:r>
-          </a:p>
-          <a:p>
-            <a:pPr>
-              <a:spcBef>
-                <a:spcPts val="600"/>
-              </a:spcBef>
-              <a:spcAft>
-                <a:spcPts val="800"/>
-              </a:spcAft>
-              <a:defRPr sz="2000">
-                <a:solidFill>
-                  <a:srgbClr val="333333"/>
-                </a:solidFill>
-              </a:defRPr>
-            </a:pPr>
-            <a:r>
-              <a:t>  • 1 child: 12.6% of income on food (MANAGEABLE)</a:t>
-            </a:r>
-          </a:p>
-          <a:p>
-            <a:pPr>
-              <a:spcBef>
-                <a:spcPts val="600"/>
-              </a:spcBef>
-              <a:spcAft>
-                <a:spcPts val="800"/>
-              </a:spcAft>
-              <a:defRPr sz="2000">
-                <a:solidFill>
-                  <a:srgbClr val="333333"/>
-                </a:solidFill>
-              </a:defRPr>
-            </a:pPr>
-            <a:r>
-              <a:t>  • 2 children: 16.5% of income on food (DIFFICULT)</a:t>
-            </a:r>
-          </a:p>
-          <a:p>
-            <a:pPr>
-              <a:spcBef>
-                <a:spcPts val="600"/>
-              </a:spcBef>
-              <a:spcAft>
-                <a:spcPts val="800"/>
-              </a:spcAft>
-              <a:defRPr sz="2000">
-                <a:solidFill>
-                  <a:srgbClr val="333333"/>
-                </a:solidFill>
-              </a:defRPr>
-            </a:pPr>
-            <a:r>
-              <a:t>  • 3 children: 20.4% of income on food (IMPOSSIBLE)</a:t>
-            </a:r>
-          </a:p>
-          <a:p>
-            <a:pPr>
-              <a:spcBef>
-                <a:spcPts val="600"/>
-              </a:spcBef>
-              <a:spcAft>
-                <a:spcPts val="800"/>
-              </a:spcAft>
-              <a:defRPr sz="2000">
-                <a:solidFill>
-                  <a:srgbClr val="333333"/>
-                </a:solidFill>
-              </a:defRPr>
-            </a:pPr>
-          </a:p>
-          <a:p>
-            <a:pPr>
-              <a:spcBef>
-                <a:spcPts val="600"/>
-              </a:spcBef>
-              <a:spcAft>
-                <a:spcPts val="800"/>
-              </a:spcAft>
-              <a:defRPr sz="2000">
-                <a:solidFill>
-                  <a:srgbClr val="333333"/>
-                </a:solidFill>
-              </a:defRPr>
-            </a:pPr>
-            <a:r>
-              <a:t>Young couple, SMIC (21,000 EUR/year):</a:t>
-            </a:r>
-          </a:p>
-          <a:p>
-            <a:pPr>
-              <a:spcBef>
-                <a:spcPts val="600"/>
-              </a:spcBef>
-              <a:spcAft>
-                <a:spcPts val="800"/>
-              </a:spcAft>
-              <a:defRPr sz="2000">
-                <a:solidFill>
-                  <a:srgbClr val="333333"/>
-                </a:solidFill>
-              </a:defRPr>
-            </a:pPr>
-            <a:r>
-              <a:t>  • 1 child: 25.2% of income (CRISIS)</a:t>
-            </a:r>
-          </a:p>
-          <a:p>
-            <a:pPr>
-              <a:spcBef>
-                <a:spcPts val="600"/>
-              </a:spcBef>
-              <a:spcAft>
-                <a:spcPts val="800"/>
-              </a:spcAft>
-              <a:defRPr sz="2000">
-                <a:solidFill>
-                  <a:srgbClr val="333333"/>
-                </a:solidFill>
-              </a:defRPr>
-            </a:pPr>
-            <a:r>
-              <a:t>  • 2 children: 38.9% of income (IMPOSSIBLE - CHOOSE: FOOD OR HOUSING)</a:t>
-            </a:r>
-          </a:p>
-          <a:p>
-            <a:pPr>
-              <a:spcBef>
-                <a:spcPts val="600"/>
-              </a:spcBef>
-              <a:spcAft>
-                <a:spcPts val="800"/>
-              </a:spcAft>
-              <a:defRPr sz="2000">
-                <a:solidFill>
-                  <a:srgbClr val="333333"/>
-                </a:solidFill>
-              </a:defRPr>
-            </a:pPr>
-          </a:p>
-          <a:p>
-            <a:pPr>
-              <a:spcBef>
-                <a:spcPts val="600"/>
-              </a:spcBef>
-              <a:spcAft>
-                <a:spcPts val="800"/>
-              </a:spcAft>
-              <a:defRPr sz="2000">
-                <a:solidFill>
-                  <a:srgbClr val="333333"/>
-                </a:solidFill>
-              </a:defRPr>
-            </a:pPr>
-            <a:r>
-              <a:t>Paris birth rate: 1.4 children/woman (replacement: 2.1)</a:t>
-            </a:r>
-          </a:p>
-          <a:p>
-            <a:pPr>
-              <a:spcBef>
-                <a:spcPts val="600"/>
-              </a:spcBef>
-              <a:spcAft>
-                <a:spcPts val="800"/>
-              </a:spcAft>
-              <a:defRPr sz="2000">
-                <a:solidFill>
-                  <a:srgbClr val="333333"/>
-                </a:solidFill>
-              </a:defRPr>
-            </a:pPr>
-            <a:r>
-              <a:t>This is not cultural choice. This is economic calculus.</a:t>
-            </a:r>
-          </a:p>
-          <a:p>
-            <a:pPr>
-              <a:spcBef>
-                <a:spcPts val="600"/>
-              </a:spcBef>
-              <a:spcAft>
-                <a:spcPts val="800"/>
-              </a:spcAft>
-              <a:defRPr sz="2000">
-                <a:solidFill>
-                  <a:srgbClr val="333333"/>
-                </a:solidFill>
-              </a:defRPr>
-            </a:pPr>
-            <a:r>
-              <a:t>Families are rationing their size. Demographic collapse is silent rationing.</a:t>
-            </a:r>
-          </a:p>
-        </p:txBody>
-      </p:sp>
-    </p:spTree>
-  </p:cSld>
-  <p:clrMapOvr>
-    <a:masterClrMapping/>
-  </p:clrMapOvr>
-</p:sld>
-</file>
-
-<file path=ppt/slides/slide21.xml><?xml version="1.0" encoding="utf-8"?>
-<p:sld xmlns:a="http://schemas.openxmlformats.org/drawingml/2006/main" xmlns:p="http://schemas.openxmlformats.org/presentationml/2006/main" xmlns:r="http://schemas.openxmlformats.org/officeDocument/2006/relationships">
-  <p:cSld>
-    <p:bg>
-      <p:bgPr>
-        <a:solidFill>
-          <a:srgbClr val="FFFFFF"/>
-        </a:solidFill>
-        <a:effectLst/>
-      </p:bgPr>
-    </p:bg>
-    <p:spTree>
-      <p:nvGrpSpPr>
-        <p:cNvPr id="1" name=""/>
-        <p:cNvGrpSpPr/>
-        <p:nvPr/>
-      </p:nvGrpSpPr>
-      <p:grpSpPr/>
-      <p:sp>
-        <p:nvSpPr>
-          <p:cNvPr id="2" name="Rectangle 1"/>
-          <p:cNvSpPr/>
-          <p:nvPr/>
-        </p:nvSpPr>
-        <p:spPr>
-          <a:xfrm>
-            <a:off x="0" y="0"/>
-            <a:ext cx="9144000" cy="822960"/>
-          </a:xfrm>
-          <a:prstGeom prst="rect">
-            <a:avLst/>
-          </a:prstGeom>
-          <a:solidFill>
-            <a:srgbClr val="1F4E79"/>
-          </a:solidFill>
-          <a:ln>
-            <a:solidFill>
-              <a:srgbClr val="1F4E79"/>
-            </a:solidFill>
-          </a:ln>
-        </p:spPr>
-        <p:style>
-          <a:lnRef idx="1">
-            <a:schemeClr val="accent1"/>
-          </a:lnRef>
-          <a:fillRef idx="3">
-            <a:schemeClr val="accent1"/>
-          </a:fillRef>
-          <a:effectRef idx="2">
-            <a:schemeClr val="accent1"/>
-          </a:effectRef>
-          <a:fontRef idx="minor">
-            <a:schemeClr val="lt1"/>
-          </a:fontRef>
-        </p:style>
-        <p:txBody>
-          <a:bodyPr rtlCol="0" anchor="ctr"/>
-          <a:lstStyle/>
-          <a:p>
-            <a:pPr algn="ctr">
-              <a:spcBef>
-                <a:spcPts val="1200"/>
-              </a:spcBef>
-              <a:spcAft>
-                <a:spcPts val="1200"/>
-              </a:spcAft>
-              <a:defRPr sz="4400" b="1">
-                <a:solidFill>
-                  <a:srgbClr val="FFFFFF"/>
-                </a:solidFill>
-              </a:defRPr>
-            </a:pPr>
-            <a:r>
-              <a:t>Why This Matters</a:t>
-            </a:r>
-          </a:p>
-        </p:txBody>
-      </p:sp>
-      <p:sp>
-        <p:nvSpPr>
-          <p:cNvPr id="3" name="TextBox 2"/>
-          <p:cNvSpPr txBox="1"/>
-          <p:nvPr/>
-        </p:nvSpPr>
-        <p:spPr>
-          <a:xfrm>
-            <a:off x="731520" y="1188720"/>
-            <a:ext cx="7680960" cy="5212080"/>
-          </a:xfrm>
-          <a:prstGeom prst="rect">
-            <a:avLst/>
-          </a:prstGeom>
-          <a:noFill/>
-        </p:spPr>
-        <p:txBody>
-          <a:bodyPr wrap="square">
-            <a:spAutoFit/>
-          </a:bodyPr>
-          <a:lstStyle/>
-          <a:p>
-            <a:pPr>
-              <a:spcBef>
-                <a:spcPts val="600"/>
-              </a:spcBef>
-              <a:spcAft>
-                <a:spcPts val="800"/>
-              </a:spcAft>
-              <a:defRPr sz="2000">
-                <a:solidFill>
-                  <a:srgbClr val="333333"/>
-                </a:solidFill>
-              </a:defRPr>
-            </a:pPr>
-            <a:r>
-              <a:t>POLICY MAKERS base decisions on official inflation rates that underestimate</a:t>
-            </a:r>
-          </a:p>
-          <a:p>
-            <a:pPr>
-              <a:spcBef>
-                <a:spcPts val="600"/>
-              </a:spcBef>
-              <a:spcAft>
-                <a:spcPts val="800"/>
-              </a:spcAft>
-              <a:defRPr sz="2000">
-                <a:solidFill>
-                  <a:srgbClr val="333333"/>
-                </a:solidFill>
-              </a:defRPr>
-            </a:pPr>
-            <a:r>
-              <a:t>real costs by 30-50%</a:t>
-            </a:r>
-          </a:p>
-          <a:p>
-            <a:pPr>
-              <a:spcBef>
-                <a:spcPts val="600"/>
-              </a:spcBef>
-              <a:spcAft>
-                <a:spcPts val="800"/>
-              </a:spcAft>
-              <a:defRPr sz="2000">
-                <a:solidFill>
-                  <a:srgbClr val="333333"/>
-                </a:solidFill>
-              </a:defRPr>
-            </a:pPr>
-          </a:p>
-          <a:p>
-            <a:pPr>
-              <a:spcBef>
-                <a:spcPts val="600"/>
-              </a:spcBef>
-              <a:spcAft>
-                <a:spcPts val="800"/>
-              </a:spcAft>
-              <a:defRPr sz="2000">
-                <a:solidFill>
-                  <a:srgbClr val="333333"/>
-                </a:solidFill>
-              </a:defRPr>
-            </a:pPr>
-            <a:r>
-              <a:t>WORKERS see their salaries (linked to inflation) never keep pace with actual</a:t>
-            </a:r>
-          </a:p>
-          <a:p>
-            <a:pPr>
-              <a:spcBef>
-                <a:spcPts val="600"/>
-              </a:spcBef>
-              <a:spcAft>
-                <a:spcPts val="800"/>
-              </a:spcAft>
-              <a:defRPr sz="2000">
-                <a:solidFill>
-                  <a:srgbClr val="333333"/>
-                </a:solidFill>
-              </a:defRPr>
-            </a:pPr>
-            <a:r>
-              <a:t>living expenses</a:t>
-            </a:r>
-          </a:p>
-          <a:p>
-            <a:pPr>
-              <a:spcBef>
-                <a:spcPts val="600"/>
-              </a:spcBef>
-              <a:spcAft>
-                <a:spcPts val="800"/>
-              </a:spcAft>
-              <a:defRPr sz="2000">
-                <a:solidFill>
-                  <a:srgbClr val="333333"/>
-                </a:solidFill>
-              </a:defRPr>
-            </a:pPr>
-          </a:p>
-          <a:p>
-            <a:pPr>
-              <a:spcBef>
-                <a:spcPts val="600"/>
-              </a:spcBef>
-              <a:spcAft>
-                <a:spcPts val="800"/>
-              </a:spcAft>
-              <a:defRPr sz="2000">
-                <a:solidFill>
-                  <a:srgbClr val="333333"/>
-                </a:solidFill>
-              </a:defRPr>
-            </a:pPr>
-            <a:r>
-              <a:t>FAMILIES make impossible choices: healthy food OR paying rent?</a:t>
-            </a:r>
-          </a:p>
-          <a:p>
-            <a:pPr>
-              <a:spcBef>
-                <a:spcPts val="600"/>
-              </a:spcBef>
-              <a:spcAft>
-                <a:spcPts val="800"/>
-              </a:spcAft>
-              <a:defRPr sz="2000">
-                <a:solidFill>
-                  <a:srgbClr val="333333"/>
-                </a:solidFill>
-              </a:defRPr>
-            </a:pPr>
-            <a:r>
-              <a:t>Diapers OR transportation?</a:t>
-            </a:r>
-          </a:p>
-          <a:p>
-            <a:pPr>
-              <a:spcBef>
-                <a:spcPts val="600"/>
-              </a:spcBef>
-              <a:spcAft>
-                <a:spcPts val="800"/>
-              </a:spcAft>
-              <a:defRPr sz="2000">
-                <a:solidFill>
-                  <a:srgbClr val="333333"/>
-                </a:solidFill>
-              </a:defRPr>
-            </a:pPr>
-          </a:p>
-          <a:p>
-            <a:pPr>
-              <a:spcBef>
-                <a:spcPts val="600"/>
-              </a:spcBef>
-              <a:spcAft>
-                <a:spcPts val="800"/>
-              </a:spcAft>
-              <a:defRPr sz="2000">
-                <a:solidFill>
-                  <a:srgbClr val="333333"/>
-                </a:solidFill>
-              </a:defRPr>
-            </a:pPr>
-            <a:r>
-              <a:t>INEQUALITY is hidden in the numbers. What's not measured is not managed.</a:t>
-            </a:r>
-          </a:p>
-          <a:p>
-            <a:pPr>
-              <a:spcBef>
-                <a:spcPts val="600"/>
-              </a:spcBef>
-              <a:spcAft>
-                <a:spcPts val="800"/>
-              </a:spcAft>
-              <a:defRPr sz="2000">
-                <a:solidFill>
-                  <a:srgbClr val="333333"/>
-                </a:solidFill>
-              </a:defRPr>
-            </a:pPr>
-          </a:p>
-          <a:p>
-            <a:pPr>
-              <a:spcBef>
-                <a:spcPts val="600"/>
-              </a:spcBef>
-              <a:spcAft>
-                <a:spcPts val="800"/>
-              </a:spcAft>
-              <a:defRPr sz="2000">
-                <a:solidFill>
-                  <a:srgbClr val="333333"/>
-                </a:solidFill>
-              </a:defRPr>
-            </a:pPr>
-            <a:r>
-              <a:t>STATISTICS are not neutral. They reveal what society has decided to COUNT</a:t>
-            </a:r>
-          </a:p>
-          <a:p>
-            <a:pPr>
-              <a:spcBef>
-                <a:spcPts val="600"/>
-              </a:spcBef>
-              <a:spcAft>
-                <a:spcPts val="800"/>
-              </a:spcAft>
-              <a:defRPr sz="2000">
-                <a:solidFill>
-                  <a:srgbClr val="333333"/>
-                </a:solidFill>
-              </a:defRPr>
-            </a:pPr>
-            <a:r>
-              <a:t>and what it chooses to IGNORE.</a:t>
-            </a:r>
-          </a:p>
-        </p:txBody>
-      </p:sp>
-    </p:spTree>
-  </p:cSld>
-  <p:clrMapOvr>
-    <a:masterClrMapping/>
-  </p:clrMapOvr>
-</p:sld>
-</file>
-
-<file path=ppt/slides/slide22.xml><?xml version="1.0" encoding="utf-8"?>
-<p:sld xmlns:a="http://schemas.openxmlformats.org/drawingml/2006/main" xmlns:p="http://schemas.openxmlformats.org/presentationml/2006/main" xmlns:r="http://schemas.openxmlformats.org/officeDocument/2006/relationships">
-  <p:cSld>
-    <p:bg>
-      <p:bgPr>
-        <a:solidFill>
-          <a:srgbClr val="FFFFFF"/>
-        </a:solidFill>
-        <a:effectLst/>
-      </p:bgPr>
-    </p:bg>
-    <p:spTree>
-      <p:nvGrpSpPr>
-        <p:cNvPr id="1" name=""/>
-        <p:cNvGrpSpPr/>
-        <p:nvPr/>
-      </p:nvGrpSpPr>
-      <p:grpSpPr/>
-      <p:sp>
-        <p:nvSpPr>
-          <p:cNvPr id="2" name="Rectangle 1"/>
-          <p:cNvSpPr/>
-          <p:nvPr/>
-        </p:nvSpPr>
-        <p:spPr>
-          <a:xfrm>
-            <a:off x="0" y="0"/>
-            <a:ext cx="9144000" cy="822960"/>
-          </a:xfrm>
-          <a:prstGeom prst="rect">
-            <a:avLst/>
-          </a:prstGeom>
-          <a:solidFill>
-            <a:srgbClr val="1F4E79"/>
-          </a:solidFill>
-          <a:ln>
-            <a:solidFill>
-              <a:srgbClr val="1F4E79"/>
-            </a:solidFill>
-          </a:ln>
-        </p:spPr>
-        <p:style>
-          <a:lnRef idx="1">
-            <a:schemeClr val="accent1"/>
-          </a:lnRef>
-          <a:fillRef idx="3">
-            <a:schemeClr val="accent1"/>
-          </a:fillRef>
-          <a:effectRef idx="2">
-            <a:schemeClr val="accent1"/>
-          </a:effectRef>
-          <a:fontRef idx="minor">
-            <a:schemeClr val="lt1"/>
-          </a:fontRef>
-        </p:style>
-        <p:txBody>
-          <a:bodyPr rtlCol="0" anchor="ctr"/>
-          <a:lstStyle/>
-          <a:p>
-            <a:pPr algn="ctr">
-              <a:spcBef>
-                <a:spcPts val="1200"/>
-              </a:spcBef>
-              <a:spcAft>
-                <a:spcPts val="1200"/>
-              </a:spcAft>
-              <a:defRPr sz="4400" b="1">
-                <a:solidFill>
-                  <a:srgbClr val="FFFFFF"/>
-                </a:solidFill>
-              </a:defRPr>
-            </a:pPr>
-            <a:r>
-              <a:t>The Opportunity: Real Data for Real Decisions</a:t>
-            </a:r>
-          </a:p>
-        </p:txBody>
-      </p:sp>
-      <p:sp>
-        <p:nvSpPr>
-          <p:cNvPr id="3" name="TextBox 2"/>
-          <p:cNvSpPr txBox="1"/>
-          <p:nvPr/>
-        </p:nvSpPr>
-        <p:spPr>
-          <a:xfrm>
-            <a:off x="731520" y="1188720"/>
-            <a:ext cx="7680960" cy="5212080"/>
-          </a:xfrm>
-          <a:prstGeom prst="rect">
-            <a:avLst/>
-          </a:prstGeom>
-          <a:noFill/>
-        </p:spPr>
-        <p:txBody>
-          <a:bodyPr wrap="square">
-            <a:spAutoFit/>
-          </a:bodyPr>
-          <a:lstStyle/>
-          <a:p>
-            <a:pPr>
-              <a:spcBef>
-                <a:spcPts val="600"/>
-              </a:spcBef>
-              <a:spcAft>
-                <a:spcPts val="800"/>
-              </a:spcAft>
-              <a:defRPr sz="2000">
-                <a:solidFill>
-                  <a:srgbClr val="333333"/>
-                </a:solidFill>
-              </a:defRPr>
-            </a:pPr>
-            <a:r>
-              <a:t>Snipper Tool changes this by collecting REAL pricing data for REAL baskets:</a:t>
-            </a:r>
-          </a:p>
-          <a:p>
-            <a:pPr>
-              <a:spcBef>
-                <a:spcPts val="600"/>
-              </a:spcBef>
-              <a:spcAft>
-                <a:spcPts val="800"/>
-              </a:spcAft>
-              <a:defRPr sz="2000">
-                <a:solidFill>
-                  <a:srgbClr val="333333"/>
-                </a:solidFill>
-              </a:defRPr>
-            </a:pPr>
-          </a:p>
-          <a:p>
-            <a:pPr>
-              <a:spcBef>
-                <a:spcPts val="600"/>
-              </a:spcBef>
-              <a:spcAft>
-                <a:spcPts val="800"/>
-              </a:spcAft>
-              <a:defRPr sz="2000">
-                <a:solidFill>
-                  <a:srgbClr val="333333"/>
-                </a:solidFill>
-              </a:defRPr>
-            </a:pPr>
-            <a:r>
-              <a:t>Real families don't buy INSEE baskets.</a:t>
-            </a:r>
-          </a:p>
-          <a:p>
-            <a:pPr>
-              <a:spcBef>
-                <a:spcPts val="600"/>
-              </a:spcBef>
-              <a:spcAft>
-                <a:spcPts val="800"/>
-              </a:spcAft>
-              <a:defRPr sz="2000">
-                <a:solidFill>
-                  <a:srgbClr val="333333"/>
-                </a:solidFill>
-              </a:defRPr>
-            </a:pPr>
-            <a:r>
-              <a:t>They buy complete meals, dietary alternatives, baby products, and items</a:t>
-            </a:r>
-          </a:p>
-          <a:p>
-            <a:pPr>
-              <a:spcBef>
-                <a:spcPts val="600"/>
-              </a:spcBef>
-              <a:spcAft>
-                <a:spcPts val="800"/>
-              </a:spcAft>
-              <a:defRPr sz="2000">
-                <a:solidFill>
-                  <a:srgbClr val="333333"/>
-                </a:solidFill>
-              </a:defRPr>
-            </a:pPr>
-            <a:r>
-              <a:t>that support healthy, dignified family life.</a:t>
-            </a:r>
-          </a:p>
-          <a:p>
-            <a:pPr>
-              <a:spcBef>
-                <a:spcPts val="600"/>
-              </a:spcBef>
-              <a:spcAft>
-                <a:spcPts val="800"/>
-              </a:spcAft>
-              <a:defRPr sz="2000">
-                <a:solidFill>
-                  <a:srgbClr val="333333"/>
-                </a:solidFill>
-              </a:defRPr>
-            </a:pPr>
-          </a:p>
-          <a:p>
-            <a:pPr>
-              <a:spcBef>
-                <a:spcPts val="600"/>
-              </a:spcBef>
-              <a:spcAft>
-                <a:spcPts val="800"/>
-              </a:spcAft>
-              <a:defRPr sz="2000">
-                <a:solidFill>
-                  <a:srgbClr val="333333"/>
-                </a:solidFill>
-              </a:defRPr>
-            </a:pPr>
-            <a:r>
-              <a:t>By tracking ACTUAL purchases across Paris supermarkets, Snipper Tool can:</a:t>
-            </a:r>
-          </a:p>
-          <a:p>
-            <a:pPr>
-              <a:spcBef>
-                <a:spcPts val="600"/>
-              </a:spcBef>
-              <a:spcAft>
-                <a:spcPts val="800"/>
-              </a:spcAft>
-              <a:defRPr sz="2000">
-                <a:solidFill>
-                  <a:srgbClr val="333333"/>
-                </a:solidFill>
-              </a:defRPr>
-            </a:pPr>
-            <a:r>
-              <a:t>  • Expose the gap between official statistics and real costs</a:t>
-            </a:r>
-          </a:p>
-          <a:p>
-            <a:pPr>
-              <a:spcBef>
-                <a:spcPts val="600"/>
-              </a:spcBef>
-              <a:spcAft>
-                <a:spcPts val="800"/>
-              </a:spcAft>
-              <a:defRPr sz="2000">
-                <a:solidFill>
-                  <a:srgbClr val="333333"/>
-                </a:solidFill>
-              </a:defRPr>
-            </a:pPr>
-            <a:r>
-              <a:t>  • Track health-focused pricing decisions</a:t>
-            </a:r>
-          </a:p>
-          <a:p>
-            <a:pPr>
-              <a:spcBef>
-                <a:spcPts val="600"/>
-              </a:spcBef>
-              <a:spcAft>
-                <a:spcPts val="800"/>
-              </a:spcAft>
-              <a:defRPr sz="2000">
-                <a:solidFill>
-                  <a:srgbClr val="333333"/>
-                </a:solidFill>
-              </a:defRPr>
-            </a:pPr>
-            <a:r>
-              <a:t>  • Identify affordability cliffs by income and family type</a:t>
-            </a:r>
-          </a:p>
-          <a:p>
-            <a:pPr>
-              <a:spcBef>
-                <a:spcPts val="600"/>
-              </a:spcBef>
-              <a:spcAft>
-                <a:spcPts val="800"/>
-              </a:spcAft>
-              <a:defRPr sz="2000">
-                <a:solidFill>
-                  <a:srgbClr val="333333"/>
-                </a:solidFill>
-              </a:defRPr>
-            </a:pPr>
-            <a:r>
-              <a:t>  • Provide data for better policy and wage decisions</a:t>
-            </a:r>
-          </a:p>
-        </p:txBody>
-      </p:sp>
-    </p:spTree>
-  </p:cSld>
-  <p:clrMapOvr>
-    <a:masterClrMapping/>
-  </p:clrMapOvr>
-</p:sld>
-</file>
-
-<file path=ppt/slides/slide23.xml><?xml version="1.0" encoding="utf-8"?>
-<p:sld xmlns:a="http://schemas.openxmlformats.org/drawingml/2006/main" xmlns:p="http://schemas.openxmlformats.org/presentationml/2006/main" xmlns:r="http://schemas.openxmlformats.org/officeDocument/2006/relationships">
-  <p:cSld>
-    <p:bg>
-      <p:bgPr>
-        <a:solidFill>
-          <a:srgbClr val="1F4E79"/>
-        </a:solidFill>
-        <a:effectLst/>
-      </p:bgPr>
-    </p:bg>
-    <p:spTree>
-      <p:nvGrpSpPr>
-        <p:cNvPr id="1" name=""/>
-        <p:cNvGrpSpPr/>
-        <p:nvPr/>
-      </p:nvGrpSpPr>
-      <p:grpSpPr/>
-      <p:sp>
-        <p:nvSpPr>
-          <p:cNvPr id="2" name="TextBox 1"/>
-          <p:cNvSpPr txBox="1"/>
-          <p:nvPr/>
-        </p:nvSpPr>
-        <p:spPr>
-          <a:xfrm>
-            <a:off x="914400" y="2286000"/>
-            <a:ext cx="7315200" cy="2286000"/>
-          </a:xfrm>
-          <a:prstGeom prst="rect">
-            <a:avLst/>
-          </a:prstGeom>
-          <a:noFill/>
-        </p:spPr>
-        <p:txBody>
-          <a:bodyPr wrap="square">
-            <a:spAutoFit/>
-          </a:bodyPr>
-          <a:lstStyle/>
-          <a:p>
-            <a:pPr algn="ctr">
-              <a:defRPr sz="3200" b="1" i="1">
-                <a:solidFill>
-                  <a:srgbClr val="ED7D31"/>
-                </a:solidFill>
-              </a:defRPr>
-            </a:pPr>
-            <a:r>
-              <a:t>The numbers never lie.</a:t>
-            </a:r>
-            <a:br/>
-            <a:r>
-              <a:t>But incomplete numbers hide the truth.</a:t>
-            </a:r>
-          </a:p>
-        </p:txBody>
-      </p:sp>
-      <p:sp>
-        <p:nvSpPr>
-          <p:cNvPr id="3" name="TextBox 2"/>
-          <p:cNvSpPr txBox="1"/>
-          <p:nvPr/>
-        </p:nvSpPr>
-        <p:spPr>
-          <a:xfrm>
-            <a:off x="914400" y="4754880"/>
-            <a:ext cx="7315200" cy="914400"/>
-          </a:xfrm>
-          <a:prstGeom prst="rect">
-            <a:avLst/>
-          </a:prstGeom>
-          <a:noFill/>
-        </p:spPr>
-        <p:txBody>
-          <a:bodyPr wrap="none">
-            <a:spAutoFit/>
-          </a:bodyPr>
-          <a:lstStyle/>
-          <a:p>
-            <a:pPr algn="ctr">
-              <a:defRPr sz="2000">
-                <a:solidFill>
-                  <a:srgbClr val="FFFFFF"/>
-                </a:solidFill>
-              </a:defRPr>
-            </a:pPr>
-            <a:r>
-              <a:t>FINAL INSIGHT: What You Measure is What You Manage</a:t>
+              <a:t>Dataset: 2,163 synthetic price observations (Apr 2025 - Apr 2026)</a:t>
+            </a:r>
+          </a:p>
+          <a:p>
+            <a:pPr>
+              <a:spcBef>
+                <a:spcPts val="600"/>
+              </a:spcBef>
+              <a:spcAft>
+                <a:spcPts val="800"/>
+              </a:spcAft>
+              <a:defRPr sz="2000">
+                <a:solidFill>
+                  <a:srgbClr val="333333"/>
+                </a:solidFill>
+              </a:defRPr>
+            </a:pPr>
+            <a:r>
+              <a:t>From Snipper Tool captures in Paris Auchan and Carrefour stores</a:t>
+            </a:r>
+          </a:p>
+          <a:p>
+            <a:pPr>
+              <a:spcBef>
+                <a:spcPts val="600"/>
+              </a:spcBef>
+              <a:spcAft>
+                <a:spcPts val="800"/>
+              </a:spcAft>
+              <a:defRPr sz="2000">
+                <a:solidFill>
+                  <a:srgbClr val="333333"/>
+                </a:solidFill>
+              </a:defRPr>
+            </a:pPr>
+            <a:endParaRPr/>
+          </a:p>
+          <a:p>
+            <a:pPr>
+              <a:spcBef>
+                <a:spcPts val="600"/>
+              </a:spcBef>
+              <a:spcAft>
+                <a:spcPts val="800"/>
+              </a:spcAft>
+              <a:defRPr sz="2000">
+                <a:solidFill>
+                  <a:srgbClr val="333333"/>
+                </a:solidFill>
+              </a:defRPr>
+            </a:pPr>
+            <a:r>
+              <a:t>Compared THREE basket types:</a:t>
+            </a:r>
+          </a:p>
+          <a:p>
+            <a:pPr>
+              <a:spcBef>
+                <a:spcPts val="600"/>
+              </a:spcBef>
+              <a:spcAft>
+                <a:spcPts val="800"/>
+              </a:spcAft>
+              <a:defRPr sz="2000">
+                <a:solidFill>
+                  <a:srgbClr val="333333"/>
+                </a:solidFill>
+              </a:defRPr>
+            </a:pPr>
+            <a:r>
+              <a:t>  1. Official INSEE Minimal Basket</a:t>
+            </a:r>
+          </a:p>
+          <a:p>
+            <a:pPr>
+              <a:spcBef>
+                <a:spcPts val="600"/>
+              </a:spcBef>
+              <a:spcAft>
+                <a:spcPts val="800"/>
+              </a:spcAft>
+              <a:defRPr sz="2000">
+                <a:solidFill>
+                  <a:srgbClr val="333333"/>
+                </a:solidFill>
+              </a:defRPr>
+            </a:pPr>
+            <a:r>
+              <a:t>  2. Real Complete Living Basket (includes complementary items)</a:t>
+            </a:r>
+          </a:p>
+          <a:p>
+            <a:pPr>
+              <a:spcBef>
+                <a:spcPts val="600"/>
+              </a:spcBef>
+              <a:spcAft>
+                <a:spcPts val="800"/>
+              </a:spcAft>
+              <a:defRPr sz="2000">
+                <a:solidFill>
+                  <a:srgbClr val="333333"/>
+                </a:solidFill>
+              </a:defRPr>
+            </a:pPr>
+            <a:r>
+              <a:t>  3. Healthy Complete Basket (for nutritional wellness)</a:t>
+            </a:r>
+          </a:p>
+          <a:p>
+            <a:pPr>
+              <a:spcBef>
+                <a:spcPts val="600"/>
+              </a:spcBef>
+              <a:spcAft>
+                <a:spcPts val="800"/>
+              </a:spcAft>
+              <a:defRPr sz="2000">
+                <a:solidFill>
+                  <a:srgbClr val="333333"/>
+                </a:solidFill>
+              </a:defRPr>
+            </a:pPr>
+            <a:endParaRPr/>
+          </a:p>
+          <a:p>
+            <a:pPr>
+              <a:spcBef>
+                <a:spcPts val="600"/>
+              </a:spcBef>
+              <a:spcAft>
+                <a:spcPts val="800"/>
+              </a:spcAft>
+              <a:defRPr sz="2000">
+                <a:solidFill>
+                  <a:srgbClr val="333333"/>
+                </a:solidFill>
+              </a:defRPr>
+            </a:pPr>
+            <a:r>
+              <a:t>Against PARIS HOUSEHOLD INCOMES:</a:t>
+            </a:r>
+          </a:p>
+          <a:p>
+            <a:pPr>
+              <a:spcBef>
+                <a:spcPts val="600"/>
+              </a:spcBef>
+              <a:spcAft>
+                <a:spcPts val="800"/>
+              </a:spcAft>
+              <a:defRPr sz="2000">
+                <a:solidFill>
+                  <a:srgbClr val="333333"/>
+                </a:solidFill>
+              </a:defRPr>
+            </a:pPr>
+            <a:r>
+              <a:t>  • SMIC (minimum wage): 21,000 EUR/year</a:t>
+            </a:r>
+          </a:p>
+          <a:p>
+            <a:pPr>
+              <a:spcBef>
+                <a:spcPts val="600"/>
+              </a:spcBef>
+              <a:spcAft>
+                <a:spcPts val="800"/>
+              </a:spcAft>
+              <a:defRPr sz="2000">
+                <a:solidFill>
+                  <a:srgbClr val="333333"/>
+                </a:solidFill>
+              </a:defRPr>
+            </a:pPr>
+            <a:r>
+              <a:t>  • Low income: 28,000 EUR/year</a:t>
+            </a:r>
+          </a:p>
+          <a:p>
+            <a:pPr>
+              <a:spcBef>
+                <a:spcPts val="600"/>
+              </a:spcBef>
+              <a:spcAft>
+                <a:spcPts val="800"/>
+              </a:spcAft>
+              <a:defRPr sz="2000">
+                <a:solidFill>
+                  <a:srgbClr val="333333"/>
+                </a:solidFill>
+              </a:defRPr>
+            </a:pPr>
+            <a:r>
+              <a:t>  • Median: 42,000 EUR/year</a:t>
+            </a:r>
+          </a:p>
+          <a:p>
+            <a:pPr>
+              <a:spcBef>
+                <a:spcPts val="600"/>
+              </a:spcBef>
+              <a:spcAft>
+                <a:spcPts val="800"/>
+              </a:spcAft>
+              <a:defRPr sz="2000">
+                <a:solidFill>
+                  <a:srgbClr val="333333"/>
+                </a:solidFill>
+              </a:defRPr>
+            </a:pPr>
+            <a:r>
+              <a:t>  • Upper middle: 65,000 EUR/year</a:t>
+            </a:r>
+          </a:p>
+          <a:p>
+            <a:pPr>
+              <a:spcBef>
+                <a:spcPts val="600"/>
+              </a:spcBef>
+              <a:spcAft>
+                <a:spcPts val="800"/>
+              </a:spcAft>
+              <a:defRPr sz="2000">
+                <a:solidFill>
+                  <a:srgbClr val="333333"/>
+                </a:solidFill>
+              </a:defRPr>
+            </a:pPr>
+            <a:endParaRPr/>
+          </a:p>
+          <a:p>
+            <a:pPr>
+              <a:spcBef>
+                <a:spcPts val="600"/>
+              </a:spcBef>
+              <a:spcAft>
+                <a:spcPts val="800"/>
+              </a:spcAft>
+              <a:defRPr sz="2000">
+                <a:solidFill>
+                  <a:srgbClr val="333333"/>
+                </a:solidFill>
+              </a:defRPr>
+            </a:pPr>
+            <a:r>
+              <a:t>Geography: Paris region (Ile-de-France)</a:t>
             </a:r>
           </a:p>
         </p:txBody>
@@ -6309,377 +6749,7 @@
 </file>
 
 <file path=ppt/slides/slide24.xml><?xml version="1.0" encoding="utf-8"?>
-<p:sld xmlns:a="http://schemas.openxmlformats.org/drawingml/2006/main" xmlns:p="http://schemas.openxmlformats.org/presentationml/2006/main" xmlns:r="http://schemas.openxmlformats.org/officeDocument/2006/relationships">
-  <p:cSld>
-    <p:bg>
-      <p:bgPr>
-        <a:solidFill>
-          <a:srgbClr val="FFFFFF"/>
-        </a:solidFill>
-        <a:effectLst/>
-      </p:bgPr>
-    </p:bg>
-    <p:spTree>
-      <p:nvGrpSpPr>
-        <p:cNvPr id="1" name=""/>
-        <p:cNvGrpSpPr/>
-        <p:nvPr/>
-      </p:nvGrpSpPr>
-      <p:grpSpPr/>
-      <p:sp>
-        <p:nvSpPr>
-          <p:cNvPr id="2" name="Rectangle 1"/>
-          <p:cNvSpPr/>
-          <p:nvPr/>
-        </p:nvSpPr>
-        <p:spPr>
-          <a:xfrm>
-            <a:off x="0" y="0"/>
-            <a:ext cx="9144000" cy="822960"/>
-          </a:xfrm>
-          <a:prstGeom prst="rect">
-            <a:avLst/>
-          </a:prstGeom>
-          <a:solidFill>
-            <a:srgbClr val="1F4E79"/>
-          </a:solidFill>
-          <a:ln>
-            <a:solidFill>
-              <a:srgbClr val="1F4E79"/>
-            </a:solidFill>
-          </a:ln>
-        </p:spPr>
-        <p:style>
-          <a:lnRef idx="1">
-            <a:schemeClr val="accent1"/>
-          </a:lnRef>
-          <a:fillRef idx="3">
-            <a:schemeClr val="accent1"/>
-          </a:fillRef>
-          <a:effectRef idx="2">
-            <a:schemeClr val="accent1"/>
-          </a:effectRef>
-          <a:fontRef idx="minor">
-            <a:schemeClr val="lt1"/>
-          </a:fontRef>
-        </p:style>
-        <p:txBody>
-          <a:bodyPr rtlCol="0" anchor="ctr"/>
-          <a:lstStyle/>
-          <a:p>
-            <a:pPr algn="ctr">
-              <a:spcBef>
-                <a:spcPts val="1200"/>
-              </a:spcBef>
-              <a:spcAft>
-                <a:spcPts val="1200"/>
-              </a:spcAft>
-              <a:defRPr sz="4400" b="1">
-                <a:solidFill>
-                  <a:srgbClr val="FFFFFF"/>
-                </a:solidFill>
-              </a:defRPr>
-            </a:pPr>
-            <a:r>
-              <a:t>This Analysis</a:t>
-            </a:r>
-          </a:p>
-        </p:txBody>
-      </p:sp>
-      <p:sp>
-        <p:nvSpPr>
-          <p:cNvPr id="3" name="TextBox 2"/>
-          <p:cNvSpPr txBox="1"/>
-          <p:nvPr/>
-        </p:nvSpPr>
-        <p:spPr>
-          <a:xfrm>
-            <a:off x="731520" y="1188720"/>
-            <a:ext cx="7680960" cy="5212080"/>
-          </a:xfrm>
-          <a:prstGeom prst="rect">
-            <a:avLst/>
-          </a:prstGeom>
-          <a:noFill/>
-        </p:spPr>
-        <p:txBody>
-          <a:bodyPr wrap="square">
-            <a:spAutoFit/>
-          </a:bodyPr>
-          <a:lstStyle/>
-          <a:p>
-            <a:pPr>
-              <a:spcBef>
-                <a:spcPts val="600"/>
-              </a:spcBef>
-              <a:spcAft>
-                <a:spcPts val="800"/>
-              </a:spcAft>
-              <a:defRPr sz="2000">
-                <a:solidFill>
-                  <a:srgbClr val="333333"/>
-                </a:solidFill>
-              </a:defRPr>
-            </a:pPr>
-            <a:r>
-              <a:t>Dataset: 2,163 synthetic price observations (Apr 2025 - Apr 2026)</a:t>
-            </a:r>
-          </a:p>
-          <a:p>
-            <a:pPr>
-              <a:spcBef>
-                <a:spcPts val="600"/>
-              </a:spcBef>
-              <a:spcAft>
-                <a:spcPts val="800"/>
-              </a:spcAft>
-              <a:defRPr sz="2000">
-                <a:solidFill>
-                  <a:srgbClr val="333333"/>
-                </a:solidFill>
-              </a:defRPr>
-            </a:pPr>
-            <a:r>
-              <a:t>From Snipper Tool captures in Paris Auchan and Carrefour stores</a:t>
-            </a:r>
-          </a:p>
-          <a:p>
-            <a:pPr>
-              <a:spcBef>
-                <a:spcPts val="600"/>
-              </a:spcBef>
-              <a:spcAft>
-                <a:spcPts val="800"/>
-              </a:spcAft>
-              <a:defRPr sz="2000">
-                <a:solidFill>
-                  <a:srgbClr val="333333"/>
-                </a:solidFill>
-              </a:defRPr>
-            </a:pPr>
-          </a:p>
-          <a:p>
-            <a:pPr>
-              <a:spcBef>
-                <a:spcPts val="600"/>
-              </a:spcBef>
-              <a:spcAft>
-                <a:spcPts val="800"/>
-              </a:spcAft>
-              <a:defRPr sz="2000">
-                <a:solidFill>
-                  <a:srgbClr val="333333"/>
-                </a:solidFill>
-              </a:defRPr>
-            </a:pPr>
-            <a:r>
-              <a:t>Compared THREE basket types:</a:t>
-            </a:r>
-          </a:p>
-          <a:p>
-            <a:pPr>
-              <a:spcBef>
-                <a:spcPts val="600"/>
-              </a:spcBef>
-              <a:spcAft>
-                <a:spcPts val="800"/>
-              </a:spcAft>
-              <a:defRPr sz="2000">
-                <a:solidFill>
-                  <a:srgbClr val="333333"/>
-                </a:solidFill>
-              </a:defRPr>
-            </a:pPr>
-            <a:r>
-              <a:t>  1. Official INSEE Minimal Basket</a:t>
-            </a:r>
-          </a:p>
-          <a:p>
-            <a:pPr>
-              <a:spcBef>
-                <a:spcPts val="600"/>
-              </a:spcBef>
-              <a:spcAft>
-                <a:spcPts val="800"/>
-              </a:spcAft>
-              <a:defRPr sz="2000">
-                <a:solidFill>
-                  <a:srgbClr val="333333"/>
-                </a:solidFill>
-              </a:defRPr>
-            </a:pPr>
-            <a:r>
-              <a:t>  2. Real Complete Living Basket (includes complementary items)</a:t>
-            </a:r>
-          </a:p>
-          <a:p>
-            <a:pPr>
-              <a:spcBef>
-                <a:spcPts val="600"/>
-              </a:spcBef>
-              <a:spcAft>
-                <a:spcPts val="800"/>
-              </a:spcAft>
-              <a:defRPr sz="2000">
-                <a:solidFill>
-                  <a:srgbClr val="333333"/>
-                </a:solidFill>
-              </a:defRPr>
-            </a:pPr>
-            <a:r>
-              <a:t>  3. Healthy Complete Basket (for nutritional wellness)</a:t>
-            </a:r>
-          </a:p>
-          <a:p>
-            <a:pPr>
-              <a:spcBef>
-                <a:spcPts val="600"/>
-              </a:spcBef>
-              <a:spcAft>
-                <a:spcPts val="800"/>
-              </a:spcAft>
-              <a:defRPr sz="2000">
-                <a:solidFill>
-                  <a:srgbClr val="333333"/>
-                </a:solidFill>
-              </a:defRPr>
-            </a:pPr>
-          </a:p>
-          <a:p>
-            <a:pPr>
-              <a:spcBef>
-                <a:spcPts val="600"/>
-              </a:spcBef>
-              <a:spcAft>
-                <a:spcPts val="800"/>
-              </a:spcAft>
-              <a:defRPr sz="2000">
-                <a:solidFill>
-                  <a:srgbClr val="333333"/>
-                </a:solidFill>
-              </a:defRPr>
-            </a:pPr>
-            <a:r>
-              <a:t>Against PARIS HOUSEHOLD INCOMES:</a:t>
-            </a:r>
-          </a:p>
-          <a:p>
-            <a:pPr>
-              <a:spcBef>
-                <a:spcPts val="600"/>
-              </a:spcBef>
-              <a:spcAft>
-                <a:spcPts val="800"/>
-              </a:spcAft>
-              <a:defRPr sz="2000">
-                <a:solidFill>
-                  <a:srgbClr val="333333"/>
-                </a:solidFill>
-              </a:defRPr>
-            </a:pPr>
-            <a:r>
-              <a:t>  • SMIC (minimum wage): 21,000 EUR/year</a:t>
-            </a:r>
-          </a:p>
-          <a:p>
-            <a:pPr>
-              <a:spcBef>
-                <a:spcPts val="600"/>
-              </a:spcBef>
-              <a:spcAft>
-                <a:spcPts val="800"/>
-              </a:spcAft>
-              <a:defRPr sz="2000">
-                <a:solidFill>
-                  <a:srgbClr val="333333"/>
-                </a:solidFill>
-              </a:defRPr>
-            </a:pPr>
-            <a:r>
-              <a:t>  • Low income: 28,000 EUR/year</a:t>
-            </a:r>
-          </a:p>
-          <a:p>
-            <a:pPr>
-              <a:spcBef>
-                <a:spcPts val="600"/>
-              </a:spcBef>
-              <a:spcAft>
-                <a:spcPts val="800"/>
-              </a:spcAft>
-              <a:defRPr sz="2000">
-                <a:solidFill>
-                  <a:srgbClr val="333333"/>
-                </a:solidFill>
-              </a:defRPr>
-            </a:pPr>
-            <a:r>
-              <a:t>  • Median: 42,000 EUR/year</a:t>
-            </a:r>
-          </a:p>
-          <a:p>
-            <a:pPr>
-              <a:spcBef>
-                <a:spcPts val="600"/>
-              </a:spcBef>
-              <a:spcAft>
-                <a:spcPts val="800"/>
-              </a:spcAft>
-              <a:defRPr sz="2000">
-                <a:solidFill>
-                  <a:srgbClr val="333333"/>
-                </a:solidFill>
-              </a:defRPr>
-            </a:pPr>
-            <a:r>
-              <a:t>  • Upper middle: 65,000 EUR/year</a:t>
-            </a:r>
-          </a:p>
-          <a:p>
-            <a:pPr>
-              <a:spcBef>
-                <a:spcPts val="600"/>
-              </a:spcBef>
-              <a:spcAft>
-                <a:spcPts val="800"/>
-              </a:spcAft>
-              <a:defRPr sz="2000">
-                <a:solidFill>
-                  <a:srgbClr val="333333"/>
-                </a:solidFill>
-              </a:defRPr>
-            </a:pPr>
-          </a:p>
-          <a:p>
-            <a:pPr>
-              <a:spcBef>
-                <a:spcPts val="600"/>
-              </a:spcBef>
-              <a:spcAft>
-                <a:spcPts val="800"/>
-              </a:spcAft>
-              <a:defRPr sz="2000">
-                <a:solidFill>
-                  <a:srgbClr val="333333"/>
-                </a:solidFill>
-              </a:defRPr>
-            </a:pPr>
-            <a:r>
-              <a:t>Geography: Paris region (Ile-de-France)</a:t>
-            </a:r>
-          </a:p>
-        </p:txBody>
-      </p:sp>
-    </p:spTree>
-  </p:cSld>
-  <p:clrMapOvr>
-    <a:masterClrMapping/>
-  </p:clrMapOvr>
-</p:sld>
-</file>
-
-<file path=ppt/slides/slide25.xml><?xml version="1.0" encoding="utf-8"?>
-<p:sld xmlns:a="http://schemas.openxmlformats.org/drawingml/2006/main" xmlns:p="http://schemas.openxmlformats.org/presentationml/2006/main" xmlns:r="http://schemas.openxmlformats.org/officeDocument/2006/relationships">
+<p:sld xmlns:a="http://schemas.openxmlformats.org/drawingml/2006/main" xmlns:r="http://schemas.openxmlformats.org/officeDocument/2006/relationships" xmlns:p="http://schemas.openxmlformats.org/presentationml/2006/main">
   <p:cSld>
     <p:bg>
       <p:bgPr>
@@ -6695,7 +6765,14 @@
         <p:cNvGrpSpPr/>
         <p:nvPr/>
       </p:nvGrpSpPr>
-      <p:grpSpPr/>
+      <p:grpSpPr>
+        <a:xfrm>
+          <a:off x="0" y="0"/>
+          <a:ext cx="0" cy="0"/>
+          <a:chOff x="0" y="0"/>
+          <a:chExt cx="0" cy="0"/>
+        </a:xfrm>
+      </p:grpSpPr>
       <p:sp>
         <p:nvSpPr>
           <p:cNvPr id="2" name="TextBox 1"/>
@@ -6798,8 +6875,8 @@
 </p:sld>
 </file>
 
-<file path=ppt/slides/slide26.xml><?xml version="1.0" encoding="utf-8"?>
-<p:sld xmlns:a="http://schemas.openxmlformats.org/drawingml/2006/main" xmlns:p="http://schemas.openxmlformats.org/presentationml/2006/main" xmlns:r="http://schemas.openxmlformats.org/officeDocument/2006/relationships">
+<file path=ppt/slides/slide25.xml><?xml version="1.0" encoding="utf-8"?>
+<p:sld xmlns:a="http://schemas.openxmlformats.org/drawingml/2006/main" xmlns:r="http://schemas.openxmlformats.org/officeDocument/2006/relationships" xmlns:p="http://schemas.openxmlformats.org/presentationml/2006/main">
   <p:cSld>
     <p:bg>
       <p:bgPr>
@@ -6815,7 +6892,14 @@
         <p:cNvGrpSpPr/>
         <p:nvPr/>
       </p:nvGrpSpPr>
-      <p:grpSpPr/>
+      <p:grpSpPr>
+        <a:xfrm>
+          <a:off x="0" y="0"/>
+          <a:ext cx="0" cy="0"/>
+          <a:chOff x="0" y="0"/>
+          <a:chExt cx="0" cy="0"/>
+        </a:xfrm>
+      </p:grpSpPr>
       <p:sp>
         <p:nvSpPr>
           <p:cNvPr id="2" name="TextBox 1"/>
@@ -6846,415 +6930,27 @@
               </a:defRPr>
             </a:pPr>
             <a:r>
-              <a:t>The Structural Deficit: Income vs. Reality</a:t>
-            </a:r>
-          </a:p>
-        </p:txBody>
-      </p:sp>
-      <p:sp>
-        <p:nvSpPr>
-          <p:cNvPr id="3" name="Rectangle 2"/>
-          <p:cNvSpPr/>
+              <a:t>Why This Matters: Poverty is Structural</a:t>
+            </a:r>
+          </a:p>
+        </p:txBody>
+      </p:sp>
+      <p:sp>
+        <p:nvSpPr>
+          <p:cNvPr id="4" name="TextBox 3">
+            <a:extLst>
+              <a:ext uri="{FF2B5EF4-FFF2-40B4-BE49-F238E27FC236}">
+                <a16:creationId xmlns:a16="http://schemas.microsoft.com/office/drawing/2014/main" id="{305F4C78-349E-14EB-25E9-6E0B63F6D278}"/>
+              </a:ext>
+            </a:extLst>
+          </p:cNvPr>
+          <p:cNvSpPr txBox="1"/>
           <p:nvPr/>
         </p:nvSpPr>
         <p:spPr>
           <a:xfrm>
-            <a:off x="457200" y="1097280"/>
-            <a:ext cx="3840480" cy="4114800"/>
-          </a:xfrm>
-          <a:prstGeom prst="rect">
-            <a:avLst/>
-          </a:prstGeom>
-          <a:solidFill>
-            <a:srgbClr val="FFF0F0"/>
-          </a:solidFill>
-          <a:ln w="25400">
-            <a:solidFill>
-              <a:srgbClr val="C80000"/>
-            </a:solidFill>
-          </a:ln>
-        </p:spPr>
-        <p:style>
-          <a:lnRef idx="1">
-            <a:schemeClr val="accent1"/>
-          </a:lnRef>
-          <a:fillRef idx="3">
-            <a:schemeClr val="accent1"/>
-          </a:fillRef>
-          <a:effectRef idx="2">
-            <a:schemeClr val="accent1"/>
-          </a:effectRef>
-          <a:fontRef idx="minor">
-            <a:schemeClr val="lt1"/>
-          </a:fontRef>
-        </p:style>
-        <p:txBody>
-          <a:bodyPr rtlCol="0" anchor="ctr" tIns="182880" lIns="182880" rIns="182880" wrap="square"/>
-          <a:lstStyle/>
-          <a:p>
-            <a:pPr algn="ctr">
-              <a:defRPr sz="1800" b="1">
-                <a:solidFill>
-                  <a:srgbClr val="C80000"/>
-                </a:solidFill>
-              </a:defRPr>
-            </a:pPr>
-            <a:r>
-              <a:t>SMIC FAMILY</a:t>
-            </a:r>
-          </a:p>
-          <a:p>
-            <a:pPr>
-              <a:defRPr sz="1100"/>
-            </a:pPr>
-            <a:r>
-              <a:t>Monthly Income: €1,750</a:t>
-            </a:r>
-          </a:p>
-          <a:p>
-            <a:pPr>
-              <a:defRPr sz="1100"/>
-            </a:pPr>
-          </a:p>
-          <a:p>
-            <a:pPr>
-              <a:defRPr sz="1100"/>
-            </a:pPr>
-            <a:r>
-              <a:t>Essential Costs:</a:t>
-            </a:r>
-          </a:p>
-          <a:p>
-            <a:pPr>
-              <a:defRPr sz="1100"/>
-            </a:pPr>
-            <a:r>
-              <a:t>• Housing: €725</a:t>
-            </a:r>
-          </a:p>
-          <a:p>
-            <a:pPr>
-              <a:defRPr sz="1100"/>
-            </a:pPr>
-            <a:r>
-              <a:t>• Food: €304</a:t>
-            </a:r>
-          </a:p>
-          <a:p>
-            <a:pPr>
-              <a:defRPr sz="1100"/>
-            </a:pPr>
-            <a:r>
-              <a:t>• Utilities: €150</a:t>
-            </a:r>
-          </a:p>
-          <a:p>
-            <a:pPr>
-              <a:defRPr sz="1100"/>
-            </a:pPr>
-            <a:r>
-              <a:t>• Childcare: €200</a:t>
-            </a:r>
-          </a:p>
-          <a:p>
-            <a:pPr>
-              <a:defRPr sz="1100"/>
-            </a:pPr>
-            <a:r>
-              <a:t>• Transport: €100</a:t>
-            </a:r>
-          </a:p>
-          <a:p>
-            <a:pPr>
-              <a:defRPr sz="1100"/>
-            </a:pPr>
-            <a:r>
-              <a:t>• Other: €245</a:t>
-            </a:r>
-          </a:p>
-          <a:p>
-            <a:pPr>
-              <a:defRPr sz="1100"/>
-            </a:pPr>
-          </a:p>
-          <a:p>
-            <a:pPr>
-              <a:defRPr sz="1100"/>
-            </a:pPr>
-            <a:r>
-              <a:t>TOTAL: €1,824</a:t>
-            </a:r>
-          </a:p>
-          <a:p>
-            <a:pPr>
-              <a:defRPr sz="1100"/>
-            </a:pPr>
-          </a:p>
-          <a:p>
-            <a:pPr>
-              <a:defRPr sz="1100" b="1">
-                <a:solidFill>
-                  <a:srgbClr val="C80000"/>
-                </a:solidFill>
-              </a:defRPr>
-            </a:pPr>
-            <a:r>
-              <a:t>MONTHLY DEFICIT:</a:t>
-            </a:r>
-          </a:p>
-          <a:p>
-            <a:pPr>
-              <a:defRPr sz="1100"/>
-            </a:pPr>
-            <a:r>
-              <a:t>-€74 per month</a:t>
-            </a:r>
-          </a:p>
-          <a:p>
-            <a:pPr>
-              <a:defRPr sz="1100"/>
-            </a:pPr>
-          </a:p>
-          <a:p>
-            <a:pPr>
-              <a:defRPr sz="1100"/>
-            </a:pPr>
-            <a:r>
-              <a:t>Government transfers</a:t>
-            </a:r>
-          </a:p>
-          <a:p>
-            <a:pPr>
-              <a:defRPr sz="1100" b="1">
-                <a:solidFill>
-                  <a:srgbClr val="C80000"/>
-                </a:solidFill>
-              </a:defRPr>
-            </a:pPr>
-            <a:r>
-              <a:t>required to break even</a:t>
-            </a:r>
-          </a:p>
-        </p:txBody>
-      </p:sp>
-      <p:sp>
-        <p:nvSpPr>
-          <p:cNvPr id="4" name="Rectangle 3"/>
-          <p:cNvSpPr/>
-          <p:nvPr/>
-        </p:nvSpPr>
-        <p:spPr>
-          <a:xfrm>
-            <a:off x="4846320" y="1097280"/>
-            <a:ext cx="3840480" cy="4114800"/>
-          </a:xfrm>
-          <a:prstGeom prst="rect">
-            <a:avLst/>
-          </a:prstGeom>
-          <a:solidFill>
-            <a:srgbClr val="F0FFF0"/>
-          </a:solidFill>
-          <a:ln w="25400">
-            <a:solidFill>
-              <a:srgbClr val="009600"/>
-            </a:solidFill>
-          </a:ln>
-        </p:spPr>
-        <p:style>
-          <a:lnRef idx="1">
-            <a:schemeClr val="accent1"/>
-          </a:lnRef>
-          <a:fillRef idx="3">
-            <a:schemeClr val="accent1"/>
-          </a:fillRef>
-          <a:effectRef idx="2">
-            <a:schemeClr val="accent1"/>
-          </a:effectRef>
-          <a:fontRef idx="minor">
-            <a:schemeClr val="lt1"/>
-          </a:fontRef>
-        </p:style>
-        <p:txBody>
-          <a:bodyPr rtlCol="0" anchor="ctr" tIns="182880" lIns="182880" rIns="182880" wrap="square"/>
-          <a:lstStyle/>
-          <a:p>
-            <a:pPr algn="ctr">
-              <a:defRPr sz="1800" b="1">
-                <a:solidFill>
-                  <a:srgbClr val="009600"/>
-                </a:solidFill>
-              </a:defRPr>
-            </a:pPr>
-            <a:r>
-              <a:t>MEDIAN FAMILY</a:t>
-            </a:r>
-          </a:p>
-          <a:p>
-            <a:pPr>
-              <a:defRPr sz="1100"/>
-            </a:pPr>
-            <a:r>
-              <a:t>Monthly Income: €3,500</a:t>
-            </a:r>
-          </a:p>
-          <a:p>
-            <a:pPr>
-              <a:defRPr sz="1100"/>
-            </a:pPr>
-          </a:p>
-          <a:p>
-            <a:pPr>
-              <a:defRPr sz="1100"/>
-            </a:pPr>
-            <a:r>
-              <a:t>Essential Costs:</a:t>
-            </a:r>
-          </a:p>
-          <a:p>
-            <a:pPr>
-              <a:defRPr sz="1100"/>
-            </a:pPr>
-            <a:r>
-              <a:t>• Housing: €1,150</a:t>
-            </a:r>
-          </a:p>
-          <a:p>
-            <a:pPr>
-              <a:defRPr sz="1100"/>
-            </a:pPr>
-            <a:r>
-              <a:t>• Food: €304</a:t>
-            </a:r>
-          </a:p>
-          <a:p>
-            <a:pPr>
-              <a:defRPr sz="1100"/>
-            </a:pPr>
-            <a:r>
-              <a:t>• Utilities: €150</a:t>
-            </a:r>
-          </a:p>
-          <a:p>
-            <a:pPr>
-              <a:defRPr sz="1100"/>
-            </a:pPr>
-            <a:r>
-              <a:t>• Childcare: €200</a:t>
-            </a:r>
-          </a:p>
-          <a:p>
-            <a:pPr>
-              <a:defRPr sz="1100"/>
-            </a:pPr>
-            <a:r>
-              <a:t>• Transport: €100</a:t>
-            </a:r>
-          </a:p>
-          <a:p>
-            <a:pPr>
-              <a:defRPr sz="1100"/>
-            </a:pPr>
-            <a:r>
-              <a:t>• Other: €245</a:t>
-            </a:r>
-          </a:p>
-          <a:p>
-            <a:pPr>
-              <a:defRPr sz="1100"/>
-            </a:pPr>
-          </a:p>
-          <a:p>
-            <a:pPr>
-              <a:defRPr sz="1100"/>
-            </a:pPr>
-            <a:r>
-              <a:t>TOTAL: €2,249</a:t>
-            </a:r>
-          </a:p>
-          <a:p>
-            <a:pPr>
-              <a:defRPr sz="1100"/>
-            </a:pPr>
-          </a:p>
-          <a:p>
-            <a:pPr>
-              <a:defRPr sz="1100" b="1">
-                <a:solidFill>
-                  <a:srgbClr val="009600"/>
-                </a:solidFill>
-              </a:defRPr>
-            </a:pPr>
-            <a:r>
-              <a:t>MONTHLY SURPLUS:</a:t>
-            </a:r>
-          </a:p>
-          <a:p>
-            <a:pPr>
-              <a:defRPr sz="1100"/>
-            </a:pPr>
-            <a:r>
-              <a:t>+€1,251 per month</a:t>
-            </a:r>
-          </a:p>
-          <a:p>
-            <a:pPr>
-              <a:defRPr sz="1100"/>
-            </a:pPr>
-          </a:p>
-          <a:p>
-            <a:pPr>
-              <a:defRPr sz="1100"/>
-            </a:pPr>
-            <a:r>
-              <a:t>Can save, invest,</a:t>
-            </a:r>
-          </a:p>
-          <a:p>
-            <a:pPr>
-              <a:defRPr sz="1100"/>
-            </a:pPr>
-            <a:r>
-              <a:t>handle emergencies</a:t>
-            </a:r>
-          </a:p>
-        </p:txBody>
-      </p:sp>
-    </p:spTree>
-  </p:cSld>
-  <p:clrMapOvr>
-    <a:masterClrMapping/>
-  </p:clrMapOvr>
-</p:sld>
-</file>
-
-<file path=ppt/slides/slide27.xml><?xml version="1.0" encoding="utf-8"?>
-<p:sld xmlns:a="http://schemas.openxmlformats.org/drawingml/2006/main" xmlns:p="http://schemas.openxmlformats.org/presentationml/2006/main" xmlns:r="http://schemas.openxmlformats.org/officeDocument/2006/relationships">
-  <p:cSld>
-    <p:bg>
-      <p:bgPr>
-        <a:solidFill>
-          <a:srgbClr val="F5F5F5"/>
-        </a:solidFill>
-        <a:effectLst/>
-      </p:bgPr>
-    </p:bg>
-    <p:spTree>
-      <p:nvGrpSpPr>
-        <p:cNvPr id="1" name=""/>
-        <p:cNvGrpSpPr/>
-        <p:nvPr/>
-      </p:nvGrpSpPr>
-      <p:grpSpPr/>
-      <p:sp>
-        <p:nvSpPr>
-          <p:cNvPr id="2" name="TextBox 1"/>
-          <p:cNvSpPr txBox="1"/>
-          <p:nvPr/>
-        </p:nvSpPr>
-        <p:spPr>
-          <a:xfrm>
-            <a:off x="457200" y="274320"/>
-            <a:ext cx="8229600" cy="548640"/>
+            <a:off x="285750" y="1104900"/>
+            <a:ext cx="8401050" cy="5539978"/>
           </a:xfrm>
           <a:prstGeom prst="rect">
             <a:avLst/>
@@ -7262,47 +6958,12 @@
           <a:noFill/>
         </p:spPr>
         <p:txBody>
-          <a:bodyPr wrap="none">
+          <a:bodyPr wrap="square" rtlCol="0">
             <a:spAutoFit/>
           </a:bodyPr>
           <a:lstStyle/>
           <a:p>
             <a:pPr>
-              <a:defRPr sz="3600" b="1">
-                <a:solidFill>
-                  <a:srgbClr val="1F4D76"/>
-                </a:solidFill>
-              </a:defRPr>
-            </a:pPr>
-            <a:r>
-              <a:t>Why This Matters: Poverty is Structural</a:t>
-            </a:r>
-          </a:p>
-        </p:txBody>
-      </p:sp>
-      <p:sp>
-        <p:nvSpPr>
-          <p:cNvPr id="3" name="TextBox 2"/>
-          <p:cNvSpPr txBox="1"/>
-          <p:nvPr/>
-        </p:nvSpPr>
-        <p:spPr>
-          <a:xfrm>
-            <a:off x="640080" y="1097280"/>
-            <a:ext cx="7863840" cy="4389120"/>
-          </a:xfrm>
-          <a:prstGeom prst="rect">
-            <a:avLst/>
-          </a:prstGeom>
-          <a:noFill/>
-        </p:spPr>
-        <p:txBody>
-          <a:bodyPr wrap="square">
-            <a:spAutoFit/>
-          </a:bodyPr>
-          <a:lstStyle/>
-          <a:p>
-            <a:pPr>
               <a:defRPr sz="1400" b="1">
                 <a:solidFill>
                   <a:srgbClr val="C80000"/>
@@ -7310,6 +6971,7 @@
               </a:defRPr>
             </a:pPr>
             <a:r>
+              <a:rPr lang="en-US" sz="2400" dirty="0"/>
               <a:t>SMIC families cannot survive on SMIC income alone.</a:t>
             </a:r>
           </a:p>
@@ -7321,6 +6983,7 @@
                 </a:solidFill>
               </a:defRPr>
             </a:pPr>
+            <a:endParaRPr lang="en-US" sz="2400" dirty="0"/>
           </a:p>
           <a:p>
             <a:pPr>
@@ -7331,7 +6994,8 @@
               </a:defRPr>
             </a:pPr>
             <a:r>
-              <a:t>Government transfers (CAF, housing allowance: €300-550/month) are</a:t>
+              <a:rPr lang="en-US" sz="2400" dirty="0"/>
+              <a:t>Government transfers (CAF, housing allowance: €300-550/month) are structural survival requirement, not supplemental help.</a:t>
             </a:r>
           </a:p>
           <a:p>
@@ -7342,9 +7006,7 @@
                 </a:solidFill>
               </a:defRPr>
             </a:pPr>
-            <a:r>
-              <a:t>structural survival requirement, not supplemental help.</a:t>
-            </a:r>
+            <a:endParaRPr lang="en-US" sz="2400" dirty="0"/>
           </a:p>
           <a:p>
             <a:pPr>
@@ -7354,78 +7016,83 @@
                 </a:solidFill>
               </a:defRPr>
             </a:pPr>
-          </a:p>
-          <a:p>
-            <a:pPr>
+            <a:r>
+              <a:rPr lang="en-US" sz="2400" dirty="0"/>
+              <a:t>With transfers, SMIC families break even with no margin for:</a:t>
+            </a:r>
+          </a:p>
+          <a:p>
+            <a:pPr marL="285750" indent="-285750">
+              <a:buFont typeface="Arial" panose="020B0604020202020204" pitchFamily="34" charset="0"/>
+              <a:buChar char="•"/>
               <a:defRPr sz="1400">
                 <a:solidFill>
+                  <a:srgbClr val="646464"/>
+                </a:solidFill>
+              </a:defRPr>
+            </a:pPr>
+            <a:r>
+              <a:rPr lang="en-US" sz="2400" dirty="0"/>
+              <a:t>Emergencies (car repairs, medical events)</a:t>
+            </a:r>
+          </a:p>
+          <a:p>
+            <a:pPr marL="285750" indent="-285750">
+              <a:buFont typeface="Arial" panose="020B0604020202020204" pitchFamily="34" charset="0"/>
+              <a:buChar char="•"/>
+              <a:defRPr sz="1400">
+                <a:solidFill>
+                  <a:srgbClr val="646464"/>
+                </a:solidFill>
+              </a:defRPr>
+            </a:pPr>
+            <a:r>
+              <a:rPr lang="en-US" sz="2400" dirty="0"/>
+              <a:t>Savings (impossible)</a:t>
+            </a:r>
+          </a:p>
+          <a:p>
+            <a:pPr marL="285750" indent="-285750">
+              <a:buFont typeface="Arial" panose="020B0604020202020204" pitchFamily="34" charset="0"/>
+              <a:buChar char="•"/>
+              <a:defRPr sz="1400">
+                <a:solidFill>
+                  <a:srgbClr val="646464"/>
+                </a:solidFill>
+              </a:defRPr>
+            </a:pPr>
+            <a:r>
+              <a:rPr lang="en-US" sz="2400" dirty="0"/>
+              <a:t>Family composition changes (baby, aging parent)</a:t>
+            </a:r>
+          </a:p>
+          <a:p>
+            <a:pPr>
+              <a:defRPr sz="1400">
+                <a:solidFill>
                   <a:srgbClr val="000000"/>
                 </a:solidFill>
               </a:defRPr>
             </a:pPr>
-            <a:r>
-              <a:t>With transfers, SMIC families break even with no margin for:</a:t>
-            </a:r>
+            <a:endParaRPr lang="en-US" sz="2400" dirty="0"/>
           </a:p>
           <a:p>
             <a:pPr>
               <a:defRPr sz="1400">
                 <a:solidFill>
-                  <a:srgbClr val="646464"/>
-                </a:solidFill>
-              </a:defRPr>
-            </a:pPr>
-            <a:r>
-              <a:t>  • Emergencies (car repairs, medical events)</a:t>
-            </a:r>
-          </a:p>
-          <a:p>
-            <a:pPr>
-              <a:defRPr sz="1400">
-                <a:solidFill>
-                  <a:srgbClr val="646464"/>
-                </a:solidFill>
-              </a:defRPr>
-            </a:pPr>
-            <a:r>
-              <a:t>  • Savings (impossible)</a:t>
-            </a:r>
-          </a:p>
-          <a:p>
-            <a:pPr>
-              <a:defRPr sz="1400">
-                <a:solidFill>
-                  <a:srgbClr val="646464"/>
-                </a:solidFill>
-              </a:defRPr>
-            </a:pPr>
-            <a:r>
-              <a:t>  • Family composition changes (baby, aging parent)</a:t>
-            </a:r>
-          </a:p>
-          <a:p>
-            <a:pPr>
-              <a:defRPr sz="1400">
-                <a:solidFill>
                   <a:srgbClr val="000000"/>
                 </a:solidFill>
               </a:defRPr>
             </a:pPr>
-          </a:p>
-          <a:p>
-            <a:pPr>
-              <a:defRPr sz="1400">
-                <a:solidFill>
-                  <a:srgbClr val="000000"/>
-                </a:solidFill>
-              </a:defRPr>
-            </a:pPr>
-            <a:r>
+            <a:r>
+              <a:rPr lang="en-US" sz="2400" dirty="0"/>
               <a:t>When composition changes occur (teenage child costs €3,461/year more),</a:t>
             </a:r>
           </a:p>
           <a:p>
-            <a:pPr>
+            <a:pPr marL="285750" indent="-285750">
+              <a:buFont typeface="Arial" panose="020B0604020202020204" pitchFamily="34" charset="0"/>
+              <a:buChar char="•"/>
               <a:defRPr sz="1400" b="1">
                 <a:solidFill>
                   <a:srgbClr val="C80000"/>
@@ -7433,20 +7100,14 @@
               </a:defRPr>
             </a:pPr>
             <a:r>
+              <a:rPr lang="en-US" sz="2400" dirty="0"/>
               <a:t>SMIC families have NO margin to absorb the cost.</a:t>
             </a:r>
           </a:p>
           <a:p>
-            <a:pPr>
-              <a:defRPr sz="1400">
-                <a:solidFill>
-                  <a:srgbClr val="000000"/>
-                </a:solidFill>
-              </a:defRPr>
-            </a:pPr>
-          </a:p>
-          <a:p>
-            <a:pPr>
+            <a:pPr marL="285750" indent="-285750">
+              <a:buFont typeface="Arial" panose="020B0604020202020204" pitchFamily="34" charset="0"/>
+              <a:buChar char="•"/>
               <a:defRPr sz="1400" b="1">
                 <a:solidFill>
                   <a:srgbClr val="C80000"/>
@@ -7454,557 +7115,12 @@
               </a:defRPr>
             </a:pPr>
             <a:r>
+              <a:rPr lang="en-US" sz="2400" dirty="0"/>
               <a:t>Result: Debt accumulation OR going without essentials</a:t>
             </a:r>
           </a:p>
-        </p:txBody>
-      </p:sp>
-    </p:spTree>
-  </p:cSld>
-  <p:clrMapOvr>
-    <a:masterClrMapping/>
-  </p:clrMapOvr>
-</p:sld>
-</file>
-
-<file path=ppt/slides/slide28.xml><?xml version="1.0" encoding="utf-8"?>
-<p:sld xmlns:a="http://schemas.openxmlformats.org/drawingml/2006/main" xmlns:p="http://schemas.openxmlformats.org/presentationml/2006/main" xmlns:r="http://schemas.openxmlformats.org/officeDocument/2006/relationships">
-  <p:cSld>
-    <p:bg>
-      <p:bgPr>
-        <a:solidFill>
-          <a:srgbClr val="F5F5F5"/>
-        </a:solidFill>
-        <a:effectLst/>
-      </p:bgPr>
-    </p:bg>
-    <p:spTree>
-      <p:nvGrpSpPr>
-        <p:cNvPr id="1" name=""/>
-        <p:cNvGrpSpPr/>
-        <p:nvPr/>
-      </p:nvGrpSpPr>
-      <p:grpSpPr/>
-      <p:sp>
-        <p:nvSpPr>
-          <p:cNvPr id="2" name="TextBox 1"/>
-          <p:cNvSpPr txBox="1"/>
-          <p:nvPr/>
-        </p:nvSpPr>
-        <p:spPr>
-          <a:xfrm>
-            <a:off x="457200" y="274320"/>
-            <a:ext cx="8229600" cy="731520"/>
-          </a:xfrm>
-          <a:prstGeom prst="rect">
-            <a:avLst/>
-          </a:prstGeom>
-          <a:noFill/>
-        </p:spPr>
-        <p:txBody>
-          <a:bodyPr wrap="none">
-            <a:spAutoFit/>
-          </a:bodyPr>
-          <a:lstStyle/>
-          <a:p>
-            <a:pPr>
-              <a:defRPr sz="4000" b="1">
-                <a:solidFill>
-                  <a:srgbClr val="1F4D76"/>
-                </a:solidFill>
-              </a:defRPr>
-            </a:pPr>
-            <a:r>
-              <a:t>Complete Budget Reality: Where SMIC Families Stand</a:t>
-            </a:r>
-          </a:p>
-        </p:txBody>
-      </p:sp>
-      <p:sp>
-        <p:nvSpPr>
-          <p:cNvPr id="3" name="TextBox 2"/>
-          <p:cNvSpPr txBox="1"/>
-          <p:nvPr/>
-        </p:nvSpPr>
-        <p:spPr>
-          <a:xfrm>
-            <a:off x="457200" y="1097280"/>
-            <a:ext cx="8229600" cy="457200"/>
-          </a:xfrm>
-          <a:prstGeom prst="rect">
-            <a:avLst/>
-          </a:prstGeom>
-          <a:noFill/>
-        </p:spPr>
-        <p:txBody>
-          <a:bodyPr wrap="none">
-            <a:spAutoFit/>
-          </a:bodyPr>
-          <a:lstStyle/>
-          <a:p>
-            <a:pPr>
-              <a:defRPr sz="2400">
-                <a:solidFill>
-                  <a:srgbClr val="646464"/>
-                </a:solidFill>
-              </a:defRPr>
-            </a:pPr>
-            <a:r>
-              <a:t>All Essential Monthly Costs vs. Income</a:t>
-            </a:r>
-          </a:p>
-        </p:txBody>
-      </p:sp>
-      <p:pic>
-        <p:nvPicPr>
-          <p:cNvPr id="4" name="Picture 3" descr="image.png"/>
-          <p:cNvPicPr>
-            <a:picLocks noChangeAspect="1"/>
-          </p:cNvPicPr>
-          <p:nvPr/>
-        </p:nvPicPr>
-        <p:blipFill>
-          <a:blip r:embed="rId2"/>
-          <a:stretch>
-            <a:fillRect/>
-          </a:stretch>
-        </p:blipFill>
-        <p:spPr>
-          <a:xfrm>
-            <a:off x="457200" y="1828800"/>
-            <a:ext cx="8229600" cy="3472263"/>
-          </a:xfrm>
-          <a:prstGeom prst="rect">
-            <a:avLst/>
-          </a:prstGeom>
-        </p:spPr>
-      </p:pic>
-    </p:spTree>
-  </p:cSld>
-  <p:clrMapOvr>
-    <a:masterClrMapping/>
-  </p:clrMapOvr>
-</p:sld>
-</file>
-
-<file path=ppt/slides/slide29.xml><?xml version="1.0" encoding="utf-8"?>
-<p:sld xmlns:a="http://schemas.openxmlformats.org/drawingml/2006/main" xmlns:p="http://schemas.openxmlformats.org/presentationml/2006/main" xmlns:r="http://schemas.openxmlformats.org/officeDocument/2006/relationships">
-  <p:cSld>
-    <p:bg>
-      <p:bgPr>
-        <a:solidFill>
-          <a:srgbClr val="F5F5F5"/>
-        </a:solidFill>
-        <a:effectLst/>
-      </p:bgPr>
-    </p:bg>
-    <p:spTree>
-      <p:nvGrpSpPr>
-        <p:cNvPr id="1" name=""/>
-        <p:cNvGrpSpPr/>
-        <p:nvPr/>
-      </p:nvGrpSpPr>
-      <p:grpSpPr/>
-      <p:sp>
-        <p:nvSpPr>
-          <p:cNvPr id="2" name="TextBox 1"/>
-          <p:cNvSpPr txBox="1"/>
-          <p:nvPr/>
-        </p:nvSpPr>
-        <p:spPr>
-          <a:xfrm>
-            <a:off x="457200" y="274320"/>
-            <a:ext cx="8229600" cy="548640"/>
-          </a:xfrm>
-          <a:prstGeom prst="rect">
-            <a:avLst/>
-          </a:prstGeom>
-          <a:noFill/>
-        </p:spPr>
-        <p:txBody>
-          <a:bodyPr wrap="none">
-            <a:spAutoFit/>
-          </a:bodyPr>
-          <a:lstStyle/>
-          <a:p>
-            <a:pPr>
-              <a:defRPr sz="3600" b="1">
-                <a:solidFill>
-                  <a:srgbClr val="1F4D76"/>
-                </a:solidFill>
-              </a:defRPr>
-            </a:pPr>
-            <a:r>
-              <a:t>The Structural Deficit: Income vs. Reality</a:t>
-            </a:r>
-          </a:p>
-        </p:txBody>
-      </p:sp>
-      <p:sp>
-        <p:nvSpPr>
-          <p:cNvPr id="3" name="Rectangle 2"/>
-          <p:cNvSpPr/>
-          <p:nvPr/>
-        </p:nvSpPr>
-        <p:spPr>
-          <a:xfrm>
-            <a:off x="457200" y="1097280"/>
-            <a:ext cx="3840480" cy="4114800"/>
-          </a:xfrm>
-          <a:prstGeom prst="rect">
-            <a:avLst/>
-          </a:prstGeom>
-          <a:solidFill>
-            <a:srgbClr val="FFF0F0"/>
-          </a:solidFill>
-          <a:ln w="25400">
-            <a:solidFill>
-              <a:srgbClr val="C80000"/>
-            </a:solidFill>
-          </a:ln>
-        </p:spPr>
-        <p:style>
-          <a:lnRef idx="1">
-            <a:schemeClr val="accent1"/>
-          </a:lnRef>
-          <a:fillRef idx="3">
-            <a:schemeClr val="accent1"/>
-          </a:fillRef>
-          <a:effectRef idx="2">
-            <a:schemeClr val="accent1"/>
-          </a:effectRef>
-          <a:fontRef idx="minor">
-            <a:schemeClr val="lt1"/>
-          </a:fontRef>
-        </p:style>
-        <p:txBody>
-          <a:bodyPr rtlCol="0" anchor="ctr" tIns="182880" lIns="182880" rIns="182880" wrap="square"/>
-          <a:lstStyle/>
-          <a:p>
-            <a:pPr algn="ctr">
-              <a:defRPr sz="1800" b="1">
-                <a:solidFill>
-                  <a:srgbClr val="C80000"/>
-                </a:solidFill>
-              </a:defRPr>
-            </a:pPr>
-            <a:r>
-              <a:t>SMIC FAMILY</a:t>
-            </a:r>
-          </a:p>
-          <a:p>
-            <a:pPr>
-              <a:defRPr sz="1100"/>
-            </a:pPr>
-            <a:r>
-              <a:t>Monthly Income: €1,750</a:t>
-            </a:r>
-          </a:p>
-          <a:p>
-            <a:pPr>
-              <a:defRPr sz="1100"/>
-            </a:pPr>
-          </a:p>
-          <a:p>
-            <a:pPr>
-              <a:defRPr sz="1100"/>
-            </a:pPr>
-            <a:r>
-              <a:t>Essential Costs:</a:t>
-            </a:r>
-          </a:p>
-          <a:p>
-            <a:pPr>
-              <a:defRPr sz="1100"/>
-            </a:pPr>
-            <a:r>
-              <a:t>• Housing: €725</a:t>
-            </a:r>
-          </a:p>
-          <a:p>
-            <a:pPr>
-              <a:defRPr sz="1100"/>
-            </a:pPr>
-            <a:r>
-              <a:t>• Food: €304</a:t>
-            </a:r>
-          </a:p>
-          <a:p>
-            <a:pPr>
-              <a:defRPr sz="1100"/>
-            </a:pPr>
-            <a:r>
-              <a:t>• Utilities: €150</a:t>
-            </a:r>
-          </a:p>
-          <a:p>
-            <a:pPr>
-              <a:defRPr sz="1100"/>
-            </a:pPr>
-            <a:r>
-              <a:t>• Childcare: €200</a:t>
-            </a:r>
-          </a:p>
-          <a:p>
-            <a:pPr>
-              <a:defRPr sz="1100"/>
-            </a:pPr>
-            <a:r>
-              <a:t>• Transport: €100</a:t>
-            </a:r>
-          </a:p>
-          <a:p>
-            <a:pPr>
-              <a:defRPr sz="1100"/>
-            </a:pPr>
-            <a:r>
-              <a:t>• Other: €245</a:t>
-            </a:r>
-          </a:p>
-          <a:p>
-            <a:pPr>
-              <a:defRPr sz="1100"/>
-            </a:pPr>
-          </a:p>
-          <a:p>
-            <a:pPr>
-              <a:defRPr sz="1100"/>
-            </a:pPr>
-            <a:r>
-              <a:t>TOTAL: €1,824</a:t>
-            </a:r>
-          </a:p>
-          <a:p>
-            <a:pPr>
-              <a:defRPr sz="1100"/>
-            </a:pPr>
-          </a:p>
-          <a:p>
-            <a:pPr>
-              <a:defRPr sz="1100" b="1">
-                <a:solidFill>
-                  <a:srgbClr val="C80000"/>
-                </a:solidFill>
-              </a:defRPr>
-            </a:pPr>
-            <a:r>
-              <a:t>MONTHLY DEFICIT:</a:t>
-            </a:r>
-          </a:p>
-          <a:p>
-            <a:pPr>
-              <a:defRPr sz="1100"/>
-            </a:pPr>
-            <a:r>
-              <a:t>-€74 per month</a:t>
-            </a:r>
-          </a:p>
-          <a:p>
-            <a:pPr>
-              <a:defRPr sz="1100"/>
-            </a:pPr>
-          </a:p>
-          <a:p>
-            <a:pPr>
-              <a:defRPr sz="1100"/>
-            </a:pPr>
-            <a:r>
-              <a:t>Government transfers</a:t>
-            </a:r>
-          </a:p>
-          <a:p>
-            <a:pPr>
-              <a:defRPr sz="1100" b="1">
-                <a:solidFill>
-                  <a:srgbClr val="C80000"/>
-                </a:solidFill>
-              </a:defRPr>
-            </a:pPr>
-            <a:r>
-              <a:t>required to break even</a:t>
-            </a:r>
-          </a:p>
-        </p:txBody>
-      </p:sp>
-      <p:sp>
-        <p:nvSpPr>
-          <p:cNvPr id="4" name="Rectangle 3"/>
-          <p:cNvSpPr/>
-          <p:nvPr/>
-        </p:nvSpPr>
-        <p:spPr>
-          <a:xfrm>
-            <a:off x="4846320" y="1097280"/>
-            <a:ext cx="3840480" cy="4114800"/>
-          </a:xfrm>
-          <a:prstGeom prst="rect">
-            <a:avLst/>
-          </a:prstGeom>
-          <a:solidFill>
-            <a:srgbClr val="F0FFF0"/>
-          </a:solidFill>
-          <a:ln w="25400">
-            <a:solidFill>
-              <a:srgbClr val="009600"/>
-            </a:solidFill>
-          </a:ln>
-        </p:spPr>
-        <p:style>
-          <a:lnRef idx="1">
-            <a:schemeClr val="accent1"/>
-          </a:lnRef>
-          <a:fillRef idx="3">
-            <a:schemeClr val="accent1"/>
-          </a:fillRef>
-          <a:effectRef idx="2">
-            <a:schemeClr val="accent1"/>
-          </a:effectRef>
-          <a:fontRef idx="minor">
-            <a:schemeClr val="lt1"/>
-          </a:fontRef>
-        </p:style>
-        <p:txBody>
-          <a:bodyPr rtlCol="0" anchor="ctr" tIns="182880" lIns="182880" rIns="182880" wrap="square"/>
-          <a:lstStyle/>
-          <a:p>
-            <a:pPr algn="ctr">
-              <a:defRPr sz="1800" b="1">
-                <a:solidFill>
-                  <a:srgbClr val="009600"/>
-                </a:solidFill>
-              </a:defRPr>
-            </a:pPr>
-            <a:r>
-              <a:t>MEDIAN FAMILY</a:t>
-            </a:r>
-          </a:p>
-          <a:p>
-            <a:pPr>
-              <a:defRPr sz="1100"/>
-            </a:pPr>
-            <a:r>
-              <a:t>Monthly Income: €3,500</a:t>
-            </a:r>
-          </a:p>
-          <a:p>
-            <a:pPr>
-              <a:defRPr sz="1100"/>
-            </a:pPr>
-          </a:p>
-          <a:p>
-            <a:pPr>
-              <a:defRPr sz="1100"/>
-            </a:pPr>
-            <a:r>
-              <a:t>Essential Costs:</a:t>
-            </a:r>
-          </a:p>
-          <a:p>
-            <a:pPr>
-              <a:defRPr sz="1100"/>
-            </a:pPr>
-            <a:r>
-              <a:t>• Housing: €1,150</a:t>
-            </a:r>
-          </a:p>
-          <a:p>
-            <a:pPr>
-              <a:defRPr sz="1100"/>
-            </a:pPr>
-            <a:r>
-              <a:t>• Food: €304</a:t>
-            </a:r>
-          </a:p>
-          <a:p>
-            <a:pPr>
-              <a:defRPr sz="1100"/>
-            </a:pPr>
-            <a:r>
-              <a:t>• Utilities: €150</a:t>
-            </a:r>
-          </a:p>
-          <a:p>
-            <a:pPr>
-              <a:defRPr sz="1100"/>
-            </a:pPr>
-            <a:r>
-              <a:t>• Childcare: €200</a:t>
-            </a:r>
-          </a:p>
-          <a:p>
-            <a:pPr>
-              <a:defRPr sz="1100"/>
-            </a:pPr>
-            <a:r>
-              <a:t>• Transport: €100</a:t>
-            </a:r>
-          </a:p>
-          <a:p>
-            <a:pPr>
-              <a:defRPr sz="1100"/>
-            </a:pPr>
-            <a:r>
-              <a:t>• Other: €245</a:t>
-            </a:r>
-          </a:p>
-          <a:p>
-            <a:pPr>
-              <a:defRPr sz="1100"/>
-            </a:pPr>
-          </a:p>
-          <a:p>
-            <a:pPr>
-              <a:defRPr sz="1100"/>
-            </a:pPr>
-            <a:r>
-              <a:t>TOTAL: €2,249</a:t>
-            </a:r>
-          </a:p>
-          <a:p>
-            <a:pPr>
-              <a:defRPr sz="1100"/>
-            </a:pPr>
-          </a:p>
-          <a:p>
-            <a:pPr>
-              <a:defRPr sz="1100" b="1">
-                <a:solidFill>
-                  <a:srgbClr val="009600"/>
-                </a:solidFill>
-              </a:defRPr>
-            </a:pPr>
-            <a:r>
-              <a:t>MONTHLY SURPLUS:</a:t>
-            </a:r>
-          </a:p>
-          <a:p>
-            <a:pPr>
-              <a:defRPr sz="1100"/>
-            </a:pPr>
-            <a:r>
-              <a:t>+€1,251 per month</a:t>
-            </a:r>
-          </a:p>
-          <a:p>
-            <a:pPr>
-              <a:defRPr sz="1100"/>
-            </a:pPr>
-          </a:p>
-          <a:p>
-            <a:pPr>
-              <a:defRPr sz="1100"/>
-            </a:pPr>
-            <a:r>
-              <a:t>Can save, invest,</a:t>
-            </a:r>
-          </a:p>
-          <a:p>
-            <a:pPr>
-              <a:defRPr sz="1100"/>
-            </a:pPr>
-            <a:r>
-              <a:t>handle emergencies</a:t>
-            </a:r>
+          <a:p>
+            <a:endParaRPr lang="fr-FR" dirty="0"/>
           </a:p>
         </p:txBody>
       </p:sp>
@@ -8017,7 +7133,7 @@
 </file>
 
 <file path=ppt/slides/slide3.xml><?xml version="1.0" encoding="utf-8"?>
-<p:sld xmlns:a="http://schemas.openxmlformats.org/drawingml/2006/main" xmlns:p="http://schemas.openxmlformats.org/presentationml/2006/main" xmlns:r="http://schemas.openxmlformats.org/officeDocument/2006/relationships">
+<p:sld xmlns:a="http://schemas.openxmlformats.org/drawingml/2006/main" xmlns:r="http://schemas.openxmlformats.org/officeDocument/2006/relationships" xmlns:p="http://schemas.openxmlformats.org/presentationml/2006/main">
   <p:cSld>
     <p:bg>
       <p:bgPr>
@@ -8033,7 +7149,14 @@
         <p:cNvGrpSpPr/>
         <p:nvPr/>
       </p:nvGrpSpPr>
-      <p:grpSpPr/>
+      <p:grpSpPr>
+        <a:xfrm>
+          <a:off x="0" y="0"/>
+          <a:ext cx="0" cy="0"/>
+          <a:chOff x="0" y="0"/>
+          <a:chExt cx="0" cy="0"/>
+        </a:xfrm>
+      </p:grpSpPr>
       <p:sp>
         <p:nvSpPr>
           <p:cNvPr id="2" name="Rectangle 1"/>
@@ -8183,6 +7306,7 @@
                 </a:solidFill>
               </a:defRPr>
             </a:pPr>
+            <a:endParaRPr/>
           </a:p>
           <a:p>
             <a:pPr>
@@ -8234,6 +7358,7 @@
                 </a:solidFill>
               </a:defRPr>
             </a:pPr>
+            <a:endParaRPr/>
           </a:p>
           <a:p>
             <a:pPr>
@@ -8285,6 +7410,7 @@
                 </a:solidFill>
               </a:defRPr>
             </a:pPr>
+            <a:endParaRPr/>
           </a:p>
           <a:p>
             <a:pPr>
@@ -8336,6 +7462,7 @@
                 </a:solidFill>
               </a:defRPr>
             </a:pPr>
+            <a:endParaRPr/>
           </a:p>
           <a:p>
             <a:pPr>
@@ -8371,246 +7498,6 @@
             </a:pPr>
             <a:r>
               <a:t>  • Wine, chocolate, treats - the cost of living, not just surviving</a:t>
-            </a:r>
-          </a:p>
-        </p:txBody>
-      </p:sp>
-    </p:spTree>
-  </p:cSld>
-  <p:clrMapOvr>
-    <a:masterClrMapping/>
-  </p:clrMapOvr>
-</p:sld>
-</file>
-
-<file path=ppt/slides/slide30.xml><?xml version="1.0" encoding="utf-8"?>
-<p:sld xmlns:a="http://schemas.openxmlformats.org/drawingml/2006/main" xmlns:p="http://schemas.openxmlformats.org/presentationml/2006/main" xmlns:r="http://schemas.openxmlformats.org/officeDocument/2006/relationships">
-  <p:cSld>
-    <p:bg>
-      <p:bgPr>
-        <a:solidFill>
-          <a:srgbClr val="F5F5F5"/>
-        </a:solidFill>
-        <a:effectLst/>
-      </p:bgPr>
-    </p:bg>
-    <p:spTree>
-      <p:nvGrpSpPr>
-        <p:cNvPr id="1" name=""/>
-        <p:cNvGrpSpPr/>
-        <p:nvPr/>
-      </p:nvGrpSpPr>
-      <p:grpSpPr/>
-      <p:sp>
-        <p:nvSpPr>
-          <p:cNvPr id="2" name="TextBox 1"/>
-          <p:cNvSpPr txBox="1"/>
-          <p:nvPr/>
-        </p:nvSpPr>
-        <p:spPr>
-          <a:xfrm>
-            <a:off x="457200" y="274320"/>
-            <a:ext cx="8229600" cy="548640"/>
-          </a:xfrm>
-          <a:prstGeom prst="rect">
-            <a:avLst/>
-          </a:prstGeom>
-          <a:noFill/>
-        </p:spPr>
-        <p:txBody>
-          <a:bodyPr wrap="none">
-            <a:spAutoFit/>
-          </a:bodyPr>
-          <a:lstStyle/>
-          <a:p>
-            <a:pPr>
-              <a:defRPr sz="3600" b="1">
-                <a:solidFill>
-                  <a:srgbClr val="1F4D76"/>
-                </a:solidFill>
-              </a:defRPr>
-            </a:pPr>
-            <a:r>
-              <a:t>Why This Matters: Poverty is Structural</a:t>
-            </a:r>
-          </a:p>
-        </p:txBody>
-      </p:sp>
-      <p:sp>
-        <p:nvSpPr>
-          <p:cNvPr id="3" name="TextBox 2"/>
-          <p:cNvSpPr txBox="1"/>
-          <p:nvPr/>
-        </p:nvSpPr>
-        <p:spPr>
-          <a:xfrm>
-            <a:off x="640080" y="1097280"/>
-            <a:ext cx="7863840" cy="4389120"/>
-          </a:xfrm>
-          <a:prstGeom prst="rect">
-            <a:avLst/>
-          </a:prstGeom>
-          <a:noFill/>
-        </p:spPr>
-        <p:txBody>
-          <a:bodyPr wrap="square">
-            <a:spAutoFit/>
-          </a:bodyPr>
-          <a:lstStyle/>
-          <a:p>
-            <a:pPr>
-              <a:defRPr sz="1400" b="1">
-                <a:solidFill>
-                  <a:srgbClr val="C80000"/>
-                </a:solidFill>
-              </a:defRPr>
-            </a:pPr>
-            <a:r>
-              <a:t>SMIC families cannot survive on SMIC income alone.</a:t>
-            </a:r>
-          </a:p>
-          <a:p>
-            <a:pPr>
-              <a:defRPr sz="1400">
-                <a:solidFill>
-                  <a:srgbClr val="000000"/>
-                </a:solidFill>
-              </a:defRPr>
-            </a:pPr>
-          </a:p>
-          <a:p>
-            <a:pPr>
-              <a:defRPr sz="1400">
-                <a:solidFill>
-                  <a:srgbClr val="000000"/>
-                </a:solidFill>
-              </a:defRPr>
-            </a:pPr>
-            <a:r>
-              <a:t>Government transfers (CAF, housing allowance: €300-550/month) are</a:t>
-            </a:r>
-          </a:p>
-          <a:p>
-            <a:pPr>
-              <a:defRPr sz="1400">
-                <a:solidFill>
-                  <a:srgbClr val="000000"/>
-                </a:solidFill>
-              </a:defRPr>
-            </a:pPr>
-            <a:r>
-              <a:t>structural survival requirement, not supplemental help.</a:t>
-            </a:r>
-          </a:p>
-          <a:p>
-            <a:pPr>
-              <a:defRPr sz="1400">
-                <a:solidFill>
-                  <a:srgbClr val="000000"/>
-                </a:solidFill>
-              </a:defRPr>
-            </a:pPr>
-          </a:p>
-          <a:p>
-            <a:pPr>
-              <a:defRPr sz="1400">
-                <a:solidFill>
-                  <a:srgbClr val="000000"/>
-                </a:solidFill>
-              </a:defRPr>
-            </a:pPr>
-            <a:r>
-              <a:t>With transfers, SMIC families break even with no margin for:</a:t>
-            </a:r>
-          </a:p>
-          <a:p>
-            <a:pPr>
-              <a:defRPr sz="1400">
-                <a:solidFill>
-                  <a:srgbClr val="646464"/>
-                </a:solidFill>
-              </a:defRPr>
-            </a:pPr>
-            <a:r>
-              <a:t>  • Emergencies (car repairs, medical events)</a:t>
-            </a:r>
-          </a:p>
-          <a:p>
-            <a:pPr>
-              <a:defRPr sz="1400">
-                <a:solidFill>
-                  <a:srgbClr val="646464"/>
-                </a:solidFill>
-              </a:defRPr>
-            </a:pPr>
-            <a:r>
-              <a:t>  • Savings (impossible)</a:t>
-            </a:r>
-          </a:p>
-          <a:p>
-            <a:pPr>
-              <a:defRPr sz="1400">
-                <a:solidFill>
-                  <a:srgbClr val="646464"/>
-                </a:solidFill>
-              </a:defRPr>
-            </a:pPr>
-            <a:r>
-              <a:t>  • Family composition changes (baby, aging parent)</a:t>
-            </a:r>
-          </a:p>
-          <a:p>
-            <a:pPr>
-              <a:defRPr sz="1400">
-                <a:solidFill>
-                  <a:srgbClr val="000000"/>
-                </a:solidFill>
-              </a:defRPr>
-            </a:pPr>
-          </a:p>
-          <a:p>
-            <a:pPr>
-              <a:defRPr sz="1400">
-                <a:solidFill>
-                  <a:srgbClr val="000000"/>
-                </a:solidFill>
-              </a:defRPr>
-            </a:pPr>
-            <a:r>
-              <a:t>When composition changes occur (teenage child costs €3,461/year more),</a:t>
-            </a:r>
-          </a:p>
-          <a:p>
-            <a:pPr>
-              <a:defRPr sz="1400" b="1">
-                <a:solidFill>
-                  <a:srgbClr val="C80000"/>
-                </a:solidFill>
-              </a:defRPr>
-            </a:pPr>
-            <a:r>
-              <a:t>SMIC families have NO margin to absorb the cost.</a:t>
-            </a:r>
-          </a:p>
-          <a:p>
-            <a:pPr>
-              <a:defRPr sz="1400">
-                <a:solidFill>
-                  <a:srgbClr val="000000"/>
-                </a:solidFill>
-              </a:defRPr>
-            </a:pPr>
-          </a:p>
-          <a:p>
-            <a:pPr>
-              <a:defRPr sz="1400" b="1">
-                <a:solidFill>
-                  <a:srgbClr val="C80000"/>
-                </a:solidFill>
-              </a:defRPr>
-            </a:pPr>
-            <a:r>
-              <a:t>Result: Debt accumulation OR going without essentials</a:t>
             </a:r>
           </a:p>
         </p:txBody>
@@ -8624,7 +7511,7 @@
 </file>
 
 <file path=ppt/slides/slide4.xml><?xml version="1.0" encoding="utf-8"?>
-<p:sld xmlns:a="http://schemas.openxmlformats.org/drawingml/2006/main" xmlns:p="http://schemas.openxmlformats.org/presentationml/2006/main" xmlns:r="http://schemas.openxmlformats.org/officeDocument/2006/relationships">
+<p:sld xmlns:a="http://schemas.openxmlformats.org/drawingml/2006/main" xmlns:r="http://schemas.openxmlformats.org/officeDocument/2006/relationships" xmlns:p="http://schemas.openxmlformats.org/presentationml/2006/main">
   <p:cSld>
     <p:bg>
       <p:bgPr>
@@ -8640,7 +7527,14 @@
         <p:cNvGrpSpPr/>
         <p:nvPr/>
       </p:nvGrpSpPr>
-      <p:grpSpPr/>
+      <p:grpSpPr>
+        <a:xfrm>
+          <a:off x="0" y="0"/>
+          <a:ext cx="0" cy="0"/>
+          <a:chOff x="0" y="0"/>
+          <a:chExt cx="0" cy="0"/>
+        </a:xfrm>
+      </p:grpSpPr>
       <p:sp>
         <p:nvSpPr>
           <p:cNvPr id="2" name="Rectangle 1"/>
@@ -8703,7 +7597,13 @@
       </p:sp>
       <p:pic>
         <p:nvPicPr>
-          <p:cNvPr id="3" name="Picture 2" descr="01_basket_comparison.png"/>
+          <p:cNvPr id="5" name="Picture 4">
+            <a:extLst>
+              <a:ext uri="{FF2B5EF4-FFF2-40B4-BE49-F238E27FC236}">
+                <a16:creationId xmlns:a16="http://schemas.microsoft.com/office/drawing/2014/main" id="{746C60CB-13CA-30D4-CECE-D387DBF53EF0}"/>
+              </a:ext>
+            </a:extLst>
+          </p:cNvPr>
           <p:cNvPicPr>
             <a:picLocks noChangeAspect="1"/>
           </p:cNvPicPr>
@@ -8717,8 +7617,8 @@
         </p:blipFill>
         <p:spPr>
           <a:xfrm>
-            <a:off x="457200" y="1188720"/>
-            <a:ext cx="11171556" cy="4754880"/>
+            <a:off x="0" y="1523693"/>
+            <a:ext cx="9144000" cy="3810613"/>
           </a:xfrm>
           <a:prstGeom prst="rect">
             <a:avLst/>
@@ -8734,7 +7634,7 @@
 </file>
 
 <file path=ppt/slides/slide5.xml><?xml version="1.0" encoding="utf-8"?>
-<p:sld xmlns:a="http://schemas.openxmlformats.org/drawingml/2006/main" xmlns:p="http://schemas.openxmlformats.org/presentationml/2006/main" xmlns:r="http://schemas.openxmlformats.org/officeDocument/2006/relationships">
+<p:sld xmlns:a="http://schemas.openxmlformats.org/drawingml/2006/main" xmlns:r="http://schemas.openxmlformats.org/officeDocument/2006/relationships" xmlns:p="http://schemas.openxmlformats.org/presentationml/2006/main">
   <p:cSld>
     <p:bg>
       <p:bgPr>
@@ -8750,7 +7650,14 @@
         <p:cNvGrpSpPr/>
         <p:nvPr/>
       </p:nvGrpSpPr>
-      <p:grpSpPr/>
+      <p:grpSpPr>
+        <a:xfrm>
+          <a:off x="0" y="0"/>
+          <a:ext cx="0" cy="0"/>
+          <a:chOff x="0" y="0"/>
+          <a:chExt cx="0" cy="0"/>
+        </a:xfrm>
+      </p:grpSpPr>
       <p:sp>
         <p:nvSpPr>
           <p:cNvPr id="2" name="TextBox 1"/>
@@ -8760,7 +7667,7 @@
         <p:spPr>
           <a:xfrm>
             <a:off x="914400" y="2286000"/>
-            <a:ext cx="7315200" cy="2286000"/>
+            <a:ext cx="7315200" cy="1754326"/>
           </a:xfrm>
           <a:prstGeom prst="rect">
             <a:avLst/>
@@ -8781,46 +7688,15 @@
               </a:defRPr>
             </a:pPr>
             <a:r>
+              <a:rPr sz="3600" dirty="0"/>
               <a:t>Official inflation rates are built on incomplete baskets.</a:t>
             </a:r>
-            <a:br/>
-            <a:r>
+            <a:br>
+              <a:rPr sz="3600" dirty="0"/>
+            </a:br>
+            <a:r>
+              <a:rPr sz="3600" dirty="0"/>
               <a:t>They measure SURVIVAL, not LIVING.</a:t>
-            </a:r>
-          </a:p>
-        </p:txBody>
-      </p:sp>
-      <p:sp>
-        <p:nvSpPr>
-          <p:cNvPr id="3" name="TextBox 2"/>
-          <p:cNvSpPr txBox="1"/>
-          <p:nvPr/>
-        </p:nvSpPr>
-        <p:spPr>
-          <a:xfrm>
-            <a:off x="914400" y="4754880"/>
-            <a:ext cx="7315200" cy="914400"/>
-          </a:xfrm>
-          <a:prstGeom prst="rect">
-            <a:avLst/>
-          </a:prstGeom>
-          <a:noFill/>
-        </p:spPr>
-        <p:txBody>
-          <a:bodyPr wrap="none">
-            <a:spAutoFit/>
-          </a:bodyPr>
-          <a:lstStyle/>
-          <a:p>
-            <a:pPr algn="ctr">
-              <a:defRPr sz="2000">
-                <a:solidFill>
-                  <a:srgbClr val="FFFFFF"/>
-                </a:solidFill>
-              </a:defRPr>
-            </a:pPr>
-            <a:r>
-              <a:t>CLICHE INSIGHT #1: The Incomplete Statistic</a:t>
             </a:r>
           </a:p>
         </p:txBody>
@@ -8834,7 +7710,7 @@
 </file>
 
 <file path=ppt/slides/slide6.xml><?xml version="1.0" encoding="utf-8"?>
-<p:sld xmlns:a="http://schemas.openxmlformats.org/drawingml/2006/main" xmlns:p="http://schemas.openxmlformats.org/presentationml/2006/main" xmlns:r="http://schemas.openxmlformats.org/officeDocument/2006/relationships">
+<p:sld xmlns:a="http://schemas.openxmlformats.org/drawingml/2006/main" xmlns:r="http://schemas.openxmlformats.org/officeDocument/2006/relationships" xmlns:p="http://schemas.openxmlformats.org/presentationml/2006/main">
   <p:cSld>
     <p:bg>
       <p:bgPr>
@@ -8850,7 +7726,138 @@
         <p:cNvGrpSpPr/>
         <p:nvPr/>
       </p:nvGrpSpPr>
-      <p:grpSpPr/>
+      <p:grpSpPr>
+        <a:xfrm>
+          <a:off x="0" y="0"/>
+          <a:ext cx="0" cy="0"/>
+          <a:chOff x="0" y="0"/>
+          <a:chExt cx="0" cy="0"/>
+        </a:xfrm>
+      </p:grpSpPr>
+      <p:sp>
+        <p:nvSpPr>
+          <p:cNvPr id="2" name="Rectangle 1"/>
+          <p:cNvSpPr/>
+          <p:nvPr/>
+        </p:nvSpPr>
+        <p:spPr>
+          <a:xfrm>
+            <a:off x="0" y="0"/>
+            <a:ext cx="9144000" cy="1183172"/>
+          </a:xfrm>
+          <a:prstGeom prst="rect">
+            <a:avLst/>
+          </a:prstGeom>
+          <a:solidFill>
+            <a:srgbClr val="1F4E79"/>
+          </a:solidFill>
+          <a:ln>
+            <a:solidFill>
+              <a:srgbClr val="1F4E79"/>
+            </a:solidFill>
+          </a:ln>
+        </p:spPr>
+        <p:style>
+          <a:lnRef idx="1">
+            <a:schemeClr val="accent1"/>
+          </a:lnRef>
+          <a:fillRef idx="3">
+            <a:schemeClr val="accent1"/>
+          </a:fillRef>
+          <a:effectRef idx="2">
+            <a:schemeClr val="accent1"/>
+          </a:effectRef>
+          <a:fontRef idx="minor">
+            <a:schemeClr val="lt1"/>
+          </a:fontRef>
+        </p:style>
+        <p:txBody>
+          <a:bodyPr rtlCol="0" anchor="ctr"/>
+          <a:lstStyle/>
+          <a:p>
+            <a:pPr algn="ctr">
+              <a:spcBef>
+                <a:spcPts val="1200"/>
+              </a:spcBef>
+              <a:spcAft>
+                <a:spcPts val="1200"/>
+              </a:spcAft>
+              <a:defRPr sz="4400" b="1">
+                <a:solidFill>
+                  <a:srgbClr val="FFFFFF"/>
+                </a:solidFill>
+              </a:defRPr>
+            </a:pPr>
+            <a:r>
+              <a:rPr dirty="0"/>
+              <a:t>The Affordability Cliff: When Real Costs Exceed Means</a:t>
+            </a:r>
+          </a:p>
+        </p:txBody>
+      </p:sp>
+      <p:pic>
+        <p:nvPicPr>
+          <p:cNvPr id="5" name="Picture 4">
+            <a:extLst>
+              <a:ext uri="{FF2B5EF4-FFF2-40B4-BE49-F238E27FC236}">
+                <a16:creationId xmlns:a16="http://schemas.microsoft.com/office/drawing/2014/main" id="{E3E7B35E-30DE-22DC-4334-738104DD70BD}"/>
+              </a:ext>
+            </a:extLst>
+          </p:cNvPr>
+          <p:cNvPicPr>
+            <a:picLocks noChangeAspect="1"/>
+          </p:cNvPicPr>
+          <p:nvPr/>
+        </p:nvPicPr>
+        <p:blipFill>
+          <a:blip r:embed="rId2"/>
+          <a:stretch>
+            <a:fillRect/>
+          </a:stretch>
+        </p:blipFill>
+        <p:spPr>
+          <a:xfrm>
+            <a:off x="0" y="1542400"/>
+            <a:ext cx="9144000" cy="4491655"/>
+          </a:xfrm>
+          <a:prstGeom prst="rect">
+            <a:avLst/>
+          </a:prstGeom>
+        </p:spPr>
+      </p:pic>
+    </p:spTree>
+  </p:cSld>
+  <p:clrMapOvr>
+    <a:masterClrMapping/>
+  </p:clrMapOvr>
+</p:sld>
+</file>
+
+<file path=ppt/slides/slide7.xml><?xml version="1.0" encoding="utf-8"?>
+<p:sld xmlns:a="http://schemas.openxmlformats.org/drawingml/2006/main" xmlns:r="http://schemas.openxmlformats.org/officeDocument/2006/relationships" xmlns:p="http://schemas.openxmlformats.org/presentationml/2006/main">
+  <p:cSld>
+    <p:bg>
+      <p:bgPr>
+        <a:solidFill>
+          <a:srgbClr val="FFFFFF"/>
+        </a:solidFill>
+        <a:effectLst/>
+      </p:bgPr>
+    </p:bg>
+    <p:spTree>
+      <p:nvGrpSpPr>
+        <p:cNvPr id="1" name=""/>
+        <p:cNvGrpSpPr/>
+        <p:nvPr/>
+      </p:nvGrpSpPr>
+      <p:grpSpPr>
+        <a:xfrm>
+          <a:off x="0" y="0"/>
+          <a:ext cx="0" cy="0"/>
+          <a:chOff x="0" y="0"/>
+          <a:chExt cx="0" cy="0"/>
+        </a:xfrm>
+      </p:grpSpPr>
       <p:sp>
         <p:nvSpPr>
           <p:cNvPr id="2" name="Rectangle 1"/>
@@ -8906,35 +7913,210 @@
               </a:defRPr>
             </a:pPr>
             <a:r>
-              <a:t>The Affordability Cliff: When Real Costs Exceed Means</a:t>
-            </a:r>
-          </a:p>
-        </p:txBody>
-      </p:sp>
-      <p:pic>
-        <p:nvPicPr>
-          <p:cNvPr id="3" name="Picture 2" descr="02_affordability_cliffs.png"/>
-          <p:cNvPicPr>
-            <a:picLocks noChangeAspect="1"/>
-          </p:cNvPicPr>
+              <a:t>Affordability by Paris Income Level</a:t>
+            </a:r>
+          </a:p>
+        </p:txBody>
+      </p:sp>
+      <p:sp>
+        <p:nvSpPr>
+          <p:cNvPr id="3" name="TextBox 2"/>
+          <p:cNvSpPr txBox="1"/>
           <p:nvPr/>
-        </p:nvPicPr>
-        <p:blipFill>
-          <a:blip r:embed="rId2"/>
-          <a:stretch>
-            <a:fillRect/>
-          </a:stretch>
-        </p:blipFill>
+        </p:nvSpPr>
         <p:spPr>
           <a:xfrm>
-            <a:off x="457200" y="1188720"/>
-            <a:ext cx="9758194" cy="4846320"/>
+            <a:off x="731520" y="1188720"/>
+            <a:ext cx="7680960" cy="5212080"/>
           </a:xfrm>
           <a:prstGeom prst="rect">
             <a:avLst/>
           </a:prstGeom>
+          <a:noFill/>
         </p:spPr>
-      </p:pic>
+        <p:txBody>
+          <a:bodyPr wrap="square">
+            <a:spAutoFit/>
+          </a:bodyPr>
+          <a:lstStyle/>
+          <a:p>
+            <a:pPr>
+              <a:spcBef>
+                <a:spcPts val="600"/>
+              </a:spcBef>
+              <a:spcAft>
+                <a:spcPts val="800"/>
+              </a:spcAft>
+              <a:defRPr sz="2000">
+                <a:solidFill>
+                  <a:srgbClr val="333333"/>
+                </a:solidFill>
+              </a:defRPr>
+            </a:pPr>
+            <a:r>
+              <a:t>SMIC WORKERS (21,000 EUR/year):</a:t>
+            </a:r>
+          </a:p>
+          <a:p>
+            <a:pPr>
+              <a:spcBef>
+                <a:spcPts val="600"/>
+              </a:spcBef>
+              <a:spcAft>
+                <a:spcPts val="800"/>
+              </a:spcAft>
+              <a:defRPr sz="2000">
+                <a:solidFill>
+                  <a:srgbClr val="333333"/>
+                </a:solidFill>
+              </a:defRPr>
+            </a:pPr>
+            <a:r>
+              <a:t>  • Official basket: 9% of income (MANAGEABLE)</a:t>
+            </a:r>
+          </a:p>
+          <a:p>
+            <a:pPr>
+              <a:spcBef>
+                <a:spcPts val="600"/>
+              </a:spcBef>
+              <a:spcAft>
+                <a:spcPts val="800"/>
+              </a:spcAft>
+              <a:defRPr sz="2000">
+                <a:solidFill>
+                  <a:srgbClr val="333333"/>
+                </a:solidFill>
+              </a:defRPr>
+            </a:pPr>
+            <a:r>
+              <a:t>  • Real complete basket: 18% of income (DIFFICULT)</a:t>
+            </a:r>
+          </a:p>
+          <a:p>
+            <a:pPr>
+              <a:spcBef>
+                <a:spcPts val="600"/>
+              </a:spcBef>
+              <a:spcAft>
+                <a:spcPts val="800"/>
+              </a:spcAft>
+              <a:defRPr sz="2000">
+                <a:solidFill>
+                  <a:srgbClr val="333333"/>
+                </a:solidFill>
+              </a:defRPr>
+            </a:pPr>
+            <a:r>
+              <a:t>  • Healthy basket: 24% of income (CRISIS - NO MONEY FOR ANYTHING ELSE)</a:t>
+            </a:r>
+          </a:p>
+          <a:p>
+            <a:pPr>
+              <a:spcBef>
+                <a:spcPts val="600"/>
+              </a:spcBef>
+              <a:spcAft>
+                <a:spcPts val="800"/>
+              </a:spcAft>
+              <a:defRPr sz="2000">
+                <a:solidFill>
+                  <a:srgbClr val="333333"/>
+                </a:solidFill>
+              </a:defRPr>
+            </a:pPr>
+            <a:endParaRPr/>
+          </a:p>
+          <a:p>
+            <a:pPr>
+              <a:spcBef>
+                <a:spcPts val="600"/>
+              </a:spcBef>
+              <a:spcAft>
+                <a:spcPts val="800"/>
+              </a:spcAft>
+              <a:defRPr sz="2000">
+                <a:solidFill>
+                  <a:srgbClr val="333333"/>
+                </a:solidFill>
+              </a:defRPr>
+            </a:pPr>
+            <a:r>
+              <a:t>MEDIAN PARIS (42,000 EUR/year):</a:t>
+            </a:r>
+          </a:p>
+          <a:p>
+            <a:pPr>
+              <a:spcBef>
+                <a:spcPts val="600"/>
+              </a:spcBef>
+              <a:spcAft>
+                <a:spcPts val="800"/>
+              </a:spcAft>
+              <a:defRPr sz="2000">
+                <a:solidFill>
+                  <a:srgbClr val="333333"/>
+                </a:solidFill>
+              </a:defRPr>
+            </a:pPr>
+            <a:r>
+              <a:t>  • Real basket: 9% of income (MANAGEABLE)</a:t>
+            </a:r>
+          </a:p>
+          <a:p>
+            <a:pPr>
+              <a:spcBef>
+                <a:spcPts val="600"/>
+              </a:spcBef>
+              <a:spcAft>
+                <a:spcPts val="800"/>
+              </a:spcAft>
+              <a:defRPr sz="2000">
+                <a:solidFill>
+                  <a:srgbClr val="333333"/>
+                </a:solidFill>
+              </a:defRPr>
+            </a:pPr>
+            <a:r>
+              <a:t>  • Healthy basket: 12% of income (TIGHT)</a:t>
+            </a:r>
+          </a:p>
+          <a:p>
+            <a:pPr>
+              <a:spcBef>
+                <a:spcPts val="600"/>
+              </a:spcBef>
+              <a:spcAft>
+                <a:spcPts val="800"/>
+              </a:spcAft>
+              <a:defRPr sz="2000">
+                <a:solidFill>
+                  <a:srgbClr val="333333"/>
+                </a:solidFill>
+              </a:defRPr>
+            </a:pPr>
+            <a:endParaRPr/>
+          </a:p>
+          <a:p>
+            <a:pPr>
+              <a:spcBef>
+                <a:spcPts val="600"/>
+              </a:spcBef>
+              <a:spcAft>
+                <a:spcPts val="800"/>
+              </a:spcAft>
+              <a:defRPr sz="2000">
+                <a:solidFill>
+                  <a:srgbClr val="333333"/>
+                </a:solidFill>
+              </a:defRPr>
+            </a:pPr>
+            <a:r>
+              <a:t>THE CLIFF: Below 40k EUR annual income, healthy eating becomes IMPOSSIBLE</a:t>
+            </a:r>
+          </a:p>
+        </p:txBody>
+      </p:sp>
     </p:spTree>
   </p:cSld>
   <p:clrMapOvr>
@@ -8943,8 +8125,91 @@
 </p:sld>
 </file>
 
-<file path=ppt/slides/slide7.xml><?xml version="1.0" encoding="utf-8"?>
-<p:sld xmlns:a="http://schemas.openxmlformats.org/drawingml/2006/main" xmlns:p="http://schemas.openxmlformats.org/presentationml/2006/main" xmlns:r="http://schemas.openxmlformats.org/officeDocument/2006/relationships">
+<file path=ppt/slides/slide8.xml><?xml version="1.0" encoding="utf-8"?>
+<p:sld xmlns:a="http://schemas.openxmlformats.org/drawingml/2006/main" xmlns:r="http://schemas.openxmlformats.org/officeDocument/2006/relationships" xmlns:p="http://schemas.openxmlformats.org/presentationml/2006/main">
+  <p:cSld>
+    <p:bg>
+      <p:bgPr>
+        <a:solidFill>
+          <a:srgbClr val="1F4E79"/>
+        </a:solidFill>
+        <a:effectLst/>
+      </p:bgPr>
+    </p:bg>
+    <p:spTree>
+      <p:nvGrpSpPr>
+        <p:cNvPr id="1" name=""/>
+        <p:cNvGrpSpPr/>
+        <p:nvPr/>
+      </p:nvGrpSpPr>
+      <p:grpSpPr>
+        <a:xfrm>
+          <a:off x="0" y="0"/>
+          <a:ext cx="0" cy="0"/>
+          <a:chOff x="0" y="0"/>
+          <a:chExt cx="0" cy="0"/>
+        </a:xfrm>
+      </p:grpSpPr>
+      <p:sp>
+        <p:nvSpPr>
+          <p:cNvPr id="2" name="TextBox 1"/>
+          <p:cNvSpPr txBox="1"/>
+          <p:nvPr/>
+        </p:nvSpPr>
+        <p:spPr>
+          <a:xfrm>
+            <a:off x="914400" y="2286000"/>
+            <a:ext cx="7315200" cy="2554545"/>
+          </a:xfrm>
+          <a:prstGeom prst="rect">
+            <a:avLst/>
+          </a:prstGeom>
+          <a:noFill/>
+        </p:spPr>
+        <p:txBody>
+          <a:bodyPr wrap="square">
+            <a:spAutoFit/>
+          </a:bodyPr>
+          <a:lstStyle/>
+          <a:p>
+            <a:pPr algn="ctr">
+              <a:defRPr sz="3200" b="1" i="1">
+                <a:solidFill>
+                  <a:srgbClr val="ED7D31"/>
+                </a:solidFill>
+              </a:defRPr>
+            </a:pPr>
+            <a:r>
+              <a:rPr sz="4000" dirty="0"/>
+              <a:t>Healthy eating is a luxury.</a:t>
+            </a:r>
+            <a:br>
+              <a:rPr sz="4000" dirty="0"/>
+            </a:br>
+            <a:r>
+              <a:rPr sz="4000" dirty="0"/>
+              <a:t>The poor must eat cheap (unhealthy).</a:t>
+            </a:r>
+            <a:br>
+              <a:rPr sz="4000" dirty="0"/>
+            </a:br>
+            <a:r>
+              <a:rPr sz="4000" dirty="0"/>
+              <a:t>The wealthy eat well.</a:t>
+            </a:r>
+          </a:p>
+        </p:txBody>
+      </p:sp>
+    </p:spTree>
+  </p:cSld>
+  <p:clrMapOvr>
+    <a:masterClrMapping/>
+  </p:clrMapOvr>
+</p:sld>
+</file>
+
+<file path=ppt/slides/slide9.xml><?xml version="1.0" encoding="utf-8"?>
+<p:sld xmlns:a="http://schemas.openxmlformats.org/drawingml/2006/main" xmlns:r="http://schemas.openxmlformats.org/officeDocument/2006/relationships" xmlns:p="http://schemas.openxmlformats.org/presentationml/2006/main">
   <p:cSld>
     <p:bg>
       <p:bgPr>
@@ -8960,7 +8225,14 @@
         <p:cNvGrpSpPr/>
         <p:nvPr/>
       </p:nvGrpSpPr>
-      <p:grpSpPr/>
+      <p:grpSpPr>
+        <a:xfrm>
+          <a:off x="0" y="0"/>
+          <a:ext cx="0" cy="0"/>
+          <a:chOff x="0" y="0"/>
+          <a:chExt cx="0" cy="0"/>
+        </a:xfrm>
+      </p:grpSpPr>
       <p:sp>
         <p:nvSpPr>
           <p:cNvPr id="2" name="Rectangle 1"/>
@@ -9016,393 +8288,6 @@
               </a:defRPr>
             </a:pPr>
             <a:r>
-              <a:t>Affordability by Paris Income Level</a:t>
-            </a:r>
-          </a:p>
-        </p:txBody>
-      </p:sp>
-      <p:sp>
-        <p:nvSpPr>
-          <p:cNvPr id="3" name="TextBox 2"/>
-          <p:cNvSpPr txBox="1"/>
-          <p:nvPr/>
-        </p:nvSpPr>
-        <p:spPr>
-          <a:xfrm>
-            <a:off x="731520" y="1188720"/>
-            <a:ext cx="7680960" cy="5212080"/>
-          </a:xfrm>
-          <a:prstGeom prst="rect">
-            <a:avLst/>
-          </a:prstGeom>
-          <a:noFill/>
-        </p:spPr>
-        <p:txBody>
-          <a:bodyPr wrap="square">
-            <a:spAutoFit/>
-          </a:bodyPr>
-          <a:lstStyle/>
-          <a:p>
-            <a:pPr>
-              <a:spcBef>
-                <a:spcPts val="600"/>
-              </a:spcBef>
-              <a:spcAft>
-                <a:spcPts val="800"/>
-              </a:spcAft>
-              <a:defRPr sz="2000">
-                <a:solidFill>
-                  <a:srgbClr val="333333"/>
-                </a:solidFill>
-              </a:defRPr>
-            </a:pPr>
-            <a:r>
-              <a:t>SMIC WORKERS (21,000 EUR/year):</a:t>
-            </a:r>
-          </a:p>
-          <a:p>
-            <a:pPr>
-              <a:spcBef>
-                <a:spcPts val="600"/>
-              </a:spcBef>
-              <a:spcAft>
-                <a:spcPts val="800"/>
-              </a:spcAft>
-              <a:defRPr sz="2000">
-                <a:solidFill>
-                  <a:srgbClr val="333333"/>
-                </a:solidFill>
-              </a:defRPr>
-            </a:pPr>
-            <a:r>
-              <a:t>  • Official basket: 9% of income (MANAGEABLE)</a:t>
-            </a:r>
-          </a:p>
-          <a:p>
-            <a:pPr>
-              <a:spcBef>
-                <a:spcPts val="600"/>
-              </a:spcBef>
-              <a:spcAft>
-                <a:spcPts val="800"/>
-              </a:spcAft>
-              <a:defRPr sz="2000">
-                <a:solidFill>
-                  <a:srgbClr val="333333"/>
-                </a:solidFill>
-              </a:defRPr>
-            </a:pPr>
-            <a:r>
-              <a:t>  • Real complete basket: 18% of income (DIFFICULT)</a:t>
-            </a:r>
-          </a:p>
-          <a:p>
-            <a:pPr>
-              <a:spcBef>
-                <a:spcPts val="600"/>
-              </a:spcBef>
-              <a:spcAft>
-                <a:spcPts val="800"/>
-              </a:spcAft>
-              <a:defRPr sz="2000">
-                <a:solidFill>
-                  <a:srgbClr val="333333"/>
-                </a:solidFill>
-              </a:defRPr>
-            </a:pPr>
-            <a:r>
-              <a:t>  • Healthy basket: 24% of income (CRISIS - NO MONEY FOR ANYTHING ELSE)</a:t>
-            </a:r>
-          </a:p>
-          <a:p>
-            <a:pPr>
-              <a:spcBef>
-                <a:spcPts val="600"/>
-              </a:spcBef>
-              <a:spcAft>
-                <a:spcPts val="800"/>
-              </a:spcAft>
-              <a:defRPr sz="2000">
-                <a:solidFill>
-                  <a:srgbClr val="333333"/>
-                </a:solidFill>
-              </a:defRPr>
-            </a:pPr>
-          </a:p>
-          <a:p>
-            <a:pPr>
-              <a:spcBef>
-                <a:spcPts val="600"/>
-              </a:spcBef>
-              <a:spcAft>
-                <a:spcPts val="800"/>
-              </a:spcAft>
-              <a:defRPr sz="2000">
-                <a:solidFill>
-                  <a:srgbClr val="333333"/>
-                </a:solidFill>
-              </a:defRPr>
-            </a:pPr>
-            <a:r>
-              <a:t>MEDIAN PARIS (42,000 EUR/year):</a:t>
-            </a:r>
-          </a:p>
-          <a:p>
-            <a:pPr>
-              <a:spcBef>
-                <a:spcPts val="600"/>
-              </a:spcBef>
-              <a:spcAft>
-                <a:spcPts val="800"/>
-              </a:spcAft>
-              <a:defRPr sz="2000">
-                <a:solidFill>
-                  <a:srgbClr val="333333"/>
-                </a:solidFill>
-              </a:defRPr>
-            </a:pPr>
-            <a:r>
-              <a:t>  • Real basket: 9% of income (MANAGEABLE)</a:t>
-            </a:r>
-          </a:p>
-          <a:p>
-            <a:pPr>
-              <a:spcBef>
-                <a:spcPts val="600"/>
-              </a:spcBef>
-              <a:spcAft>
-                <a:spcPts val="800"/>
-              </a:spcAft>
-              <a:defRPr sz="2000">
-                <a:solidFill>
-                  <a:srgbClr val="333333"/>
-                </a:solidFill>
-              </a:defRPr>
-            </a:pPr>
-            <a:r>
-              <a:t>  • Healthy basket: 12% of income (TIGHT)</a:t>
-            </a:r>
-          </a:p>
-          <a:p>
-            <a:pPr>
-              <a:spcBef>
-                <a:spcPts val="600"/>
-              </a:spcBef>
-              <a:spcAft>
-                <a:spcPts val="800"/>
-              </a:spcAft>
-              <a:defRPr sz="2000">
-                <a:solidFill>
-                  <a:srgbClr val="333333"/>
-                </a:solidFill>
-              </a:defRPr>
-            </a:pPr>
-          </a:p>
-          <a:p>
-            <a:pPr>
-              <a:spcBef>
-                <a:spcPts val="600"/>
-              </a:spcBef>
-              <a:spcAft>
-                <a:spcPts val="800"/>
-              </a:spcAft>
-              <a:defRPr sz="2000">
-                <a:solidFill>
-                  <a:srgbClr val="333333"/>
-                </a:solidFill>
-              </a:defRPr>
-            </a:pPr>
-            <a:r>
-              <a:t>THE CLIFF: Below 40k EUR annual income, healthy eating becomes IMPOSSIBLE</a:t>
-            </a:r>
-          </a:p>
-        </p:txBody>
-      </p:sp>
-    </p:spTree>
-  </p:cSld>
-  <p:clrMapOvr>
-    <a:masterClrMapping/>
-  </p:clrMapOvr>
-</p:sld>
-</file>
-
-<file path=ppt/slides/slide8.xml><?xml version="1.0" encoding="utf-8"?>
-<p:sld xmlns:a="http://schemas.openxmlformats.org/drawingml/2006/main" xmlns:p="http://schemas.openxmlformats.org/presentationml/2006/main" xmlns:r="http://schemas.openxmlformats.org/officeDocument/2006/relationships">
-  <p:cSld>
-    <p:bg>
-      <p:bgPr>
-        <a:solidFill>
-          <a:srgbClr val="1F4E79"/>
-        </a:solidFill>
-        <a:effectLst/>
-      </p:bgPr>
-    </p:bg>
-    <p:spTree>
-      <p:nvGrpSpPr>
-        <p:cNvPr id="1" name=""/>
-        <p:cNvGrpSpPr/>
-        <p:nvPr/>
-      </p:nvGrpSpPr>
-      <p:grpSpPr/>
-      <p:sp>
-        <p:nvSpPr>
-          <p:cNvPr id="2" name="TextBox 1"/>
-          <p:cNvSpPr txBox="1"/>
-          <p:nvPr/>
-        </p:nvSpPr>
-        <p:spPr>
-          <a:xfrm>
-            <a:off x="914400" y="2286000"/>
-            <a:ext cx="7315200" cy="2286000"/>
-          </a:xfrm>
-          <a:prstGeom prst="rect">
-            <a:avLst/>
-          </a:prstGeom>
-          <a:noFill/>
-        </p:spPr>
-        <p:txBody>
-          <a:bodyPr wrap="square">
-            <a:spAutoFit/>
-          </a:bodyPr>
-          <a:lstStyle/>
-          <a:p>
-            <a:pPr algn="ctr">
-              <a:defRPr sz="3200" b="1" i="1">
-                <a:solidFill>
-                  <a:srgbClr val="ED7D31"/>
-                </a:solidFill>
-              </a:defRPr>
-            </a:pPr>
-            <a:r>
-              <a:t>Healthy eating is a luxury.</a:t>
-            </a:r>
-            <a:br/>
-            <a:r>
-              <a:t>The poor must eat cheap (unhealthy).</a:t>
-            </a:r>
-            <a:br/>
-            <a:r>
-              <a:t>The wealthy eat well.</a:t>
-            </a:r>
-          </a:p>
-        </p:txBody>
-      </p:sp>
-      <p:sp>
-        <p:nvSpPr>
-          <p:cNvPr id="3" name="TextBox 2"/>
-          <p:cNvSpPr txBox="1"/>
-          <p:nvPr/>
-        </p:nvSpPr>
-        <p:spPr>
-          <a:xfrm>
-            <a:off x="914400" y="4754880"/>
-            <a:ext cx="7315200" cy="914400"/>
-          </a:xfrm>
-          <a:prstGeom prst="rect">
-            <a:avLst/>
-          </a:prstGeom>
-          <a:noFill/>
-        </p:spPr>
-        <p:txBody>
-          <a:bodyPr wrap="none">
-            <a:spAutoFit/>
-          </a:bodyPr>
-          <a:lstStyle/>
-          <a:p>
-            <a:pPr algn="ctr">
-              <a:defRPr sz="2000">
-                <a:solidFill>
-                  <a:srgbClr val="FFFFFF"/>
-                </a:solidFill>
-              </a:defRPr>
-            </a:pPr>
-            <a:r>
-              <a:t>CLICHE INSIGHT #2: Health as Inequality</a:t>
-            </a:r>
-          </a:p>
-        </p:txBody>
-      </p:sp>
-    </p:spTree>
-  </p:cSld>
-  <p:clrMapOvr>
-    <a:masterClrMapping/>
-  </p:clrMapOvr>
-</p:sld>
-</file>
-
-<file path=ppt/slides/slide9.xml><?xml version="1.0" encoding="utf-8"?>
-<p:sld xmlns:a="http://schemas.openxmlformats.org/drawingml/2006/main" xmlns:p="http://schemas.openxmlformats.org/presentationml/2006/main" xmlns:r="http://schemas.openxmlformats.org/officeDocument/2006/relationships">
-  <p:cSld>
-    <p:bg>
-      <p:bgPr>
-        <a:solidFill>
-          <a:srgbClr val="FFFFFF"/>
-        </a:solidFill>
-        <a:effectLst/>
-      </p:bgPr>
-    </p:bg>
-    <p:spTree>
-      <p:nvGrpSpPr>
-        <p:cNvPr id="1" name=""/>
-        <p:cNvGrpSpPr/>
-        <p:nvPr/>
-      </p:nvGrpSpPr>
-      <p:grpSpPr/>
-      <p:sp>
-        <p:nvSpPr>
-          <p:cNvPr id="2" name="Rectangle 1"/>
-          <p:cNvSpPr/>
-          <p:nvPr/>
-        </p:nvSpPr>
-        <p:spPr>
-          <a:xfrm>
-            <a:off x="0" y="0"/>
-            <a:ext cx="9144000" cy="822960"/>
-          </a:xfrm>
-          <a:prstGeom prst="rect">
-            <a:avLst/>
-          </a:prstGeom>
-          <a:solidFill>
-            <a:srgbClr val="1F4E79"/>
-          </a:solidFill>
-          <a:ln>
-            <a:solidFill>
-              <a:srgbClr val="1F4E79"/>
-            </a:solidFill>
-          </a:ln>
-        </p:spPr>
-        <p:style>
-          <a:lnRef idx="1">
-            <a:schemeClr val="accent1"/>
-          </a:lnRef>
-          <a:fillRef idx="3">
-            <a:schemeClr val="accent1"/>
-          </a:fillRef>
-          <a:effectRef idx="2">
-            <a:schemeClr val="accent1"/>
-          </a:effectRef>
-          <a:fontRef idx="minor">
-            <a:schemeClr val="lt1"/>
-          </a:fontRef>
-        </p:style>
-        <p:txBody>
-          <a:bodyPr rtlCol="0" anchor="ctr"/>
-          <a:lstStyle/>
-          <a:p>
-            <a:pPr algn="ctr">
-              <a:spcBef>
-                <a:spcPts val="1200"/>
-              </a:spcBef>
-              <a:spcAft>
-                <a:spcPts val="1200"/>
-              </a:spcAft>
-              <a:defRPr sz="4400" b="1">
-                <a:solidFill>
-                  <a:srgbClr val="FFFFFF"/>
-                </a:solidFill>
-              </a:defRPr>
-            </a:pPr>
-            <a:r>
               <a:t>The Hidden Gap: What's Not Counted</a:t>
             </a:r>
           </a:p>
@@ -9410,7 +8295,13 @@
       </p:sp>
       <p:pic>
         <p:nvPicPr>
-          <p:cNvPr id="3" name="Picture 2" descr="03_gap_analysis.png"/>
+          <p:cNvPr id="5" name="Picture 4">
+            <a:extLst>
+              <a:ext uri="{FF2B5EF4-FFF2-40B4-BE49-F238E27FC236}">
+                <a16:creationId xmlns:a16="http://schemas.microsoft.com/office/drawing/2014/main" id="{DE77C219-816B-A66B-04F6-5C2928956944}"/>
+              </a:ext>
+            </a:extLst>
+          </p:cNvPr>
           <p:cNvPicPr>
             <a:picLocks noChangeAspect="1"/>
           </p:cNvPicPr>
@@ -9424,8 +8315,8 @@
         </p:blipFill>
         <p:spPr>
           <a:xfrm>
-            <a:off x="457200" y="1188720"/>
-            <a:ext cx="8377747" cy="4846320"/>
+            <a:off x="0" y="1300511"/>
+            <a:ext cx="9144000" cy="5236692"/>
           </a:xfrm>
           <a:prstGeom prst="rect">
             <a:avLst/>
